--- a/44_法務生成AI導入ロードマップ策定・推進/法務生成AIスライド作成/20260517_LegalAccess_法務AIロードマップ提案.pptx
+++ b/44_法務生成AI導入ロードマップ策定・推進/法務生成AIスライド作成/20260517_LegalAccess_法務AIロードマップ提案.pptx
@@ -5,21 +5,21 @@
     <p:sldMasterId id="2147483648" r:id="rId1"/>
   </p:sldMasterIdLst>
   <p:sldIdLst>
-    <p:sldId id="256" r:id="rId7"/>
-    <p:sldId id="257" r:id="rId8"/>
-    <p:sldId id="258" r:id="rId9"/>
-    <p:sldId id="259" r:id="rId10"/>
-    <p:sldId id="260" r:id="rId11"/>
-    <p:sldId id="261" r:id="rId12"/>
-    <p:sldId id="262" r:id="rId13"/>
-    <p:sldId id="263" r:id="rId14"/>
-    <p:sldId id="264" r:id="rId15"/>
-    <p:sldId id="265" r:id="rId16"/>
-    <p:sldId id="266" r:id="rId17"/>
-    <p:sldId id="267" r:id="rId18"/>
-    <p:sldId id="268" r:id="rId19"/>
+    <p:sldId id="256" r:id="rId2"/>
+    <p:sldId id="257" r:id="rId3"/>
+    <p:sldId id="258" r:id="rId4"/>
+    <p:sldId id="259" r:id="rId5"/>
+    <p:sldId id="260" r:id="rId6"/>
+    <p:sldId id="261" r:id="rId7"/>
+    <p:sldId id="262" r:id="rId8"/>
+    <p:sldId id="263" r:id="rId9"/>
+    <p:sldId id="264" r:id="rId10"/>
+    <p:sldId id="265" r:id="rId11"/>
+    <p:sldId id="266" r:id="rId12"/>
+    <p:sldId id="267" r:id="rId13"/>
+    <p:sldId id="268" r:id="rId14"/>
   </p:sldIdLst>
-  <p:sldSz cx="12192000" cy="6858000" type="screen4x3"/>
+  <p:sldSz cx="12192000" cy="6858000"/>
   <p:notesSz cx="6858000" cy="9144000"/>
   <p:defaultTextStyle>
     <a:defPPr>
@@ -116,6 +116,22 @@
       </a:defRPr>
     </a:lvl9pPr>
   </p:defaultTextStyle>
+  <p:extLst>
+    <p:ext uri="{EFAFB233-063F-42B5-8137-9DF3F51BA10A}">
+      <p15:sldGuideLst xmlns:p15="http://schemas.microsoft.com/office/powerpoint/2012/main">
+        <p15:guide id="1" orient="horz" pos="2160">
+          <p15:clr>
+            <a:srgbClr val="A4A3A4"/>
+          </p15:clr>
+        </p15:guide>
+        <p15:guide id="2" pos="2880">
+          <p15:clr>
+            <a:srgbClr val="A4A3A4"/>
+          </p15:clr>
+        </p15:guide>
+      </p15:sldGuideLst>
+    </p:ext>
+  </p:extLst>
 </p:presentation>
 </file>
 
@@ -157,10 +173,9 @@
           <a:lstStyle/>
           <a:p>
             <a:r>
-              <a:rPr lang="en-US" smtClean="0"/>
+              <a:rPr lang="en-US"/>
               <a:t>Click to edit Master title style</a:t>
             </a:r>
-            <a:endParaRPr lang="en-US"/>
           </a:p>
         </p:txBody>
       </p:sp>
@@ -276,10 +291,9 @@
           </a:lstStyle>
           <a:p>
             <a:r>
-              <a:rPr lang="en-US" smtClean="0"/>
+              <a:rPr lang="en-US"/>
               <a:t>Click to edit Master subtitle style</a:t>
             </a:r>
-            <a:endParaRPr lang="en-US"/>
           </a:p>
         </p:txBody>
       </p:sp>
@@ -300,7 +314,7 @@
           <a:p>
             <a:fld id="{5BCAD085-E8A6-8845-BD4E-CB4CCA059FC4}" type="datetimeFigureOut">
               <a:rPr lang="en-US" smtClean="0"/>
-              <a:t>1/27/13</a:t>
+              <a:t>5/24/2026</a:t>
             </a:fld>
             <a:endParaRPr lang="en-US"/>
           </a:p>
@@ -394,10 +408,9 @@
           <a:lstStyle/>
           <a:p>
             <a:r>
-              <a:rPr lang="en-US" smtClean="0"/>
+              <a:rPr lang="en-US"/>
               <a:t>Click to edit Master title style</a:t>
             </a:r>
-            <a:endParaRPr lang="en-US"/>
           </a:p>
         </p:txBody>
       </p:sp>
@@ -418,38 +431,37 @@
           <a:p>
             <a:pPr lvl="0"/>
             <a:r>
-              <a:rPr lang="en-US" smtClean="0"/>
+              <a:rPr lang="en-US"/>
               <a:t>Click to edit Master text styles</a:t>
             </a:r>
           </a:p>
           <a:p>
             <a:pPr lvl="1"/>
             <a:r>
-              <a:rPr lang="en-US" smtClean="0"/>
+              <a:rPr lang="en-US"/>
               <a:t>Second level</a:t>
             </a:r>
           </a:p>
           <a:p>
             <a:pPr lvl="2"/>
             <a:r>
-              <a:rPr lang="en-US" smtClean="0"/>
+              <a:rPr lang="en-US"/>
               <a:t>Third level</a:t>
             </a:r>
           </a:p>
           <a:p>
             <a:pPr lvl="3"/>
             <a:r>
-              <a:rPr lang="en-US" smtClean="0"/>
+              <a:rPr lang="en-US"/>
               <a:t>Fourth level</a:t>
             </a:r>
           </a:p>
           <a:p>
             <a:pPr lvl="4"/>
             <a:r>
-              <a:rPr lang="en-US" smtClean="0"/>
+              <a:rPr lang="en-US"/>
               <a:t>Fifth level</a:t>
             </a:r>
-            <a:endParaRPr lang="en-US"/>
           </a:p>
         </p:txBody>
       </p:sp>
@@ -470,7 +482,7 @@
           <a:p>
             <a:fld id="{5BCAD085-E8A6-8845-BD4E-CB4CCA059FC4}" type="datetimeFigureOut">
               <a:rPr lang="en-US" smtClean="0"/>
-              <a:t>1/27/13</a:t>
+              <a:t>5/24/2026</a:t>
             </a:fld>
             <a:endParaRPr lang="en-US"/>
           </a:p>
@@ -569,10 +581,9 @@
           <a:lstStyle/>
           <a:p>
             <a:r>
-              <a:rPr lang="en-US" smtClean="0"/>
+              <a:rPr lang="en-US"/>
               <a:t>Click to edit Master title style</a:t>
             </a:r>
-            <a:endParaRPr lang="en-US"/>
           </a:p>
         </p:txBody>
       </p:sp>
@@ -598,38 +609,37 @@
           <a:p>
             <a:pPr lvl="0"/>
             <a:r>
-              <a:rPr lang="en-US" smtClean="0"/>
+              <a:rPr lang="en-US"/>
               <a:t>Click to edit Master text styles</a:t>
             </a:r>
           </a:p>
           <a:p>
             <a:pPr lvl="1"/>
             <a:r>
-              <a:rPr lang="en-US" smtClean="0"/>
+              <a:rPr lang="en-US"/>
               <a:t>Second level</a:t>
             </a:r>
           </a:p>
           <a:p>
             <a:pPr lvl="2"/>
             <a:r>
-              <a:rPr lang="en-US" smtClean="0"/>
+              <a:rPr lang="en-US"/>
               <a:t>Third level</a:t>
             </a:r>
           </a:p>
           <a:p>
             <a:pPr lvl="3"/>
             <a:r>
-              <a:rPr lang="en-US" smtClean="0"/>
+              <a:rPr lang="en-US"/>
               <a:t>Fourth level</a:t>
             </a:r>
           </a:p>
           <a:p>
             <a:pPr lvl="4"/>
             <a:r>
-              <a:rPr lang="en-US" smtClean="0"/>
+              <a:rPr lang="en-US"/>
               <a:t>Fifth level</a:t>
             </a:r>
-            <a:endParaRPr lang="en-US"/>
           </a:p>
         </p:txBody>
       </p:sp>
@@ -650,7 +660,7 @@
           <a:p>
             <a:fld id="{5BCAD085-E8A6-8845-BD4E-CB4CCA059FC4}" type="datetimeFigureOut">
               <a:rPr lang="en-US" smtClean="0"/>
-              <a:t>1/27/13</a:t>
+              <a:t>5/24/2026</a:t>
             </a:fld>
             <a:endParaRPr lang="en-US"/>
           </a:p>
@@ -744,10 +754,9 @@
           <a:lstStyle/>
           <a:p>
             <a:r>
-              <a:rPr lang="en-US" smtClean="0"/>
+              <a:rPr lang="en-US"/>
               <a:t>Click to edit Master title style</a:t>
             </a:r>
-            <a:endParaRPr lang="en-US"/>
           </a:p>
         </p:txBody>
       </p:sp>
@@ -768,38 +777,37 @@
           <a:p>
             <a:pPr lvl="0"/>
             <a:r>
-              <a:rPr lang="en-US" smtClean="0"/>
+              <a:rPr lang="en-US"/>
               <a:t>Click to edit Master text styles</a:t>
             </a:r>
           </a:p>
           <a:p>
             <a:pPr lvl="1"/>
             <a:r>
-              <a:rPr lang="en-US" smtClean="0"/>
+              <a:rPr lang="en-US"/>
               <a:t>Second level</a:t>
             </a:r>
           </a:p>
           <a:p>
             <a:pPr lvl="2"/>
             <a:r>
-              <a:rPr lang="en-US" smtClean="0"/>
+              <a:rPr lang="en-US"/>
               <a:t>Third level</a:t>
             </a:r>
           </a:p>
           <a:p>
             <a:pPr lvl="3"/>
             <a:r>
-              <a:rPr lang="en-US" smtClean="0"/>
+              <a:rPr lang="en-US"/>
               <a:t>Fourth level</a:t>
             </a:r>
           </a:p>
           <a:p>
             <a:pPr lvl="4"/>
             <a:r>
-              <a:rPr lang="en-US" smtClean="0"/>
+              <a:rPr lang="en-US"/>
               <a:t>Fifth level</a:t>
             </a:r>
-            <a:endParaRPr lang="en-US"/>
           </a:p>
         </p:txBody>
       </p:sp>
@@ -820,7 +828,7 @@
           <a:p>
             <a:fld id="{5BCAD085-E8A6-8845-BD4E-CB4CCA059FC4}" type="datetimeFigureOut">
               <a:rPr lang="en-US" smtClean="0"/>
-              <a:t>1/27/13</a:t>
+              <a:t>5/24/2026</a:t>
             </a:fld>
             <a:endParaRPr lang="en-US"/>
           </a:p>
@@ -923,10 +931,9 @@
           </a:lstStyle>
           <a:p>
             <a:r>
-              <a:rPr lang="en-US" smtClean="0"/>
+              <a:rPr lang="en-US"/>
               <a:t>Click to edit Master title style</a:t>
             </a:r>
-            <a:endParaRPr lang="en-US"/>
           </a:p>
         </p:txBody>
       </p:sp>
@@ -1043,7 +1050,7 @@
           <a:p>
             <a:pPr lvl="0"/>
             <a:r>
-              <a:rPr lang="en-US" smtClean="0"/>
+              <a:rPr lang="en-US"/>
               <a:t>Click to edit Master text styles</a:t>
             </a:r>
           </a:p>
@@ -1066,7 +1073,7 @@
           <a:p>
             <a:fld id="{5BCAD085-E8A6-8845-BD4E-CB4CCA059FC4}" type="datetimeFigureOut">
               <a:rPr lang="en-US" smtClean="0"/>
-              <a:t>1/27/13</a:t>
+              <a:t>5/24/2026</a:t>
             </a:fld>
             <a:endParaRPr lang="en-US"/>
           </a:p>
@@ -1160,10 +1167,9 @@
           <a:lstStyle/>
           <a:p>
             <a:r>
-              <a:rPr lang="en-US" smtClean="0"/>
+              <a:rPr lang="en-US"/>
               <a:t>Click to edit Master title style</a:t>
             </a:r>
-            <a:endParaRPr lang="en-US"/>
           </a:p>
         </p:txBody>
       </p:sp>
@@ -1217,38 +1223,37 @@
           <a:p>
             <a:pPr lvl="0"/>
             <a:r>
-              <a:rPr lang="en-US" smtClean="0"/>
+              <a:rPr lang="en-US"/>
               <a:t>Click to edit Master text styles</a:t>
             </a:r>
           </a:p>
           <a:p>
             <a:pPr lvl="1"/>
             <a:r>
-              <a:rPr lang="en-US" smtClean="0"/>
+              <a:rPr lang="en-US"/>
               <a:t>Second level</a:t>
             </a:r>
           </a:p>
           <a:p>
             <a:pPr lvl="2"/>
             <a:r>
-              <a:rPr lang="en-US" smtClean="0"/>
+              <a:rPr lang="en-US"/>
               <a:t>Third level</a:t>
             </a:r>
           </a:p>
           <a:p>
             <a:pPr lvl="3"/>
             <a:r>
-              <a:rPr lang="en-US" smtClean="0"/>
+              <a:rPr lang="en-US"/>
               <a:t>Fourth level</a:t>
             </a:r>
           </a:p>
           <a:p>
             <a:pPr lvl="4"/>
             <a:r>
-              <a:rPr lang="en-US" smtClean="0"/>
+              <a:rPr lang="en-US"/>
               <a:t>Fifth level</a:t>
             </a:r>
-            <a:endParaRPr lang="en-US"/>
           </a:p>
         </p:txBody>
       </p:sp>
@@ -1302,38 +1307,37 @@
           <a:p>
             <a:pPr lvl="0"/>
             <a:r>
-              <a:rPr lang="en-US" smtClean="0"/>
+              <a:rPr lang="en-US"/>
               <a:t>Click to edit Master text styles</a:t>
             </a:r>
           </a:p>
           <a:p>
             <a:pPr lvl="1"/>
             <a:r>
-              <a:rPr lang="en-US" smtClean="0"/>
+              <a:rPr lang="en-US"/>
               <a:t>Second level</a:t>
             </a:r>
           </a:p>
           <a:p>
             <a:pPr lvl="2"/>
             <a:r>
-              <a:rPr lang="en-US" smtClean="0"/>
+              <a:rPr lang="en-US"/>
               <a:t>Third level</a:t>
             </a:r>
           </a:p>
           <a:p>
             <a:pPr lvl="3"/>
             <a:r>
-              <a:rPr lang="en-US" smtClean="0"/>
+              <a:rPr lang="en-US"/>
               <a:t>Fourth level</a:t>
             </a:r>
           </a:p>
           <a:p>
             <a:pPr lvl="4"/>
             <a:r>
-              <a:rPr lang="en-US" smtClean="0"/>
+              <a:rPr lang="en-US"/>
               <a:t>Fifth level</a:t>
             </a:r>
-            <a:endParaRPr lang="en-US"/>
           </a:p>
         </p:txBody>
       </p:sp>
@@ -1354,7 +1358,7 @@
           <a:p>
             <a:fld id="{5BCAD085-E8A6-8845-BD4E-CB4CCA059FC4}" type="datetimeFigureOut">
               <a:rPr lang="en-US" smtClean="0"/>
-              <a:t>1/27/13</a:t>
+              <a:t>5/24/2026</a:t>
             </a:fld>
             <a:endParaRPr lang="en-US"/>
           </a:p>
@@ -1452,10 +1456,9 @@
           </a:lstStyle>
           <a:p>
             <a:r>
-              <a:rPr lang="en-US" smtClean="0"/>
+              <a:rPr lang="en-US"/>
               <a:t>Click to edit Master title style</a:t>
             </a:r>
-            <a:endParaRPr lang="en-US"/>
           </a:p>
         </p:txBody>
       </p:sp>
@@ -1518,7 +1521,7 @@
           <a:p>
             <a:pPr lvl="0"/>
             <a:r>
-              <a:rPr lang="en-US" smtClean="0"/>
+              <a:rPr lang="en-US"/>
               <a:t>Click to edit Master text styles</a:t>
             </a:r>
           </a:p>
@@ -1574,38 +1577,37 @@
           <a:p>
             <a:pPr lvl="0"/>
             <a:r>
-              <a:rPr lang="en-US" smtClean="0"/>
+              <a:rPr lang="en-US"/>
               <a:t>Click to edit Master text styles</a:t>
             </a:r>
           </a:p>
           <a:p>
             <a:pPr lvl="1"/>
             <a:r>
-              <a:rPr lang="en-US" smtClean="0"/>
+              <a:rPr lang="en-US"/>
               <a:t>Second level</a:t>
             </a:r>
           </a:p>
           <a:p>
             <a:pPr lvl="2"/>
             <a:r>
-              <a:rPr lang="en-US" smtClean="0"/>
+              <a:rPr lang="en-US"/>
               <a:t>Third level</a:t>
             </a:r>
           </a:p>
           <a:p>
             <a:pPr lvl="3"/>
             <a:r>
-              <a:rPr lang="en-US" smtClean="0"/>
+              <a:rPr lang="en-US"/>
               <a:t>Fourth level</a:t>
             </a:r>
           </a:p>
           <a:p>
             <a:pPr lvl="4"/>
             <a:r>
-              <a:rPr lang="en-US" smtClean="0"/>
+              <a:rPr lang="en-US"/>
               <a:t>Fifth level</a:t>
             </a:r>
-            <a:endParaRPr lang="en-US"/>
           </a:p>
         </p:txBody>
       </p:sp>
@@ -1668,7 +1670,7 @@
           <a:p>
             <a:pPr lvl="0"/>
             <a:r>
-              <a:rPr lang="en-US" smtClean="0"/>
+              <a:rPr lang="en-US"/>
               <a:t>Click to edit Master text styles</a:t>
             </a:r>
           </a:p>
@@ -1724,38 +1726,37 @@
           <a:p>
             <a:pPr lvl="0"/>
             <a:r>
-              <a:rPr lang="en-US" smtClean="0"/>
+              <a:rPr lang="en-US"/>
               <a:t>Click to edit Master text styles</a:t>
             </a:r>
           </a:p>
           <a:p>
             <a:pPr lvl="1"/>
             <a:r>
-              <a:rPr lang="en-US" smtClean="0"/>
+              <a:rPr lang="en-US"/>
               <a:t>Second level</a:t>
             </a:r>
           </a:p>
           <a:p>
             <a:pPr lvl="2"/>
             <a:r>
-              <a:rPr lang="en-US" smtClean="0"/>
+              <a:rPr lang="en-US"/>
               <a:t>Third level</a:t>
             </a:r>
           </a:p>
           <a:p>
             <a:pPr lvl="3"/>
             <a:r>
-              <a:rPr lang="en-US" smtClean="0"/>
+              <a:rPr lang="en-US"/>
               <a:t>Fourth level</a:t>
             </a:r>
           </a:p>
           <a:p>
             <a:pPr lvl="4"/>
             <a:r>
-              <a:rPr lang="en-US" smtClean="0"/>
+              <a:rPr lang="en-US"/>
               <a:t>Fifth level</a:t>
             </a:r>
-            <a:endParaRPr lang="en-US"/>
           </a:p>
         </p:txBody>
       </p:sp>
@@ -1776,7 +1777,7 @@
           <a:p>
             <a:fld id="{5BCAD085-E8A6-8845-BD4E-CB4CCA059FC4}" type="datetimeFigureOut">
               <a:rPr lang="en-US" smtClean="0"/>
-              <a:t>1/27/13</a:t>
+              <a:t>5/24/2026</a:t>
             </a:fld>
             <a:endParaRPr lang="en-US"/>
           </a:p>
@@ -1870,10 +1871,9 @@
           <a:lstStyle/>
           <a:p>
             <a:r>
-              <a:rPr lang="en-US" smtClean="0"/>
+              <a:rPr lang="en-US"/>
               <a:t>Click to edit Master title style</a:t>
             </a:r>
-            <a:endParaRPr lang="en-US"/>
           </a:p>
         </p:txBody>
       </p:sp>
@@ -1894,7 +1894,7 @@
           <a:p>
             <a:fld id="{5BCAD085-E8A6-8845-BD4E-CB4CCA059FC4}" type="datetimeFigureOut">
               <a:rPr lang="en-US" smtClean="0"/>
-              <a:t>1/27/13</a:t>
+              <a:t>5/24/2026</a:t>
             </a:fld>
             <a:endParaRPr lang="en-US"/>
           </a:p>
@@ -1989,7 +1989,7 @@
           <a:p>
             <a:fld id="{5BCAD085-E8A6-8845-BD4E-CB4CCA059FC4}" type="datetimeFigureOut">
               <a:rPr lang="en-US" smtClean="0"/>
-              <a:t>1/27/13</a:t>
+              <a:t>5/24/2026</a:t>
             </a:fld>
             <a:endParaRPr lang="en-US"/>
           </a:p>
@@ -2092,10 +2092,9 @@
           </a:lstStyle>
           <a:p>
             <a:r>
-              <a:rPr lang="en-US" smtClean="0"/>
+              <a:rPr lang="en-US"/>
               <a:t>Click to edit Master title style</a:t>
             </a:r>
-            <a:endParaRPr lang="en-US"/>
           </a:p>
         </p:txBody>
       </p:sp>
@@ -2149,38 +2148,37 @@
           <a:p>
             <a:pPr lvl="0"/>
             <a:r>
-              <a:rPr lang="en-US" smtClean="0"/>
+              <a:rPr lang="en-US"/>
               <a:t>Click to edit Master text styles</a:t>
             </a:r>
           </a:p>
           <a:p>
             <a:pPr lvl="1"/>
             <a:r>
-              <a:rPr lang="en-US" smtClean="0"/>
+              <a:rPr lang="en-US"/>
               <a:t>Second level</a:t>
             </a:r>
           </a:p>
           <a:p>
             <a:pPr lvl="2"/>
             <a:r>
-              <a:rPr lang="en-US" smtClean="0"/>
+              <a:rPr lang="en-US"/>
               <a:t>Third level</a:t>
             </a:r>
           </a:p>
           <a:p>
             <a:pPr lvl="3"/>
             <a:r>
-              <a:rPr lang="en-US" smtClean="0"/>
+              <a:rPr lang="en-US"/>
               <a:t>Fourth level</a:t>
             </a:r>
           </a:p>
           <a:p>
             <a:pPr lvl="4"/>
             <a:r>
-              <a:rPr lang="en-US" smtClean="0"/>
+              <a:rPr lang="en-US"/>
               <a:t>Fifth level</a:t>
             </a:r>
-            <a:endParaRPr lang="en-US"/>
           </a:p>
         </p:txBody>
       </p:sp>
@@ -2243,7 +2241,7 @@
           <a:p>
             <a:pPr lvl="0"/>
             <a:r>
-              <a:rPr lang="en-US" smtClean="0"/>
+              <a:rPr lang="en-US"/>
               <a:t>Click to edit Master text styles</a:t>
             </a:r>
           </a:p>
@@ -2266,7 +2264,7 @@
           <a:p>
             <a:fld id="{5BCAD085-E8A6-8845-BD4E-CB4CCA059FC4}" type="datetimeFigureOut">
               <a:rPr lang="en-US" smtClean="0"/>
-              <a:t>1/27/13</a:t>
+              <a:t>5/24/2026</a:t>
             </a:fld>
             <a:endParaRPr lang="en-US"/>
           </a:p>
@@ -2369,10 +2367,9 @@
           </a:lstStyle>
           <a:p>
             <a:r>
-              <a:rPr lang="en-US" smtClean="0"/>
+              <a:rPr lang="en-US"/>
               <a:t>Click to edit Master title style</a:t>
             </a:r>
-            <a:endParaRPr lang="en-US"/>
           </a:p>
         </p:txBody>
       </p:sp>
@@ -2496,7 +2493,7 @@
           <a:p>
             <a:pPr lvl="0"/>
             <a:r>
-              <a:rPr lang="en-US" smtClean="0"/>
+              <a:rPr lang="en-US"/>
               <a:t>Click to edit Master text styles</a:t>
             </a:r>
           </a:p>
@@ -2519,7 +2516,7 @@
           <a:p>
             <a:fld id="{5BCAD085-E8A6-8845-BD4E-CB4CCA059FC4}" type="datetimeFigureOut">
               <a:rPr lang="en-US" smtClean="0"/>
-              <a:t>1/27/13</a:t>
+              <a:t>5/24/2026</a:t>
             </a:fld>
             <a:endParaRPr lang="en-US"/>
           </a:p>
@@ -2628,10 +2625,9 @@
           <a:lstStyle/>
           <a:p>
             <a:r>
-              <a:rPr lang="en-US" smtClean="0"/>
+              <a:rPr lang="en-US"/>
               <a:t>Click to edit Master title style</a:t>
             </a:r>
-            <a:endParaRPr lang="en-US"/>
           </a:p>
         </p:txBody>
       </p:sp>
@@ -2662,38 +2658,37 @@
           <a:p>
             <a:pPr lvl="0"/>
             <a:r>
-              <a:rPr lang="en-US" smtClean="0"/>
+              <a:rPr lang="en-US"/>
               <a:t>Click to edit Master text styles</a:t>
             </a:r>
           </a:p>
           <a:p>
             <a:pPr lvl="1"/>
             <a:r>
-              <a:rPr lang="en-US" smtClean="0"/>
+              <a:rPr lang="en-US"/>
               <a:t>Second level</a:t>
             </a:r>
           </a:p>
           <a:p>
             <a:pPr lvl="2"/>
             <a:r>
-              <a:rPr lang="en-US" smtClean="0"/>
+              <a:rPr lang="en-US"/>
               <a:t>Third level</a:t>
             </a:r>
           </a:p>
           <a:p>
             <a:pPr lvl="3"/>
             <a:r>
-              <a:rPr lang="en-US" smtClean="0"/>
+              <a:rPr lang="en-US"/>
               <a:t>Fourth level</a:t>
             </a:r>
           </a:p>
           <a:p>
             <a:pPr lvl="4"/>
             <a:r>
-              <a:rPr lang="en-US" smtClean="0"/>
+              <a:rPr lang="en-US"/>
               <a:t>Fifth level</a:t>
             </a:r>
-            <a:endParaRPr lang="en-US"/>
           </a:p>
         </p:txBody>
       </p:sp>
@@ -2732,7 +2727,7 @@
           <a:p>
             <a:fld id="{5BCAD085-E8A6-8845-BD4E-CB4CCA059FC4}" type="datetimeFigureOut">
               <a:rPr lang="en-US" smtClean="0"/>
-              <a:t>1/27/13</a:t>
+              <a:t>5/24/2026</a:t>
             </a:fld>
             <a:endParaRPr lang="en-US"/>
           </a:p>
@@ -3091,7 +3086,7 @@
 </file>
 
 <file path=ppt/slides/slide1.xml><?xml version="1.0" encoding="utf-8"?>
-<p:sld xmlns:a="http://schemas.openxmlformats.org/drawingml/2006/main" xmlns:p="http://schemas.openxmlformats.org/presentationml/2006/main" xmlns:r="http://schemas.openxmlformats.org/officeDocument/2006/relationships">
+<p:sld xmlns:a="http://schemas.openxmlformats.org/drawingml/2006/main" xmlns:r="http://schemas.openxmlformats.org/officeDocument/2006/relationships" xmlns:p="http://schemas.openxmlformats.org/presentationml/2006/main">
   <p:cSld>
     <p:spTree>
       <p:nvGrpSpPr>
@@ -3099,7 +3094,14 @@
         <p:cNvGrpSpPr/>
         <p:nvPr/>
       </p:nvGrpSpPr>
-      <p:grpSpPr/>
+      <p:grpSpPr>
+        <a:xfrm>
+          <a:off x="0" y="0"/>
+          <a:ext cx="0" cy="0"/>
+          <a:chOff x="0" y="0"/>
+          <a:chExt cx="0" cy="0"/>
+        </a:xfrm>
+      </p:grpSpPr>
       <p:sp>
         <p:nvSpPr>
           <p:cNvPr id="2" name="Rectangle 1"/>
@@ -3137,10 +3139,11 @@
           </a:fontRef>
         </p:style>
         <p:txBody>
-          <a:bodyPr rtlCol="0" anchor="ctr" lIns="0" rIns="0" tIns="0" bIns="0"/>
+          <a:bodyPr lIns="0" tIns="0" rIns="0" bIns="0" rtlCol="0" anchor="ctr"/>
           <a:lstStyle/>
           <a:p>
             <a:pPr algn="ctr"/>
+            <a:endParaRPr/>
           </a:p>
         </p:txBody>
       </p:sp>
@@ -3205,10 +3208,11 @@
           </a:fontRef>
         </p:style>
         <p:txBody>
-          <a:bodyPr rtlCol="0" anchor="ctr" lIns="0" rIns="0" tIns="0" bIns="0"/>
+          <a:bodyPr lIns="0" tIns="0" rIns="0" bIns="0" rtlCol="0" anchor="ctr"/>
           <a:lstStyle/>
           <a:p>
             <a:pPr algn="ctr"/>
+            <a:endParaRPr/>
           </a:p>
         </p:txBody>
       </p:sp>
@@ -3247,7 +3251,7 @@
           </a:fontRef>
         </p:style>
         <p:txBody>
-          <a:bodyPr rtlCol="0" anchor="t" wrap="square" lIns="50800" rIns="50800" tIns="50800" bIns="50800"/>
+          <a:bodyPr wrap="square" lIns="50800" tIns="50800" rIns="50800" bIns="50800" rtlCol="0" anchor="t"/>
           <a:lstStyle/>
           <a:p>
             <a:pPr algn="l">
@@ -3308,6 +3312,7 @@
           <a:lstStyle/>
           <a:p>
             <a:pPr algn="ctr"/>
+            <a:endParaRPr/>
           </a:p>
         </p:txBody>
       </p:sp>
@@ -3346,7 +3351,7 @@
           </a:fontRef>
         </p:style>
         <p:txBody>
-          <a:bodyPr rtlCol="0" anchor="t" wrap="square" lIns="50800" rIns="50800" tIns="50800" bIns="50800"/>
+          <a:bodyPr wrap="square" lIns="50800" tIns="50800" rIns="50800" bIns="50800" rtlCol="0" anchor="t"/>
           <a:lstStyle/>
           <a:p>
             <a:pPr algn="l">
@@ -3426,7 +3431,7 @@
           </a:fontRef>
         </p:style>
         <p:txBody>
-          <a:bodyPr rtlCol="0" anchor="t" wrap="square" lIns="50800" rIns="50800" tIns="50800" bIns="50800"/>
+          <a:bodyPr wrap="square" lIns="50800" tIns="50800" rIns="50800" bIns="50800" rtlCol="0" anchor="t"/>
           <a:lstStyle/>
           <a:p>
             <a:pPr algn="l">
@@ -3501,10 +3506,11 @@
           </a:fontRef>
         </p:style>
         <p:txBody>
-          <a:bodyPr rtlCol="0" anchor="ctr" lIns="0" rIns="0" tIns="0" bIns="0"/>
+          <a:bodyPr lIns="0" tIns="0" rIns="0" bIns="0" rtlCol="0" anchor="ctr"/>
           <a:lstStyle/>
           <a:p>
             <a:pPr algn="ctr"/>
+            <a:endParaRPr/>
           </a:p>
         </p:txBody>
       </p:sp>
@@ -3543,7 +3549,7 @@
           </a:fontRef>
         </p:style>
         <p:txBody>
-          <a:bodyPr rtlCol="0" anchor="ctr" wrap="square" lIns="50800" rIns="50800" tIns="50800" bIns="50800"/>
+          <a:bodyPr wrap="square" lIns="50800" tIns="50800" rIns="50800" bIns="50800" rtlCol="0" anchor="ctr"/>
           <a:lstStyle/>
           <a:p>
             <a:pPr algn="ctr">
@@ -3598,7 +3604,7 @@
           </a:fontRef>
         </p:style>
         <p:txBody>
-          <a:bodyPr rtlCol="0" anchor="ctr" wrap="square" lIns="50800" rIns="50800" tIns="50800" bIns="50800"/>
+          <a:bodyPr wrap="square" lIns="50800" tIns="50800" rIns="50800" bIns="50800" rtlCol="0" anchor="ctr"/>
           <a:lstStyle/>
           <a:p>
             <a:pPr algn="l">
@@ -3626,7 +3632,7 @@
         </p:nvSpPr>
         <p:spPr>
           <a:xfrm>
-            <a:off x="2286000" y="5473700"/>
+            <a:off x="2286000" y="5530850"/>
             <a:ext cx="5080000" cy="254000"/>
           </a:xfrm>
           <a:prstGeom prst="rect">
@@ -3653,7 +3659,7 @@
           </a:fontRef>
         </p:style>
         <p:txBody>
-          <a:bodyPr rtlCol="0" anchor="ctr" wrap="square" lIns="50800" rIns="50800" tIns="50800" bIns="50800"/>
+          <a:bodyPr wrap="square" lIns="50800" tIns="50800" rIns="50800" bIns="50800" rtlCol="0" anchor="ctr"/>
           <a:lstStyle/>
           <a:p>
             <a:pPr algn="l">
@@ -3664,7 +3670,7 @@
             <a:r>
               <a:rPr sz="1600" b="0" i="0">
                 <a:solidFill>
-                  <a:srgbClr val="B9C7DE"/>
+                  <a:schemeClr val="bg1"/>
                 </a:solidFill>
                 <a:latin typeface="Yu Gothic UI"/>
               </a:rPr>
@@ -3682,7 +3688,7 @@
 </file>
 
 <file path=ppt/slides/slide10.xml><?xml version="1.0" encoding="utf-8"?>
-<p:sld xmlns:a="http://schemas.openxmlformats.org/drawingml/2006/main" xmlns:p="http://schemas.openxmlformats.org/presentationml/2006/main" xmlns:r="http://schemas.openxmlformats.org/officeDocument/2006/relationships">
+<p:sld xmlns:a="http://schemas.openxmlformats.org/drawingml/2006/main" xmlns:r="http://schemas.openxmlformats.org/officeDocument/2006/relationships" xmlns:p="http://schemas.openxmlformats.org/presentationml/2006/main">
   <p:cSld>
     <p:spTree>
       <p:nvGrpSpPr>
@@ -3690,7 +3696,14 @@
         <p:cNvGrpSpPr/>
         <p:nvPr/>
       </p:nvGrpSpPr>
-      <p:grpSpPr/>
+      <p:grpSpPr>
+        <a:xfrm>
+          <a:off x="0" y="0"/>
+          <a:ext cx="0" cy="0"/>
+          <a:chOff x="0" y="0"/>
+          <a:chExt cx="0" cy="0"/>
+        </a:xfrm>
+      </p:grpSpPr>
       <p:sp>
         <p:nvSpPr>
           <p:cNvPr id="2" name="Rectangle 1"/>
@@ -3728,10 +3741,11 @@
           </a:fontRef>
         </p:style>
         <p:txBody>
-          <a:bodyPr rtlCol="0" anchor="ctr" lIns="0" rIns="0" tIns="0" bIns="0"/>
+          <a:bodyPr lIns="0" tIns="0" rIns="0" bIns="0" rtlCol="0" anchor="ctr"/>
           <a:lstStyle/>
           <a:p>
             <a:pPr algn="ctr"/>
+            <a:endParaRPr/>
           </a:p>
         </p:txBody>
       </p:sp>
@@ -3770,7 +3784,7 @@
           </a:fontRef>
         </p:style>
         <p:txBody>
-          <a:bodyPr rtlCol="0" anchor="ctr" wrap="square" lIns="50800" rIns="50800" tIns="50800" bIns="50800"/>
+          <a:bodyPr wrap="square" lIns="50800" tIns="50800" rIns="50800" bIns="50800" rtlCol="0" anchor="ctr"/>
           <a:lstStyle/>
           <a:p>
             <a:pPr algn="l">
@@ -3834,7 +3848,7 @@
           </a:fontRef>
         </p:style>
         <p:txBody>
-          <a:bodyPr rtlCol="0" anchor="ctr" wrap="square" lIns="50800" rIns="50800" tIns="50800" bIns="50800"/>
+          <a:bodyPr wrap="square" lIns="50800" tIns="50800" rIns="50800" bIns="50800" rtlCol="0" anchor="ctr"/>
           <a:lstStyle/>
           <a:p>
             <a:pPr algn="r">
@@ -3895,6 +3909,7 @@
           <a:lstStyle/>
           <a:p>
             <a:pPr algn="ctr"/>
+            <a:endParaRPr/>
           </a:p>
         </p:txBody>
       </p:sp>
@@ -3933,7 +3948,7 @@
           </a:fontRef>
         </p:style>
         <p:txBody>
-          <a:bodyPr rtlCol="0" anchor="ctr" wrap="square" lIns="50800" rIns="50800" tIns="50800" bIns="50800"/>
+          <a:bodyPr wrap="square" lIns="50800" tIns="50800" rIns="50800" bIns="50800" rtlCol="0" anchor="ctr"/>
           <a:lstStyle/>
           <a:p>
             <a:pPr algn="l">
@@ -3988,7 +4003,7 @@
           </a:fontRef>
         </p:style>
         <p:txBody>
-          <a:bodyPr rtlCol="0" anchor="t" wrap="square" lIns="50800" rIns="50800" tIns="50800" bIns="50800"/>
+          <a:bodyPr wrap="square" lIns="50800" tIns="50800" rIns="50800" bIns="50800" rtlCol="0" anchor="t"/>
           <a:lstStyle/>
           <a:p>
             <a:pPr algn="l">
@@ -4063,10 +4078,11 @@
           </a:fontRef>
         </p:style>
         <p:txBody>
-          <a:bodyPr rtlCol="0" anchor="ctr" lIns="0" rIns="0" tIns="0" bIns="0"/>
+          <a:bodyPr lIns="0" tIns="0" rIns="0" bIns="0" rtlCol="0" anchor="ctr"/>
           <a:lstStyle/>
           <a:p>
             <a:pPr algn="ctr"/>
+            <a:endParaRPr/>
           </a:p>
         </p:txBody>
       </p:sp>
@@ -4107,10 +4123,11 @@
           </a:fontRef>
         </p:style>
         <p:txBody>
-          <a:bodyPr rtlCol="0" anchor="ctr" lIns="0" rIns="0" tIns="0" bIns="0"/>
+          <a:bodyPr lIns="0" tIns="0" rIns="0" bIns="0" rtlCol="0" anchor="ctr"/>
           <a:lstStyle/>
           <a:p>
             <a:pPr algn="ctr"/>
+            <a:endParaRPr/>
           </a:p>
         </p:txBody>
       </p:sp>
@@ -4151,10 +4168,11 @@
           </a:fontRef>
         </p:style>
         <p:txBody>
-          <a:bodyPr rtlCol="0" anchor="ctr" lIns="0" rIns="0" tIns="0" bIns="0"/>
+          <a:bodyPr lIns="0" tIns="0" rIns="0" bIns="0" rtlCol="0" anchor="ctr"/>
           <a:lstStyle/>
           <a:p>
             <a:pPr algn="ctr"/>
+            <a:endParaRPr/>
           </a:p>
         </p:txBody>
       </p:sp>
@@ -4193,7 +4211,7 @@
           </a:fontRef>
         </p:style>
         <p:txBody>
-          <a:bodyPr rtlCol="0" anchor="ctr" wrap="square" lIns="50800" rIns="50800" tIns="50800" bIns="50800"/>
+          <a:bodyPr wrap="square" lIns="50800" tIns="50800" rIns="50800" bIns="50800" rtlCol="0" anchor="ctr"/>
           <a:lstStyle/>
           <a:p>
             <a:pPr algn="ctr">
@@ -4221,7 +4239,7 @@
         </p:nvSpPr>
         <p:spPr>
           <a:xfrm>
-            <a:off x="863600" y="1993900"/>
+            <a:off x="863600" y="1908175"/>
             <a:ext cx="6477000" cy="381000"/>
           </a:xfrm>
           <a:prstGeom prst="rect">
@@ -4248,7 +4266,7 @@
           </a:fontRef>
         </p:style>
         <p:txBody>
-          <a:bodyPr rtlCol="0" anchor="t" wrap="square" lIns="50800" rIns="50800" tIns="50800" bIns="50800"/>
+          <a:bodyPr wrap="square" lIns="50800" tIns="50800" rIns="50800" bIns="50800" rtlCol="0" anchor="t"/>
           <a:lstStyle/>
           <a:p>
             <a:pPr algn="l">
@@ -4303,7 +4321,7 @@
           </a:fontRef>
         </p:style>
         <p:txBody>
-          <a:bodyPr rtlCol="0" anchor="t" wrap="square" lIns="0" rIns="0" tIns="0" bIns="0"/>
+          <a:bodyPr wrap="square" lIns="0" tIns="0" rIns="0" bIns="0" rtlCol="0" anchor="t"/>
           <a:lstStyle/>
           <a:p>
             <a:pPr algn="l">
@@ -4455,10 +4473,11 @@
           </a:fontRef>
         </p:style>
         <p:txBody>
-          <a:bodyPr rtlCol="0" anchor="ctr" lIns="0" rIns="0" tIns="0" bIns="0"/>
+          <a:bodyPr lIns="0" tIns="0" rIns="0" bIns="0" rtlCol="0" anchor="ctr"/>
           <a:lstStyle/>
           <a:p>
             <a:pPr algn="ctr"/>
+            <a:endParaRPr/>
           </a:p>
         </p:txBody>
       </p:sp>
@@ -4499,10 +4518,11 @@
           </a:fontRef>
         </p:style>
         <p:txBody>
-          <a:bodyPr rtlCol="0" anchor="ctr" lIns="0" rIns="0" tIns="0" bIns="0"/>
+          <a:bodyPr lIns="0" tIns="0" rIns="0" bIns="0" rtlCol="0" anchor="ctr"/>
           <a:lstStyle/>
           <a:p>
             <a:pPr algn="ctr"/>
+            <a:endParaRPr/>
           </a:p>
         </p:txBody>
       </p:sp>
@@ -4543,10 +4563,11 @@
           </a:fontRef>
         </p:style>
         <p:txBody>
-          <a:bodyPr rtlCol="0" anchor="ctr" lIns="0" rIns="0" tIns="0" bIns="0"/>
+          <a:bodyPr lIns="0" tIns="0" rIns="0" bIns="0" rtlCol="0" anchor="ctr"/>
           <a:lstStyle/>
           <a:p>
             <a:pPr algn="ctr"/>
+            <a:endParaRPr/>
           </a:p>
         </p:txBody>
       </p:sp>
@@ -4585,7 +4606,7 @@
           </a:fontRef>
         </p:style>
         <p:txBody>
-          <a:bodyPr rtlCol="0" anchor="ctr" wrap="square" lIns="50800" rIns="50800" tIns="50800" bIns="50800"/>
+          <a:bodyPr wrap="square" lIns="50800" tIns="50800" rIns="50800" bIns="50800" rtlCol="0" anchor="ctr"/>
           <a:lstStyle/>
           <a:p>
             <a:pPr algn="ctr">
@@ -4613,7 +4634,7 @@
         </p:nvSpPr>
         <p:spPr>
           <a:xfrm>
-            <a:off x="863600" y="4432300"/>
+            <a:off x="863600" y="4346575"/>
             <a:ext cx="6477000" cy="381000"/>
           </a:xfrm>
           <a:prstGeom prst="rect">
@@ -4640,7 +4661,7 @@
           </a:fontRef>
         </p:style>
         <p:txBody>
-          <a:bodyPr rtlCol="0" anchor="t" wrap="square" lIns="50800" rIns="50800" tIns="50800" bIns="50800"/>
+          <a:bodyPr wrap="square" lIns="50800" tIns="50800" rIns="50800" bIns="50800" rtlCol="0" anchor="t"/>
           <a:lstStyle/>
           <a:p>
             <a:pPr algn="l">
@@ -4695,7 +4716,7 @@
           </a:fontRef>
         </p:style>
         <p:txBody>
-          <a:bodyPr rtlCol="0" anchor="t" wrap="square" lIns="0" rIns="0" tIns="0" bIns="0"/>
+          <a:bodyPr wrap="square" lIns="0" tIns="0" rIns="0" bIns="0" rtlCol="0" anchor="t"/>
           <a:lstStyle/>
           <a:p>
             <a:pPr algn="l">
@@ -4847,10 +4868,11 @@
           </a:fontRef>
         </p:style>
         <p:txBody>
-          <a:bodyPr rtlCol="0" anchor="ctr" lIns="0" rIns="0" tIns="0" bIns="0"/>
+          <a:bodyPr lIns="0" tIns="0" rIns="0" bIns="0" rtlCol="0" anchor="ctr"/>
           <a:lstStyle/>
           <a:p>
             <a:pPr algn="ctr"/>
+            <a:endParaRPr/>
           </a:p>
         </p:txBody>
       </p:sp>
@@ -4886,8 +4908,8 @@
         </p:nvSpPr>
         <p:spPr>
           <a:xfrm>
-            <a:off x="7899400" y="1676400"/>
-            <a:ext cx="1143000" cy="254000"/>
+            <a:off x="7899400" y="1571625"/>
+            <a:ext cx="1143000" cy="463550"/>
           </a:xfrm>
           <a:prstGeom prst="rect">
             <a:avLst/>
@@ -4915,10 +4937,11 @@
           </a:fontRef>
         </p:style>
         <p:txBody>
-          <a:bodyPr rtlCol="0" anchor="ctr" lIns="0" rIns="0" tIns="0" bIns="0"/>
+          <a:bodyPr lIns="0" tIns="0" rIns="0" bIns="0" rtlCol="0" anchor="ctr"/>
           <a:lstStyle/>
           <a:p>
             <a:pPr algn="ctr"/>
+            <a:endParaRPr/>
           </a:p>
         </p:txBody>
       </p:sp>
@@ -4957,7 +4980,7 @@
           </a:fontRef>
         </p:style>
         <p:txBody>
-          <a:bodyPr rtlCol="0" anchor="ctr" wrap="square" lIns="50800" rIns="50800" tIns="50800" bIns="50800"/>
+          <a:bodyPr wrap="square" lIns="50800" tIns="50800" rIns="50800" bIns="50800" rtlCol="0" anchor="ctr"/>
           <a:lstStyle/>
           <a:p>
             <a:pPr algn="ctr">
@@ -4986,7 +5009,7 @@
 </file>
 
 <file path=ppt/slides/slide11.xml><?xml version="1.0" encoding="utf-8"?>
-<p:sld xmlns:a="http://schemas.openxmlformats.org/drawingml/2006/main" xmlns:p="http://schemas.openxmlformats.org/presentationml/2006/main" xmlns:r="http://schemas.openxmlformats.org/officeDocument/2006/relationships">
+<p:sld xmlns:a="http://schemas.openxmlformats.org/drawingml/2006/main" xmlns:r="http://schemas.openxmlformats.org/officeDocument/2006/relationships" xmlns:p="http://schemas.openxmlformats.org/presentationml/2006/main">
   <p:cSld>
     <p:spTree>
       <p:nvGrpSpPr>
@@ -4994,7 +5017,14 @@
         <p:cNvGrpSpPr/>
         <p:nvPr/>
       </p:nvGrpSpPr>
-      <p:grpSpPr/>
+      <p:grpSpPr>
+        <a:xfrm>
+          <a:off x="0" y="0"/>
+          <a:ext cx="0" cy="0"/>
+          <a:chOff x="0" y="0"/>
+          <a:chExt cx="0" cy="0"/>
+        </a:xfrm>
+      </p:grpSpPr>
       <p:sp>
         <p:nvSpPr>
           <p:cNvPr id="2" name="Rectangle 1"/>
@@ -5032,10 +5062,11 @@
           </a:fontRef>
         </p:style>
         <p:txBody>
-          <a:bodyPr rtlCol="0" anchor="ctr" lIns="0" rIns="0" tIns="0" bIns="0"/>
+          <a:bodyPr lIns="0" tIns="0" rIns="0" bIns="0" rtlCol="0" anchor="ctr"/>
           <a:lstStyle/>
           <a:p>
             <a:pPr algn="ctr"/>
+            <a:endParaRPr/>
           </a:p>
         </p:txBody>
       </p:sp>
@@ -5074,7 +5105,7 @@
           </a:fontRef>
         </p:style>
         <p:txBody>
-          <a:bodyPr rtlCol="0" anchor="ctr" wrap="square" lIns="50800" rIns="50800" tIns="50800" bIns="50800"/>
+          <a:bodyPr wrap="square" lIns="50800" tIns="50800" rIns="50800" bIns="50800" rtlCol="0" anchor="ctr"/>
           <a:lstStyle/>
           <a:p>
             <a:pPr algn="l">
@@ -5138,7 +5169,7 @@
           </a:fontRef>
         </p:style>
         <p:txBody>
-          <a:bodyPr rtlCol="0" anchor="ctr" wrap="square" lIns="50800" rIns="50800" tIns="50800" bIns="50800"/>
+          <a:bodyPr wrap="square" lIns="50800" tIns="50800" rIns="50800" bIns="50800" rtlCol="0" anchor="ctr"/>
           <a:lstStyle/>
           <a:p>
             <a:pPr algn="r">
@@ -5199,6 +5230,7 @@
           <a:lstStyle/>
           <a:p>
             <a:pPr algn="ctr"/>
+            <a:endParaRPr/>
           </a:p>
         </p:txBody>
       </p:sp>
@@ -5237,7 +5269,7 @@
           </a:fontRef>
         </p:style>
         <p:txBody>
-          <a:bodyPr rtlCol="0" anchor="ctr" wrap="square" lIns="50800" rIns="50800" tIns="50800" bIns="50800"/>
+          <a:bodyPr wrap="square" lIns="50800" tIns="50800" rIns="50800" bIns="50800" rtlCol="0" anchor="ctr"/>
           <a:lstStyle/>
           <a:p>
             <a:pPr algn="l">
@@ -5292,7 +5324,7 @@
           </a:fontRef>
         </p:style>
         <p:txBody>
-          <a:bodyPr rtlCol="0" anchor="t" wrap="square" lIns="50800" rIns="50800" tIns="50800" bIns="50800"/>
+          <a:bodyPr wrap="square" lIns="50800" tIns="50800" rIns="50800" bIns="50800" rtlCol="0" anchor="t"/>
           <a:lstStyle/>
           <a:p>
             <a:pPr algn="l">
@@ -5338,7 +5370,7 @@
         </p:nvSpPr>
         <p:spPr>
           <a:xfrm>
-            <a:off x="609600" y="1524000"/>
+            <a:off x="609600" y="1590675"/>
             <a:ext cx="5461000" cy="4572000"/>
           </a:xfrm>
           <a:prstGeom prst="rect">
@@ -5367,10 +5399,11 @@
           </a:fontRef>
         </p:style>
         <p:txBody>
-          <a:bodyPr rtlCol="0" anchor="ctr" lIns="0" rIns="0" tIns="0" bIns="0"/>
+          <a:bodyPr lIns="0" tIns="0" rIns="0" bIns="0" rtlCol="0" anchor="ctr"/>
           <a:lstStyle/>
           <a:p>
             <a:pPr algn="ctr"/>
+            <a:endParaRPr/>
           </a:p>
         </p:txBody>
       </p:sp>
@@ -5382,7 +5415,7 @@
         </p:nvSpPr>
         <p:spPr>
           <a:xfrm>
-            <a:off x="609600" y="1778000"/>
+            <a:off x="609600" y="1844675"/>
             <a:ext cx="5461000" cy="317500"/>
           </a:xfrm>
           <a:prstGeom prst="rect">
@@ -5409,7 +5442,7 @@
           </a:fontRef>
         </p:style>
         <p:txBody>
-          <a:bodyPr rtlCol="0" anchor="t" wrap="square" lIns="355600" rIns="355600" tIns="0" bIns="0"/>
+          <a:bodyPr wrap="square" lIns="355600" tIns="0" rIns="355600" bIns="0" rtlCol="0" anchor="t"/>
           <a:lstStyle/>
           <a:p>
             <a:pPr algn="l">
@@ -5437,7 +5470,7 @@
         </p:nvSpPr>
         <p:spPr>
           <a:xfrm>
-            <a:off x="609600" y="2159000"/>
+            <a:off x="609600" y="2225675"/>
             <a:ext cx="5461000" cy="1397000"/>
           </a:xfrm>
           <a:prstGeom prst="rect">
@@ -5464,7 +5497,7 @@
           </a:fontRef>
         </p:style>
         <p:txBody>
-          <a:bodyPr rtlCol="0" anchor="t" wrap="square" lIns="355600" rIns="355600" tIns="0" bIns="0"/>
+          <a:bodyPr wrap="square" lIns="355600" tIns="0" rIns="355600" bIns="0" rtlCol="0" anchor="t"/>
           <a:lstStyle/>
           <a:p>
             <a:pPr algn="l">
@@ -5524,8 +5557,8 @@
         </p:nvSpPr>
         <p:spPr>
           <a:xfrm>
-            <a:off x="609600" y="3937000"/>
-            <a:ext cx="5461000" cy="1905000"/>
+            <a:off x="609600" y="4251325"/>
+            <a:ext cx="5461000" cy="1530350"/>
           </a:xfrm>
           <a:prstGeom prst="rect">
             <a:avLst/>
@@ -5551,7 +5584,7 @@
           </a:fontRef>
         </p:style>
         <p:txBody>
-          <a:bodyPr rtlCol="0" anchor="t" wrap="square" lIns="355600" rIns="355600" tIns="0" bIns="0"/>
+          <a:bodyPr wrap="square" lIns="355600" tIns="0" rIns="355600" bIns="0" rtlCol="0" anchor="t"/>
           <a:lstStyle/>
           <a:p>
             <a:pPr algn="l">
@@ -5579,7 +5612,7 @@
         </p:nvSpPr>
         <p:spPr>
           <a:xfrm>
-            <a:off x="6248400" y="1524000"/>
+            <a:off x="6248400" y="1590675"/>
             <a:ext cx="5334000" cy="4572000"/>
           </a:xfrm>
           <a:prstGeom prst="rect">
@@ -5608,10 +5641,11 @@
           </a:fontRef>
         </p:style>
         <p:txBody>
-          <a:bodyPr rtlCol="0" anchor="ctr" lIns="0" rIns="0" tIns="0" bIns="0"/>
+          <a:bodyPr lIns="0" tIns="0" rIns="0" bIns="0" rtlCol="0" anchor="ctr"/>
           <a:lstStyle/>
           <a:p>
             <a:pPr algn="ctr"/>
+            <a:endParaRPr/>
           </a:p>
         </p:txBody>
       </p:sp>
@@ -5623,7 +5657,7 @@
         </p:nvSpPr>
         <p:spPr>
           <a:xfrm>
-            <a:off x="6502400" y="1778000"/>
+            <a:off x="6502400" y="1844675"/>
             <a:ext cx="952500" cy="228600"/>
           </a:xfrm>
           <a:prstGeom prst="rect">
@@ -5652,10 +5686,11 @@
           </a:fontRef>
         </p:style>
         <p:txBody>
-          <a:bodyPr rtlCol="0" anchor="ctr" lIns="0" rIns="0" tIns="0" bIns="0"/>
+          <a:bodyPr lIns="0" tIns="0" rIns="0" bIns="0" rtlCol="0" anchor="ctr"/>
           <a:lstStyle/>
           <a:p>
             <a:pPr algn="ctr"/>
+            <a:endParaRPr/>
           </a:p>
         </p:txBody>
       </p:sp>
@@ -5667,7 +5702,7 @@
         </p:nvSpPr>
         <p:spPr>
           <a:xfrm>
-            <a:off x="6502400" y="1778000"/>
+            <a:off x="6502400" y="1844675"/>
             <a:ext cx="952500" cy="228600"/>
           </a:xfrm>
           <a:prstGeom prst="rect">
@@ -5694,7 +5729,7 @@
           </a:fontRef>
         </p:style>
         <p:txBody>
-          <a:bodyPr rtlCol="0" anchor="ctr" wrap="square" lIns="50800" rIns="50800" tIns="50800" bIns="50800"/>
+          <a:bodyPr wrap="square" lIns="50800" tIns="50800" rIns="50800" bIns="50800" rtlCol="0" anchor="ctr"/>
           <a:lstStyle/>
           <a:p>
             <a:pPr algn="ctr">
@@ -5722,7 +5757,7 @@
         </p:nvSpPr>
         <p:spPr>
           <a:xfrm>
-            <a:off x="6248400" y="2159000"/>
+            <a:off x="6248400" y="2225675"/>
             <a:ext cx="5334000" cy="1397000"/>
           </a:xfrm>
           <a:prstGeom prst="rect">
@@ -5749,7 +5784,7 @@
           </a:fontRef>
         </p:style>
         <p:txBody>
-          <a:bodyPr rtlCol="0" anchor="t" wrap="square" lIns="355600" rIns="355600" tIns="0" bIns="0"/>
+          <a:bodyPr wrap="square" lIns="355600" tIns="0" rIns="355600" bIns="0" rtlCol="0" anchor="t"/>
           <a:lstStyle/>
           <a:p>
             <a:pPr algn="l">
@@ -5793,7 +5828,7 @@
         </p:nvSpPr>
         <p:spPr>
           <a:xfrm>
-            <a:off x="6248400" y="3556000"/>
+            <a:off x="6248400" y="3622675"/>
             <a:ext cx="5334000" cy="2286000"/>
           </a:xfrm>
           <a:prstGeom prst="rect">
@@ -5820,7 +5855,7 @@
           </a:fontRef>
         </p:style>
         <p:txBody>
-          <a:bodyPr rtlCol="0" anchor="t" wrap="square" lIns="355600" rIns="355600" tIns="0" bIns="0"/>
+          <a:bodyPr wrap="square" lIns="355600" tIns="0" rIns="355600" bIns="0" rtlCol="0" anchor="t"/>
           <a:lstStyle/>
           <a:p>
             <a:pPr algn="l">
@@ -5867,7 +5902,7 @@
 </file>
 
 <file path=ppt/slides/slide12.xml><?xml version="1.0" encoding="utf-8"?>
-<p:sld xmlns:a="http://schemas.openxmlformats.org/drawingml/2006/main" xmlns:p="http://schemas.openxmlformats.org/presentationml/2006/main" xmlns:r="http://schemas.openxmlformats.org/officeDocument/2006/relationships">
+<p:sld xmlns:a="http://schemas.openxmlformats.org/drawingml/2006/main" xmlns:r="http://schemas.openxmlformats.org/officeDocument/2006/relationships" xmlns:p="http://schemas.openxmlformats.org/presentationml/2006/main">
   <p:cSld>
     <p:spTree>
       <p:nvGrpSpPr>
@@ -5875,7 +5910,14 @@
         <p:cNvGrpSpPr/>
         <p:nvPr/>
       </p:nvGrpSpPr>
-      <p:grpSpPr/>
+      <p:grpSpPr>
+        <a:xfrm>
+          <a:off x="0" y="0"/>
+          <a:ext cx="0" cy="0"/>
+          <a:chOff x="0" y="0"/>
+          <a:chExt cx="0" cy="0"/>
+        </a:xfrm>
+      </p:grpSpPr>
       <p:sp>
         <p:nvSpPr>
           <p:cNvPr id="2" name="Rectangle 1"/>
@@ -5913,10 +5955,11 @@
           </a:fontRef>
         </p:style>
         <p:txBody>
-          <a:bodyPr rtlCol="0" anchor="ctr" lIns="0" rIns="0" tIns="0" bIns="0"/>
+          <a:bodyPr lIns="0" tIns="0" rIns="0" bIns="0" rtlCol="0" anchor="ctr"/>
           <a:lstStyle/>
           <a:p>
             <a:pPr algn="ctr"/>
+            <a:endParaRPr/>
           </a:p>
         </p:txBody>
       </p:sp>
@@ -5955,7 +5998,7 @@
           </a:fontRef>
         </p:style>
         <p:txBody>
-          <a:bodyPr rtlCol="0" anchor="ctr" wrap="square" lIns="50800" rIns="50800" tIns="50800" bIns="50800"/>
+          <a:bodyPr wrap="square" lIns="50800" tIns="50800" rIns="50800" bIns="50800" rtlCol="0" anchor="ctr"/>
           <a:lstStyle/>
           <a:p>
             <a:pPr algn="l">
@@ -6019,7 +6062,7 @@
           </a:fontRef>
         </p:style>
         <p:txBody>
-          <a:bodyPr rtlCol="0" anchor="ctr" wrap="square" lIns="50800" rIns="50800" tIns="50800" bIns="50800"/>
+          <a:bodyPr wrap="square" lIns="50800" tIns="50800" rIns="50800" bIns="50800" rtlCol="0" anchor="ctr"/>
           <a:lstStyle/>
           <a:p>
             <a:pPr algn="r">
@@ -6080,6 +6123,7 @@
           <a:lstStyle/>
           <a:p>
             <a:pPr algn="ctr"/>
+            <a:endParaRPr/>
           </a:p>
         </p:txBody>
       </p:sp>
@@ -6118,7 +6162,7 @@
           </a:fontRef>
         </p:style>
         <p:txBody>
-          <a:bodyPr rtlCol="0" anchor="ctr" wrap="square" lIns="50800" rIns="50800" tIns="50800" bIns="50800"/>
+          <a:bodyPr wrap="square" lIns="50800" tIns="50800" rIns="50800" bIns="50800" rtlCol="0" anchor="ctr"/>
           <a:lstStyle/>
           <a:p>
             <a:pPr algn="l">
@@ -6173,7 +6217,7 @@
           </a:fontRef>
         </p:style>
         <p:txBody>
-          <a:bodyPr rtlCol="0" anchor="t" wrap="square" lIns="50800" rIns="50800" tIns="50800" bIns="50800"/>
+          <a:bodyPr wrap="square" lIns="50800" tIns="50800" rIns="50800" bIns="50800" rtlCol="0" anchor="t"/>
           <a:lstStyle/>
           <a:p>
             <a:pPr algn="l">
@@ -6248,10 +6292,11 @@
           </a:fontRef>
         </p:style>
         <p:txBody>
-          <a:bodyPr rtlCol="0" anchor="ctr" lIns="0" rIns="0" tIns="0" bIns="0"/>
+          <a:bodyPr lIns="0" tIns="0" rIns="0" bIns="0" rtlCol="0" anchor="ctr"/>
           <a:lstStyle/>
           <a:p>
             <a:pPr algn="ctr"/>
+            <a:endParaRPr/>
           </a:p>
         </p:txBody>
       </p:sp>
@@ -6290,7 +6335,7 @@
           </a:fontRef>
         </p:style>
         <p:txBody>
-          <a:bodyPr rtlCol="0" anchor="t" wrap="square" lIns="381000" rIns="381000" tIns="0" bIns="0"/>
+          <a:bodyPr wrap="square" lIns="381000" tIns="0" rIns="381000" bIns="0" rtlCol="0" anchor="t"/>
           <a:lstStyle/>
           <a:p>
             <a:pPr algn="l">
@@ -6345,7 +6390,7 @@
           </a:fontRef>
         </p:style>
         <p:txBody>
-          <a:bodyPr rtlCol="0" anchor="t" wrap="square" lIns="381000" rIns="381000" tIns="0" bIns="0"/>
+          <a:bodyPr wrap="square" lIns="381000" tIns="0" rIns="381000" bIns="0" rtlCol="0" anchor="t"/>
           <a:lstStyle/>
           <a:p>
             <a:pPr algn="l">
@@ -6409,7 +6454,7 @@
           </a:fontRef>
         </p:style>
         <p:txBody>
-          <a:bodyPr rtlCol="0" anchor="t" wrap="square" lIns="381000" rIns="381000" tIns="0" bIns="0"/>
+          <a:bodyPr wrap="square" lIns="381000" tIns="0" rIns="381000" bIns="0" rtlCol="0" anchor="t"/>
           <a:lstStyle/>
           <a:p>
             <a:pPr algn="l">
@@ -6464,7 +6509,7 @@
           </a:fontRef>
         </p:style>
         <p:txBody>
-          <a:bodyPr rtlCol="0" anchor="t" wrap="square" lIns="381000" rIns="381000" tIns="0" bIns="0"/>
+          <a:bodyPr wrap="square" lIns="381000" tIns="0" rIns="381000" bIns="0" rtlCol="0" anchor="t"/>
           <a:lstStyle/>
           <a:p>
             <a:pPr algn="l">
@@ -6473,9 +6518,9 @@
               </a:lnSpc>
             </a:pPr>
             <a:r>
-              <a:rPr sz="1500" b="0" i="0">
-                <a:solidFill>
-                  <a:srgbClr val="B9C7DE"/>
+              <a:rPr sz="1600" b="0" i="0">
+                <a:solidFill>
+                  <a:schemeClr val="bg1"/>
                 </a:solidFill>
                 <a:latin typeface="Yu Gothic UI"/>
               </a:rPr>
@@ -6489,9 +6534,9 @@
               </a:lnSpc>
             </a:pPr>
             <a:r>
-              <a:rPr sz="1500" b="0" i="0">
-                <a:solidFill>
-                  <a:srgbClr val="B9C7DE"/>
+              <a:rPr sz="1600" b="0" i="0">
+                <a:solidFill>
+                  <a:schemeClr val="bg1"/>
                 </a:solidFill>
                 <a:latin typeface="Yu Gothic UI"/>
               </a:rPr>
@@ -6509,7 +6554,7 @@
         <p:spPr>
           <a:xfrm>
             <a:off x="6502400" y="1524000"/>
-            <a:ext cx="5080000" cy="2159000"/>
+            <a:ext cx="5080000" cy="1835150"/>
           </a:xfrm>
           <a:prstGeom prst="rect">
             <a:avLst/>
@@ -6537,10 +6582,11 @@
           </a:fontRef>
         </p:style>
         <p:txBody>
-          <a:bodyPr rtlCol="0" anchor="ctr" lIns="0" rIns="0" tIns="0" bIns="0"/>
+          <a:bodyPr lIns="0" tIns="0" rIns="0" bIns="0" rtlCol="0" anchor="ctr"/>
           <a:lstStyle/>
           <a:p>
             <a:pPr algn="ctr"/>
+            <a:endParaRPr/>
           </a:p>
         </p:txBody>
       </p:sp>
@@ -6552,8 +6598,8 @@
         </p:nvSpPr>
         <p:spPr>
           <a:xfrm>
-            <a:off x="6502400" y="1524000"/>
-            <a:ext cx="38100" cy="2159000"/>
+            <a:off x="6498590" y="1616074"/>
+            <a:ext cx="49528" cy="1743075"/>
           </a:xfrm>
           <a:prstGeom prst="rect">
             <a:avLst/>
@@ -6581,10 +6627,11 @@
           </a:fontRef>
         </p:style>
         <p:txBody>
-          <a:bodyPr rtlCol="0" anchor="ctr" lIns="0" rIns="0" tIns="0" bIns="0"/>
+          <a:bodyPr lIns="0" tIns="0" rIns="0" bIns="0" rtlCol="0" anchor="ctr"/>
           <a:lstStyle/>
           <a:p>
             <a:pPr algn="ctr"/>
+            <a:endParaRPr/>
           </a:p>
         </p:txBody>
       </p:sp>
@@ -6596,7 +6643,7 @@
         </p:nvSpPr>
         <p:spPr>
           <a:xfrm>
-            <a:off x="6705600" y="1778000"/>
+            <a:off x="6705600" y="1701800"/>
             <a:ext cx="4673600" cy="317500"/>
           </a:xfrm>
           <a:prstGeom prst="rect">
@@ -6623,7 +6670,7 @@
           </a:fontRef>
         </p:style>
         <p:txBody>
-          <a:bodyPr rtlCol="0" anchor="t" wrap="square" lIns="50800" rIns="50800" tIns="50800" bIns="50800"/>
+          <a:bodyPr wrap="square" lIns="50800" tIns="50800" rIns="50800" bIns="50800" rtlCol="0" anchor="t"/>
           <a:lstStyle/>
           <a:p>
             <a:pPr algn="l">
@@ -6651,8 +6698,8 @@
         </p:nvSpPr>
         <p:spPr>
           <a:xfrm>
-            <a:off x="6705600" y="2159000"/>
-            <a:ext cx="4673600" cy="1397000"/>
+            <a:off x="6705600" y="2082800"/>
+            <a:ext cx="4673600" cy="987425"/>
           </a:xfrm>
           <a:prstGeom prst="rect">
             <a:avLst/>
@@ -6678,7 +6725,7 @@
           </a:fontRef>
         </p:style>
         <p:txBody>
-          <a:bodyPr rtlCol="0" anchor="t" wrap="square" lIns="50800" rIns="50800" tIns="50800" bIns="50800"/>
+          <a:bodyPr wrap="square" lIns="50800" tIns="50800" rIns="50800" bIns="50800" rtlCol="0" anchor="t"/>
           <a:lstStyle/>
           <a:p>
             <a:pPr algn="l">
@@ -6758,8 +6805,8 @@
         </p:nvSpPr>
         <p:spPr>
           <a:xfrm>
-            <a:off x="6502400" y="3937000"/>
-            <a:ext cx="5080000" cy="2159000"/>
+            <a:off x="6502400" y="3565524"/>
+            <a:ext cx="5080000" cy="2530475"/>
           </a:xfrm>
           <a:prstGeom prst="rect">
             <a:avLst/>
@@ -6787,10 +6834,11 @@
           </a:fontRef>
         </p:style>
         <p:txBody>
-          <a:bodyPr rtlCol="0" anchor="ctr" lIns="0" rIns="0" tIns="0" bIns="0"/>
+          <a:bodyPr lIns="0" tIns="0" rIns="0" bIns="0" rtlCol="0" anchor="ctr"/>
           <a:lstStyle/>
           <a:p>
             <a:pPr algn="ctr"/>
+            <a:endParaRPr/>
           </a:p>
         </p:txBody>
       </p:sp>
@@ -6802,8 +6850,8 @@
         </p:nvSpPr>
         <p:spPr>
           <a:xfrm>
-            <a:off x="6502400" y="3937000"/>
-            <a:ext cx="38100" cy="2159000"/>
+            <a:off x="6502399" y="3565525"/>
+            <a:ext cx="45719" cy="2530474"/>
           </a:xfrm>
           <a:prstGeom prst="rect">
             <a:avLst/>
@@ -6831,10 +6879,11 @@
           </a:fontRef>
         </p:style>
         <p:txBody>
-          <a:bodyPr rtlCol="0" anchor="ctr" lIns="0" rIns="0" tIns="0" bIns="0"/>
+          <a:bodyPr lIns="0" tIns="0" rIns="0" bIns="0" rtlCol="0" anchor="ctr"/>
           <a:lstStyle/>
           <a:p>
             <a:pPr algn="ctr"/>
+            <a:endParaRPr/>
           </a:p>
         </p:txBody>
       </p:sp>
@@ -6846,7 +6895,7 @@
         </p:nvSpPr>
         <p:spPr>
           <a:xfrm>
-            <a:off x="6705600" y="4127500"/>
+            <a:off x="6705600" y="3756025"/>
             <a:ext cx="4673600" cy="317500"/>
           </a:xfrm>
           <a:prstGeom prst="rect">
@@ -6873,7 +6922,7 @@
           </a:fontRef>
         </p:style>
         <p:txBody>
-          <a:bodyPr rtlCol="0" anchor="t" wrap="square" lIns="50800" rIns="50800" tIns="50800" bIns="50800"/>
+          <a:bodyPr wrap="square" lIns="50800" tIns="50800" rIns="50800" bIns="50800" rtlCol="0" anchor="t"/>
           <a:lstStyle/>
           <a:p>
             <a:pPr algn="l">
@@ -6901,7 +6950,7 @@
         </p:nvSpPr>
         <p:spPr>
           <a:xfrm>
-            <a:off x="6705600" y="4445000"/>
+            <a:off x="6705600" y="4073525"/>
             <a:ext cx="4673600" cy="762000"/>
           </a:xfrm>
           <a:prstGeom prst="rect">
@@ -6928,7 +6977,7 @@
           </a:fontRef>
         </p:style>
         <p:txBody>
-          <a:bodyPr rtlCol="0" anchor="t" wrap="square" lIns="50800" rIns="50800" tIns="50800" bIns="50800"/>
+          <a:bodyPr wrap="square" lIns="50800" tIns="50800" rIns="50800" bIns="50800" rtlCol="0" anchor="t"/>
           <a:lstStyle/>
           <a:p>
             <a:pPr algn="l">
@@ -6943,8 +6992,23 @@
                 </a:solidFill>
                 <a:latin typeface="Yu Gothic UI"/>
               </a:rPr>
-              <a:t>8社</a:t>
-            </a:r>
+              <a:t>8</a:t>
+            </a:r>
+            <a:r>
+              <a:rPr sz="3200" b="1" i="0">
+                <a:solidFill>
+                  <a:srgbClr val="3FD0E9"/>
+                </a:solidFill>
+                <a:latin typeface="Yu Gothic UI"/>
+              </a:rPr>
+              <a:t>社</a:t>
+            </a:r>
+            <a:endParaRPr sz="6000" b="1" i="0">
+              <a:solidFill>
+                <a:srgbClr val="3FD0E9"/>
+              </a:solidFill>
+              <a:latin typeface="Yu Gothic UI"/>
+            </a:endParaRPr>
           </a:p>
         </p:txBody>
       </p:sp>
@@ -6956,8 +7020,8 @@
         </p:nvSpPr>
         <p:spPr>
           <a:xfrm>
-            <a:off x="6705600" y="5334000"/>
-            <a:ext cx="4673600" cy="698500"/>
+            <a:off x="6705600" y="4962524"/>
+            <a:ext cx="4673600" cy="930275"/>
           </a:xfrm>
           <a:prstGeom prst="rect">
             <a:avLst/>
@@ -6983,7 +7047,7 @@
           </a:fontRef>
         </p:style>
         <p:txBody>
-          <a:bodyPr rtlCol="0" anchor="t" wrap="square" lIns="50800" rIns="50800" tIns="50800" bIns="50800"/>
+          <a:bodyPr wrap="square" lIns="50800" tIns="50800" rIns="50800" bIns="50800" rtlCol="0" anchor="t"/>
           <a:lstStyle/>
           <a:p>
             <a:pPr algn="l">
@@ -6992,13 +7056,22 @@
               </a:lnSpc>
             </a:pPr>
             <a:r>
+              <a:rPr lang="ja-JP" altLang="en-US" sz="1600" b="0" i="0">
+                <a:solidFill>
+                  <a:srgbClr val="FFFFFF"/>
+                </a:solidFill>
+                <a:latin typeface="Yu Gothic UI"/>
+              </a:rPr>
+              <a:t>伴走型で深くコミットする</a:t>
+            </a:r>
+            <a:r>
               <a:rPr sz="1600" b="0" i="0">
                 <a:solidFill>
                   <a:srgbClr val="FFFFFF"/>
                 </a:solidFill>
                 <a:latin typeface="Yu Gothic UI"/>
               </a:rPr>
-              <a:t>伴走型のため、同時にお引き受けできる企業数に</a:t>
+              <a:t>ため、同時にお引き受けできる企業数に</a:t>
             </a:r>
             <a:r>
               <a:rPr sz="1600" b="1" i="0">
@@ -7030,7 +7103,7 @@
 </file>
 
 <file path=ppt/slides/slide13.xml><?xml version="1.0" encoding="utf-8"?>
-<p:sld xmlns:a="http://schemas.openxmlformats.org/drawingml/2006/main" xmlns:p="http://schemas.openxmlformats.org/presentationml/2006/main" xmlns:r="http://schemas.openxmlformats.org/officeDocument/2006/relationships">
+<p:sld xmlns:a="http://schemas.openxmlformats.org/drawingml/2006/main" xmlns:r="http://schemas.openxmlformats.org/officeDocument/2006/relationships" xmlns:p="http://schemas.openxmlformats.org/presentationml/2006/main">
   <p:cSld>
     <p:spTree>
       <p:nvGrpSpPr>
@@ -7038,7 +7111,14 @@
         <p:cNvGrpSpPr/>
         <p:nvPr/>
       </p:nvGrpSpPr>
-      <p:grpSpPr/>
+      <p:grpSpPr>
+        <a:xfrm>
+          <a:off x="0" y="0"/>
+          <a:ext cx="0" cy="0"/>
+          <a:chOff x="0" y="0"/>
+          <a:chExt cx="0" cy="0"/>
+        </a:xfrm>
+      </p:grpSpPr>
       <p:sp>
         <p:nvSpPr>
           <p:cNvPr id="2" name="Rectangle 1"/>
@@ -7076,10 +7156,11 @@
           </a:fontRef>
         </p:style>
         <p:txBody>
-          <a:bodyPr rtlCol="0" anchor="ctr" lIns="0" rIns="0" tIns="0" bIns="0"/>
+          <a:bodyPr lIns="0" tIns="0" rIns="0" bIns="0" rtlCol="0" anchor="ctr"/>
           <a:lstStyle/>
           <a:p>
             <a:pPr algn="ctr"/>
+            <a:endParaRPr/>
           </a:p>
         </p:txBody>
       </p:sp>
@@ -7144,10 +7225,11 @@
           </a:fontRef>
         </p:style>
         <p:txBody>
-          <a:bodyPr rtlCol="0" anchor="ctr" lIns="0" rIns="0" tIns="0" bIns="0"/>
+          <a:bodyPr lIns="0" tIns="0" rIns="0" bIns="0" rtlCol="0" anchor="ctr"/>
           <a:lstStyle/>
           <a:p>
             <a:pPr algn="ctr"/>
+            <a:endParaRPr/>
           </a:p>
         </p:txBody>
       </p:sp>
@@ -7186,7 +7268,7 @@
           </a:fontRef>
         </p:style>
         <p:txBody>
-          <a:bodyPr rtlCol="0" anchor="t" wrap="square" lIns="50800" rIns="50800" tIns="50800" bIns="50800"/>
+          <a:bodyPr wrap="square" lIns="50800" tIns="50800" rIns="50800" bIns="50800" rtlCol="0" anchor="t"/>
           <a:lstStyle/>
           <a:p>
             <a:pPr algn="l">
@@ -7215,7 +7297,7 @@
         <p:spPr>
           <a:xfrm>
             <a:off x="762000" y="1524000"/>
-            <a:ext cx="6985000" cy="1778000"/>
+            <a:ext cx="6985000" cy="3302000"/>
           </a:xfrm>
           <a:prstGeom prst="rect">
             <a:avLst/>
@@ -7241,7 +7323,7 @@
           </a:fontRef>
         </p:style>
         <p:txBody>
-          <a:bodyPr rtlCol="0" anchor="t" wrap="square" lIns="50800" rIns="50800" tIns="50800" bIns="50800"/>
+          <a:bodyPr wrap="square" lIns="50800" tIns="50800" rIns="50800" bIns="50800" rtlCol="0" anchor="t"/>
           <a:lstStyle/>
           <a:p>
             <a:pPr algn="l">
@@ -7250,7 +7332,7 @@
               </a:lnSpc>
             </a:pPr>
             <a:r>
-              <a:rPr sz="5600" b="1" i="0">
+              <a:rPr sz="4000" b="1" i="0">
                 <a:solidFill>
                   <a:srgbClr val="FFFFFF"/>
                 </a:solidFill>
@@ -7266,7 +7348,7 @@
               </a:lnSpc>
             </a:pPr>
             <a:r>
-              <a:rPr sz="5600" b="1" i="0">
+              <a:rPr sz="4000" b="1" i="0">
                 <a:solidFill>
                   <a:srgbClr val="3FD0E9"/>
                 </a:solidFill>
@@ -7275,7 +7357,7 @@
               <a:t>先着順</a:t>
             </a:r>
             <a:r>
-              <a:rPr sz="5600" b="1" i="0">
+              <a:rPr sz="4000" b="1" i="0">
                 <a:solidFill>
                   <a:srgbClr val="FFFFFF"/>
                 </a:solidFill>
@@ -7295,7 +7377,7 @@
         <p:spPr>
           <a:xfrm>
             <a:off x="762000" y="3429000"/>
-            <a:ext cx="9525000" cy="1397000"/>
+            <a:ext cx="6543675" cy="1397000"/>
           </a:xfrm>
           <a:prstGeom prst="rect">
             <a:avLst/>
@@ -7321,7 +7403,7 @@
           </a:fontRef>
         </p:style>
         <p:txBody>
-          <a:bodyPr rtlCol="0" anchor="t" wrap="square" lIns="50800" rIns="50800" tIns="50800" bIns="50800"/>
+          <a:bodyPr wrap="square" lIns="50800" tIns="50800" rIns="50800" bIns="50800" rtlCol="0" anchor="t"/>
           <a:lstStyle/>
           <a:p>
             <a:pPr algn="l">
@@ -7330,7 +7412,7 @@
               </a:lnSpc>
             </a:pPr>
             <a:r>
-              <a:rPr sz="2000" b="0" i="0">
+              <a:rPr sz="1600" b="0" i="0">
                 <a:solidFill>
                   <a:srgbClr val="E8EEF5"/>
                 </a:solidFill>
@@ -7339,7 +7421,7 @@
               <a:t>他の企業様からのお申込みが先に入った場合、ご依頼を</a:t>
             </a:r>
             <a:r>
-              <a:rPr sz="2000" b="1" i="0">
+              <a:rPr sz="1600" b="1" i="0">
                 <a:solidFill>
                   <a:srgbClr val="3FD0E9"/>
                 </a:solidFill>
@@ -7348,7 +7430,7 @@
               <a:t>やむを得ずお断り</a:t>
             </a:r>
             <a:r>
-              <a:rPr sz="2000" b="0" i="0">
+              <a:rPr sz="1600" b="0" i="0">
                 <a:solidFill>
                   <a:srgbClr val="E8EEF5"/>
                 </a:solidFill>
@@ -7364,7 +7446,7 @@
               </a:lnSpc>
             </a:pPr>
             <a:r>
-              <a:rPr sz="2000" b="0" i="0">
+              <a:rPr sz="1600" b="0" i="0">
                 <a:solidFill>
                   <a:srgbClr val="E8EEF5"/>
                 </a:solidFill>
@@ -7373,7 +7455,7 @@
               <a:t>ご検討中の場合は、</a:t>
             </a:r>
             <a:r>
-              <a:rPr sz="2000" b="1" i="0">
+              <a:rPr sz="1600" b="1" i="0">
                 <a:solidFill>
                   <a:srgbClr val="3FD0E9"/>
                 </a:solidFill>
@@ -7382,7 +7464,7 @@
               <a:t>お早めにご連絡</a:t>
             </a:r>
             <a:r>
-              <a:rPr sz="2000" b="0" i="0">
+              <a:rPr sz="1600" b="0" i="0">
                 <a:solidFill>
                   <a:srgbClr val="E8EEF5"/>
                 </a:solidFill>
@@ -7401,8 +7483,8 @@
         </p:nvSpPr>
         <p:spPr>
           <a:xfrm>
-            <a:off x="762000" y="5080000"/>
-            <a:ext cx="8255000" cy="1016000"/>
+            <a:off x="762000" y="5241925"/>
+            <a:ext cx="6362700" cy="1016000"/>
           </a:xfrm>
           <a:prstGeom prst="rect">
             <a:avLst/>
@@ -7430,10 +7512,11 @@
           </a:fontRef>
         </p:style>
         <p:txBody>
-          <a:bodyPr rtlCol="0" anchor="ctr" lIns="0" rIns="0" tIns="0" bIns="0"/>
+          <a:bodyPr lIns="0" tIns="0" rIns="0" bIns="0" rtlCol="0" anchor="ctr"/>
           <a:lstStyle/>
           <a:p>
             <a:pPr algn="ctr"/>
+            <a:endParaRPr/>
           </a:p>
         </p:txBody>
       </p:sp>
@@ -7445,8 +7528,8 @@
         </p:nvSpPr>
         <p:spPr>
           <a:xfrm>
-            <a:off x="762000" y="5080000"/>
-            <a:ext cx="38100" cy="1016000"/>
+            <a:off x="761999" y="5241925"/>
+            <a:ext cx="45719" cy="1016000"/>
           </a:xfrm>
           <a:prstGeom prst="rect">
             <a:avLst/>
@@ -7474,10 +7557,11 @@
           </a:fontRef>
         </p:style>
         <p:txBody>
-          <a:bodyPr rtlCol="0" anchor="ctr" lIns="0" rIns="0" tIns="0" bIns="0"/>
+          <a:bodyPr lIns="0" tIns="0" rIns="0" bIns="0" rtlCol="0" anchor="ctr"/>
           <a:lstStyle/>
           <a:p>
             <a:pPr algn="ctr"/>
+            <a:endParaRPr/>
           </a:p>
         </p:txBody>
       </p:sp>
@@ -7489,8 +7573,8 @@
         </p:nvSpPr>
         <p:spPr>
           <a:xfrm>
-            <a:off x="1016000" y="5207000"/>
-            <a:ext cx="1270000" cy="254000"/>
+            <a:off x="1016000" y="5368925"/>
+            <a:ext cx="978877" cy="254000"/>
           </a:xfrm>
           <a:prstGeom prst="rect">
             <a:avLst/>
@@ -7516,7 +7600,7 @@
           </a:fontRef>
         </p:style>
         <p:txBody>
-          <a:bodyPr rtlCol="0" anchor="ctr" wrap="square" lIns="50800" rIns="50800" tIns="50800" bIns="50800"/>
+          <a:bodyPr wrap="square" lIns="50800" tIns="50800" rIns="50800" bIns="50800" rtlCol="0" anchor="ctr"/>
           <a:lstStyle/>
           <a:p>
             <a:pPr algn="l">
@@ -7544,8 +7628,8 @@
         </p:nvSpPr>
         <p:spPr>
           <a:xfrm>
-            <a:off x="2413000" y="5207000"/>
-            <a:ext cx="6350000" cy="381000"/>
+            <a:off x="2413000" y="5368925"/>
+            <a:ext cx="4894385" cy="381000"/>
           </a:xfrm>
           <a:prstGeom prst="rect">
             <a:avLst/>
@@ -7571,7 +7655,7 @@
           </a:fontRef>
         </p:style>
         <p:txBody>
-          <a:bodyPr rtlCol="0" anchor="ctr" wrap="square" lIns="50800" rIns="50800" tIns="50800" bIns="50800"/>
+          <a:bodyPr wrap="square" lIns="50800" tIns="50800" rIns="50800" bIns="50800" rtlCol="0" anchor="ctr"/>
           <a:lstStyle/>
           <a:p>
             <a:pPr algn="l">
@@ -7586,7 +7670,43 @@
                 </a:solidFill>
                 <a:latin typeface="Yu Gothic UI"/>
               </a:rPr>
-              <a:t>リーガルアクセス株式会社 ／ 代表取締役 弁護士 福島 駿太</a:t>
+              <a:t>リーガルアクセス</a:t>
+            </a:r>
+            <a:r>
+              <a:rPr lang="ja-JP" altLang="en-US" sz="2000" b="1" i="0">
+                <a:solidFill>
+                  <a:srgbClr val="FFFFFF"/>
+                </a:solidFill>
+                <a:latin typeface="Yu Gothic UI"/>
+              </a:rPr>
+              <a:t>（</a:t>
+            </a:r>
+            <a:r>
+              <a:rPr sz="2000" b="1" i="0">
+                <a:solidFill>
+                  <a:srgbClr val="FFFFFF"/>
+                </a:solidFill>
+                <a:latin typeface="Yu Gothic UI"/>
+              </a:rPr>
+              <a:t>株</a:t>
+            </a:r>
+            <a:r>
+              <a:rPr lang="ja-JP" altLang="en-US" sz="2000" b="1" i="0">
+                <a:solidFill>
+                  <a:srgbClr val="FFFFFF"/>
+                </a:solidFill>
+                <a:latin typeface="Yu Gothic UI"/>
+              </a:rPr>
+              <a:t>）</a:t>
+            </a:r>
+            <a:r>
+              <a:rPr sz="2000" b="1" i="0">
+                <a:solidFill>
+                  <a:srgbClr val="FFFFFF"/>
+                </a:solidFill>
+                <a:latin typeface="Yu Gothic UI"/>
+              </a:rPr>
+              <a:t> ／  福島 駿太</a:t>
             </a:r>
           </a:p>
         </p:txBody>
@@ -7599,8 +7719,8 @@
         </p:nvSpPr>
         <p:spPr>
           <a:xfrm>
-            <a:off x="2413000" y="5588000"/>
-            <a:ext cx="6350000" cy="317500"/>
+            <a:off x="2413000" y="5749924"/>
+            <a:ext cx="4894385" cy="380999"/>
           </a:xfrm>
           <a:prstGeom prst="rect">
             <a:avLst/>
@@ -7626,7 +7746,7 @@
           </a:fontRef>
         </p:style>
         <p:txBody>
-          <a:bodyPr rtlCol="0" anchor="ctr" wrap="square" lIns="50800" rIns="50800" tIns="50800" bIns="50800"/>
+          <a:bodyPr wrap="square" lIns="50800" tIns="50800" rIns="50800" bIns="50800" rtlCol="0" anchor="ctr"/>
           <a:lstStyle/>
           <a:p>
             <a:pPr algn="l">
@@ -7635,14 +7755,38 @@
               </a:lnSpc>
             </a:pPr>
             <a:r>
-              <a:rPr sz="1400" b="0" i="0">
-                <a:solidFill>
-                  <a:srgbClr val="B9C7DE"/>
-                </a:solidFill>
-                <a:latin typeface="Yu Gothic UI"/>
-              </a:rPr>
-              <a:t>本資料に関するお問い合わせは、商談ご担当窓口までご連絡ください。</a:t>
-            </a:r>
+              <a:rPr lang="en-US" altLang="ja-JP" sz="1400" b="0" i="0">
+                <a:solidFill>
+                  <a:schemeClr val="bg1"/>
+                </a:solidFill>
+                <a:latin typeface="Yu Gothic UI"/>
+              </a:rPr>
+              <a:t>Mail</a:t>
+            </a:r>
+            <a:r>
+              <a:rPr lang="ja-JP" altLang="en-US" sz="1400" b="0" i="0">
+                <a:solidFill>
+                  <a:schemeClr val="bg1"/>
+                </a:solidFill>
+                <a:latin typeface="Yu Gothic UI"/>
+              </a:rPr>
+              <a:t>：</a:t>
+            </a:r>
+            <a:r>
+              <a:rPr lang="en-US" altLang="ja-JP" sz="1400" b="0" i="0">
+                <a:solidFill>
+                  <a:schemeClr val="bg1"/>
+                </a:solidFill>
+                <a:latin typeface="Yu Gothic UI"/>
+              </a:rPr>
+              <a:t>shunta.fukushima@legalaccess.co.jp</a:t>
+            </a:r>
+            <a:endParaRPr sz="1400" b="0" i="0">
+              <a:solidFill>
+                <a:schemeClr val="bg1"/>
+              </a:solidFill>
+              <a:latin typeface="Yu Gothic UI"/>
+            </a:endParaRPr>
           </a:p>
         </p:txBody>
       </p:sp>
@@ -7655,7 +7799,7 @@
 </file>
 
 <file path=ppt/slides/slide2.xml><?xml version="1.0" encoding="utf-8"?>
-<p:sld xmlns:a="http://schemas.openxmlformats.org/drawingml/2006/main" xmlns:p="http://schemas.openxmlformats.org/presentationml/2006/main" xmlns:r="http://schemas.openxmlformats.org/officeDocument/2006/relationships">
+<p:sld xmlns:a="http://schemas.openxmlformats.org/drawingml/2006/main" xmlns:r="http://schemas.openxmlformats.org/officeDocument/2006/relationships" xmlns:p="http://schemas.openxmlformats.org/presentationml/2006/main">
   <p:cSld>
     <p:spTree>
       <p:nvGrpSpPr>
@@ -7663,7 +7807,14 @@
         <p:cNvGrpSpPr/>
         <p:nvPr/>
       </p:nvGrpSpPr>
-      <p:grpSpPr/>
+      <p:grpSpPr>
+        <a:xfrm>
+          <a:off x="0" y="0"/>
+          <a:ext cx="0" cy="0"/>
+          <a:chOff x="0" y="0"/>
+          <a:chExt cx="0" cy="0"/>
+        </a:xfrm>
+      </p:grpSpPr>
       <p:sp>
         <p:nvSpPr>
           <p:cNvPr id="2" name="Rectangle 1"/>
@@ -7701,10 +7852,11 @@
           </a:fontRef>
         </p:style>
         <p:txBody>
-          <a:bodyPr rtlCol="0" anchor="ctr" lIns="0" rIns="0" tIns="0" bIns="0"/>
+          <a:bodyPr lIns="0" tIns="0" rIns="0" bIns="0" rtlCol="0" anchor="ctr"/>
           <a:lstStyle/>
           <a:p>
             <a:pPr algn="ctr"/>
+            <a:endParaRPr/>
           </a:p>
         </p:txBody>
       </p:sp>
@@ -7743,7 +7895,7 @@
           </a:fontRef>
         </p:style>
         <p:txBody>
-          <a:bodyPr rtlCol="0" anchor="ctr" wrap="square" lIns="50800" rIns="50800" tIns="50800" bIns="50800"/>
+          <a:bodyPr wrap="square" lIns="50800" tIns="50800" rIns="50800" bIns="50800" rtlCol="0" anchor="ctr"/>
           <a:lstStyle/>
           <a:p>
             <a:pPr algn="l">
@@ -7807,7 +7959,7 @@
           </a:fontRef>
         </p:style>
         <p:txBody>
-          <a:bodyPr rtlCol="0" anchor="ctr" wrap="square" lIns="50800" rIns="50800" tIns="50800" bIns="50800"/>
+          <a:bodyPr wrap="square" lIns="50800" tIns="50800" rIns="50800" bIns="50800" rtlCol="0" anchor="ctr"/>
           <a:lstStyle/>
           <a:p>
             <a:pPr algn="r">
@@ -7868,6 +8020,7 @@
           <a:lstStyle/>
           <a:p>
             <a:pPr algn="ctr"/>
+            <a:endParaRPr/>
           </a:p>
         </p:txBody>
       </p:sp>
@@ -7906,7 +8059,7 @@
           </a:fontRef>
         </p:style>
         <p:txBody>
-          <a:bodyPr rtlCol="0" anchor="ctr" wrap="square" lIns="50800" rIns="50800" tIns="50800" bIns="50800"/>
+          <a:bodyPr wrap="square" lIns="50800" tIns="50800" rIns="50800" bIns="50800" rtlCol="0" anchor="ctr"/>
           <a:lstStyle/>
           <a:p>
             <a:pPr algn="l">
@@ -7961,7 +8114,7 @@
           </a:fontRef>
         </p:style>
         <p:txBody>
-          <a:bodyPr rtlCol="0" anchor="t" wrap="square" lIns="50800" rIns="50800" tIns="50800" bIns="50800"/>
+          <a:bodyPr wrap="square" lIns="50800" tIns="50800" rIns="50800" bIns="50800" rtlCol="0" anchor="t"/>
           <a:lstStyle/>
           <a:p>
             <a:pPr algn="l">
@@ -8036,7 +8189,7 @@
           </a:fontRef>
         </p:style>
         <p:txBody>
-          <a:bodyPr rtlCol="0" anchor="ctr" wrap="square" lIns="177800" rIns="177800" tIns="127000" bIns="127000"/>
+          <a:bodyPr wrap="square" lIns="177800" tIns="127000" rIns="177800" bIns="127000" rtlCol="0" anchor="ctr"/>
           <a:lstStyle/>
           <a:p>
             <a:pPr algn="l">
@@ -8102,10 +8255,11 @@
           </a:fontRef>
         </p:style>
         <p:txBody>
-          <a:bodyPr rtlCol="0" anchor="ctr" lIns="0" rIns="0" tIns="0" bIns="0"/>
+          <a:bodyPr lIns="0" tIns="0" rIns="0" bIns="0" rtlCol="0" anchor="ctr"/>
           <a:lstStyle/>
           <a:p>
             <a:pPr algn="ctr"/>
+            <a:endParaRPr/>
           </a:p>
         </p:txBody>
       </p:sp>
@@ -8146,10 +8300,11 @@
           </a:fontRef>
         </p:style>
         <p:txBody>
-          <a:bodyPr rtlCol="0" anchor="ctr" lIns="0" rIns="0" tIns="0" bIns="0"/>
+          <a:bodyPr lIns="0" tIns="0" rIns="0" bIns="0" rtlCol="0" anchor="ctr"/>
           <a:lstStyle/>
           <a:p>
             <a:pPr algn="ctr"/>
+            <a:endParaRPr/>
           </a:p>
         </p:txBody>
       </p:sp>
@@ -8188,7 +8343,7 @@
           </a:fontRef>
         </p:style>
         <p:txBody>
-          <a:bodyPr rtlCol="0" anchor="t" wrap="square" lIns="152400" rIns="152400" tIns="0" bIns="0"/>
+          <a:bodyPr wrap="square" lIns="152400" tIns="0" rIns="152400" bIns="0" rtlCol="0" anchor="t"/>
           <a:lstStyle/>
           <a:p>
             <a:pPr algn="l">
@@ -8243,10 +8398,10 @@
           </a:fontRef>
         </p:style>
         <p:txBody>
-          <a:bodyPr rtlCol="0" anchor="t" wrap="square" lIns="152400" rIns="152400" tIns="0" bIns="0"/>
-          <a:lstStyle/>
-          <a:p>
-            <a:pPr algn="l">
+          <a:bodyPr wrap="square" lIns="152400" tIns="0" rIns="152400" bIns="0" rtlCol="0" anchor="t"/>
+          <a:lstStyle/>
+          <a:p>
+            <a:pPr algn="just">
               <a:lnSpc>
                 <a:spcPct val="135000"/>
               </a:lnSpc>
@@ -8258,8 +8413,7 @@
                 </a:solidFill>
                 <a:latin typeface="Yu Gothic UI"/>
               </a:rPr>
-              <a:t>とりあえず
-導入だけは済んだ</a:t>
+              <a:t>とりあえず導入だけは済んだ</a:t>
             </a:r>
           </a:p>
         </p:txBody>
@@ -8272,8 +8426,8 @@
         </p:nvSpPr>
         <p:spPr>
           <a:xfrm>
-            <a:off x="495300" y="3746500"/>
-            <a:ext cx="2159000" cy="2032000"/>
+            <a:off x="495300" y="4184650"/>
+            <a:ext cx="2159000" cy="1651000"/>
           </a:xfrm>
           <a:prstGeom prst="rect">
             <a:avLst/>
@@ -8299,10 +8453,10 @@
           </a:fontRef>
         </p:style>
         <p:txBody>
-          <a:bodyPr rtlCol="0" anchor="t" wrap="square" lIns="152400" rIns="152400" tIns="0" bIns="0"/>
-          <a:lstStyle/>
-          <a:p>
-            <a:pPr algn="l">
+          <a:bodyPr wrap="square" lIns="152400" tIns="0" rIns="152400" bIns="0" rtlCol="0" anchor="t"/>
+          <a:lstStyle/>
+          <a:p>
+            <a:pPr>
               <a:lnSpc>
                 <a:spcPct val="160000"/>
               </a:lnSpc>
@@ -8356,10 +8510,11 @@
           </a:fontRef>
         </p:style>
         <p:txBody>
-          <a:bodyPr rtlCol="0" anchor="ctr" lIns="0" rIns="0" tIns="0" bIns="0"/>
+          <a:bodyPr lIns="0" tIns="0" rIns="0" bIns="0" rtlCol="0" anchor="ctr"/>
           <a:lstStyle/>
           <a:p>
             <a:pPr algn="ctr"/>
+            <a:endParaRPr/>
           </a:p>
         </p:txBody>
       </p:sp>
@@ -8400,10 +8555,11 @@
           </a:fontRef>
         </p:style>
         <p:txBody>
-          <a:bodyPr rtlCol="0" anchor="ctr" lIns="0" rIns="0" tIns="0" bIns="0"/>
+          <a:bodyPr lIns="0" tIns="0" rIns="0" bIns="0" rtlCol="0" anchor="ctr"/>
           <a:lstStyle/>
           <a:p>
             <a:pPr algn="ctr"/>
+            <a:endParaRPr/>
           </a:p>
         </p:txBody>
       </p:sp>
@@ -8442,7 +8598,7 @@
           </a:fontRef>
         </p:style>
         <p:txBody>
-          <a:bodyPr rtlCol="0" anchor="t" wrap="square" lIns="152400" rIns="152400" tIns="0" bIns="0"/>
+          <a:bodyPr wrap="square" lIns="152400" tIns="0" rIns="152400" bIns="0" rtlCol="0" anchor="t"/>
           <a:lstStyle/>
           <a:p>
             <a:pPr algn="l">
@@ -8497,10 +8653,10 @@
           </a:fontRef>
         </p:style>
         <p:txBody>
-          <a:bodyPr rtlCol="0" anchor="t" wrap="square" lIns="152400" rIns="152400" tIns="0" bIns="0"/>
-          <a:lstStyle/>
-          <a:p>
-            <a:pPr algn="l">
+          <a:bodyPr wrap="square" lIns="152400" tIns="0" rIns="152400" bIns="0" rtlCol="0" anchor="t"/>
+          <a:lstStyle/>
+          <a:p>
+            <a:pPr algn="just">
               <a:lnSpc>
                 <a:spcPct val="135000"/>
               </a:lnSpc>
@@ -8512,8 +8668,7 @@
                 </a:solidFill>
                 <a:latin typeface="Yu Gothic UI"/>
               </a:rPr>
-              <a:t>使い方が
-分からない</a:t>
+              <a:t>使い方が分からない</a:t>
             </a:r>
           </a:p>
         </p:txBody>
@@ -8526,8 +8681,8 @@
         </p:nvSpPr>
         <p:spPr>
           <a:xfrm>
-            <a:off x="2755900" y="3746500"/>
-            <a:ext cx="2159000" cy="2032000"/>
+            <a:off x="2755900" y="4184650"/>
+            <a:ext cx="2159000" cy="1651000"/>
           </a:xfrm>
           <a:prstGeom prst="rect">
             <a:avLst/>
@@ -8553,10 +8708,10 @@
           </a:fontRef>
         </p:style>
         <p:txBody>
-          <a:bodyPr rtlCol="0" anchor="t" wrap="square" lIns="152400" rIns="152400" tIns="0" bIns="0"/>
-          <a:lstStyle/>
-          <a:p>
-            <a:pPr algn="l">
+          <a:bodyPr wrap="square" lIns="152400" tIns="0" rIns="152400" bIns="0" rtlCol="0" anchor="t"/>
+          <a:lstStyle/>
+          <a:p>
+            <a:pPr>
               <a:lnSpc>
                 <a:spcPct val="160000"/>
               </a:lnSpc>
@@ -8610,10 +8765,11 @@
           </a:fontRef>
         </p:style>
         <p:txBody>
-          <a:bodyPr rtlCol="0" anchor="ctr" lIns="0" rIns="0" tIns="0" bIns="0"/>
+          <a:bodyPr lIns="0" tIns="0" rIns="0" bIns="0" rtlCol="0" anchor="ctr"/>
           <a:lstStyle/>
           <a:p>
             <a:pPr algn="ctr"/>
+            <a:endParaRPr/>
           </a:p>
         </p:txBody>
       </p:sp>
@@ -8654,10 +8810,11 @@
           </a:fontRef>
         </p:style>
         <p:txBody>
-          <a:bodyPr rtlCol="0" anchor="ctr" lIns="0" rIns="0" tIns="0" bIns="0"/>
+          <a:bodyPr lIns="0" tIns="0" rIns="0" bIns="0" rtlCol="0" anchor="ctr"/>
           <a:lstStyle/>
           <a:p>
             <a:pPr algn="ctr"/>
+            <a:endParaRPr/>
           </a:p>
         </p:txBody>
       </p:sp>
@@ -8696,7 +8853,7 @@
           </a:fontRef>
         </p:style>
         <p:txBody>
-          <a:bodyPr rtlCol="0" anchor="t" wrap="square" lIns="152400" rIns="152400" tIns="0" bIns="0"/>
+          <a:bodyPr wrap="square" lIns="152400" tIns="0" rIns="152400" bIns="0" rtlCol="0" anchor="t"/>
           <a:lstStyle/>
           <a:p>
             <a:pPr algn="l">
@@ -8751,10 +8908,10 @@
           </a:fontRef>
         </p:style>
         <p:txBody>
-          <a:bodyPr rtlCol="0" anchor="t" wrap="square" lIns="152400" rIns="152400" tIns="0" bIns="0"/>
-          <a:lstStyle/>
-          <a:p>
-            <a:pPr algn="l">
+          <a:bodyPr wrap="square" lIns="152400" tIns="0" rIns="152400" bIns="0" rtlCol="0" anchor="t"/>
+          <a:lstStyle/>
+          <a:p>
+            <a:pPr algn="just">
               <a:lnSpc>
                 <a:spcPct val="135000"/>
               </a:lnSpc>
@@ -8766,8 +8923,7 @@
                 </a:solidFill>
                 <a:latin typeface="Yu Gothic UI"/>
               </a:rPr>
-              <a:t>法務は特殊で
-事例が出てこない</a:t>
+              <a:t>法務は特殊で事例が出てこない</a:t>
             </a:r>
           </a:p>
         </p:txBody>
@@ -8780,8 +8936,8 @@
         </p:nvSpPr>
         <p:spPr>
           <a:xfrm>
-            <a:off x="5016500" y="3746500"/>
-            <a:ext cx="2159000" cy="2032000"/>
+            <a:off x="5016500" y="4184650"/>
+            <a:ext cx="2159000" cy="1651000"/>
           </a:xfrm>
           <a:prstGeom prst="rect">
             <a:avLst/>
@@ -8807,10 +8963,10 @@
           </a:fontRef>
         </p:style>
         <p:txBody>
-          <a:bodyPr rtlCol="0" anchor="t" wrap="square" lIns="152400" rIns="152400" tIns="0" bIns="0"/>
-          <a:lstStyle/>
-          <a:p>
-            <a:pPr algn="l">
+          <a:bodyPr wrap="square" lIns="152400" tIns="0" rIns="152400" bIns="0" rtlCol="0" anchor="t"/>
+          <a:lstStyle/>
+          <a:p>
+            <a:pPr>
               <a:lnSpc>
                 <a:spcPct val="160000"/>
               </a:lnSpc>
@@ -8864,10 +9020,11 @@
           </a:fontRef>
         </p:style>
         <p:txBody>
-          <a:bodyPr rtlCol="0" anchor="ctr" lIns="0" rIns="0" tIns="0" bIns="0"/>
+          <a:bodyPr lIns="0" tIns="0" rIns="0" bIns="0" rtlCol="0" anchor="ctr"/>
           <a:lstStyle/>
           <a:p>
             <a:pPr algn="ctr"/>
+            <a:endParaRPr/>
           </a:p>
         </p:txBody>
       </p:sp>
@@ -8908,10 +9065,11 @@
           </a:fontRef>
         </p:style>
         <p:txBody>
-          <a:bodyPr rtlCol="0" anchor="ctr" lIns="0" rIns="0" tIns="0" bIns="0"/>
+          <a:bodyPr lIns="0" tIns="0" rIns="0" bIns="0" rtlCol="0" anchor="ctr"/>
           <a:lstStyle/>
           <a:p>
             <a:pPr algn="ctr"/>
+            <a:endParaRPr/>
           </a:p>
         </p:txBody>
       </p:sp>
@@ -8950,7 +9108,7 @@
           </a:fontRef>
         </p:style>
         <p:txBody>
-          <a:bodyPr rtlCol="0" anchor="t" wrap="square" lIns="152400" rIns="152400" tIns="0" bIns="0"/>
+          <a:bodyPr wrap="square" lIns="152400" tIns="0" rIns="152400" bIns="0" rtlCol="0" anchor="t"/>
           <a:lstStyle/>
           <a:p>
             <a:pPr algn="l">
@@ -9005,10 +9163,10 @@
           </a:fontRef>
         </p:style>
         <p:txBody>
-          <a:bodyPr rtlCol="0" anchor="t" wrap="square" lIns="152400" rIns="152400" tIns="0" bIns="0"/>
-          <a:lstStyle/>
-          <a:p>
-            <a:pPr algn="l">
+          <a:bodyPr wrap="square" lIns="152400" tIns="0" rIns="152400" bIns="0" rtlCol="0" anchor="t"/>
+          <a:lstStyle/>
+          <a:p>
+            <a:pPr algn="just">
               <a:lnSpc>
                 <a:spcPct val="135000"/>
               </a:lnSpc>
@@ -9020,8 +9178,7 @@
                 </a:solidFill>
                 <a:latin typeface="Yu Gothic UI"/>
               </a:rPr>
-              <a:t>効果は
-あるはずなのに</a:t>
+              <a:t>効果はあるはずなのに</a:t>
             </a:r>
           </a:p>
         </p:txBody>
@@ -9034,8 +9191,8 @@
         </p:nvSpPr>
         <p:spPr>
           <a:xfrm>
-            <a:off x="7277100" y="3746500"/>
-            <a:ext cx="2159000" cy="2032000"/>
+            <a:off x="7277100" y="4184650"/>
+            <a:ext cx="2159000" cy="1651000"/>
           </a:xfrm>
           <a:prstGeom prst="rect">
             <a:avLst/>
@@ -9061,10 +9218,10 @@
           </a:fontRef>
         </p:style>
         <p:txBody>
-          <a:bodyPr rtlCol="0" anchor="t" wrap="square" lIns="152400" rIns="152400" tIns="0" bIns="0"/>
-          <a:lstStyle/>
-          <a:p>
-            <a:pPr algn="l">
+          <a:bodyPr wrap="square" lIns="152400" tIns="0" rIns="152400" bIns="0" rtlCol="0" anchor="t"/>
+          <a:lstStyle/>
+          <a:p>
+            <a:pPr>
               <a:lnSpc>
                 <a:spcPct val="160000"/>
               </a:lnSpc>
@@ -9118,10 +9275,11 @@
           </a:fontRef>
         </p:style>
         <p:txBody>
-          <a:bodyPr rtlCol="0" anchor="ctr" lIns="0" rIns="0" tIns="0" bIns="0"/>
+          <a:bodyPr lIns="0" tIns="0" rIns="0" bIns="0" rtlCol="0" anchor="ctr"/>
           <a:lstStyle/>
           <a:p>
             <a:pPr algn="ctr"/>
+            <a:endParaRPr/>
           </a:p>
         </p:txBody>
       </p:sp>
@@ -9162,10 +9320,11 @@
           </a:fontRef>
         </p:style>
         <p:txBody>
-          <a:bodyPr rtlCol="0" anchor="ctr" lIns="0" rIns="0" tIns="0" bIns="0"/>
+          <a:bodyPr lIns="0" tIns="0" rIns="0" bIns="0" rtlCol="0" anchor="ctr"/>
           <a:lstStyle/>
           <a:p>
             <a:pPr algn="ctr"/>
+            <a:endParaRPr/>
           </a:p>
         </p:txBody>
       </p:sp>
@@ -9204,7 +9363,7 @@
           </a:fontRef>
         </p:style>
         <p:txBody>
-          <a:bodyPr rtlCol="0" anchor="t" wrap="square" lIns="152400" rIns="152400" tIns="0" bIns="0"/>
+          <a:bodyPr wrap="square" lIns="152400" tIns="0" rIns="152400" bIns="0" rtlCol="0" anchor="t"/>
           <a:lstStyle/>
           <a:p>
             <a:pPr algn="l">
@@ -9259,10 +9418,10 @@
           </a:fontRef>
         </p:style>
         <p:txBody>
-          <a:bodyPr rtlCol="0" anchor="t" wrap="square" lIns="152400" rIns="152400" tIns="0" bIns="0"/>
-          <a:lstStyle/>
-          <a:p>
-            <a:pPr algn="l">
+          <a:bodyPr wrap="square" lIns="152400" tIns="0" rIns="152400" bIns="0" rtlCol="0" anchor="t"/>
+          <a:lstStyle/>
+          <a:p>
+            <a:pPr algn="just">
               <a:lnSpc>
                 <a:spcPct val="135000"/>
               </a:lnSpc>
@@ -9274,8 +9433,7 @@
                 </a:solidFill>
                 <a:latin typeface="Yu Gothic UI"/>
               </a:rPr>
-              <a:t>情報管理の
-線引きが見えない</a:t>
+              <a:t>情報管理の線引きが見えない</a:t>
             </a:r>
           </a:p>
         </p:txBody>
@@ -9288,8 +9446,8 @@
         </p:nvSpPr>
         <p:spPr>
           <a:xfrm>
-            <a:off x="9537700" y="3746500"/>
-            <a:ext cx="2159000" cy="2032000"/>
+            <a:off x="9537700" y="4184650"/>
+            <a:ext cx="2292350" cy="1651000"/>
           </a:xfrm>
           <a:prstGeom prst="rect">
             <a:avLst/>
@@ -9315,10 +9473,10 @@
           </a:fontRef>
         </p:style>
         <p:txBody>
-          <a:bodyPr rtlCol="0" anchor="t" wrap="square" lIns="152400" rIns="152400" tIns="0" bIns="0"/>
-          <a:lstStyle/>
-          <a:p>
-            <a:pPr algn="l">
+          <a:bodyPr wrap="square" lIns="152400" tIns="0" rIns="152400" bIns="0" rtlCol="0" anchor="t"/>
+          <a:lstStyle/>
+          <a:p>
+            <a:pPr>
               <a:lnSpc>
                 <a:spcPct val="160000"/>
               </a:lnSpc>
@@ -9344,7 +9502,7 @@
 </file>
 
 <file path=ppt/slides/slide3.xml><?xml version="1.0" encoding="utf-8"?>
-<p:sld xmlns:a="http://schemas.openxmlformats.org/drawingml/2006/main" xmlns:p="http://schemas.openxmlformats.org/presentationml/2006/main" xmlns:r="http://schemas.openxmlformats.org/officeDocument/2006/relationships">
+<p:sld xmlns:a="http://schemas.openxmlformats.org/drawingml/2006/main" xmlns:r="http://schemas.openxmlformats.org/officeDocument/2006/relationships" xmlns:p="http://schemas.openxmlformats.org/presentationml/2006/main">
   <p:cSld>
     <p:spTree>
       <p:nvGrpSpPr>
@@ -9352,7 +9510,14 @@
         <p:cNvGrpSpPr/>
         <p:nvPr/>
       </p:nvGrpSpPr>
-      <p:grpSpPr/>
+      <p:grpSpPr>
+        <a:xfrm>
+          <a:off x="0" y="0"/>
+          <a:ext cx="0" cy="0"/>
+          <a:chOff x="0" y="0"/>
+          <a:chExt cx="0" cy="0"/>
+        </a:xfrm>
+      </p:grpSpPr>
       <p:sp>
         <p:nvSpPr>
           <p:cNvPr id="2" name="Rectangle 1"/>
@@ -9390,10 +9555,11 @@
           </a:fontRef>
         </p:style>
         <p:txBody>
-          <a:bodyPr rtlCol="0" anchor="ctr" lIns="0" rIns="0" tIns="0" bIns="0"/>
+          <a:bodyPr lIns="0" tIns="0" rIns="0" bIns="0" rtlCol="0" anchor="ctr"/>
           <a:lstStyle/>
           <a:p>
             <a:pPr algn="ctr"/>
+            <a:endParaRPr/>
           </a:p>
         </p:txBody>
       </p:sp>
@@ -9432,7 +9598,7 @@
           </a:fontRef>
         </p:style>
         <p:txBody>
-          <a:bodyPr rtlCol="0" anchor="ctr" wrap="square" lIns="50800" rIns="50800" tIns="50800" bIns="50800"/>
+          <a:bodyPr wrap="square" lIns="50800" tIns="50800" rIns="50800" bIns="50800" rtlCol="0" anchor="ctr"/>
           <a:lstStyle/>
           <a:p>
             <a:pPr algn="l">
@@ -9496,7 +9662,7 @@
           </a:fontRef>
         </p:style>
         <p:txBody>
-          <a:bodyPr rtlCol="0" anchor="ctr" wrap="square" lIns="50800" rIns="50800" tIns="50800" bIns="50800"/>
+          <a:bodyPr wrap="square" lIns="50800" tIns="50800" rIns="50800" bIns="50800" rtlCol="0" anchor="ctr"/>
           <a:lstStyle/>
           <a:p>
             <a:pPr algn="r">
@@ -9557,6 +9723,7 @@
           <a:lstStyle/>
           <a:p>
             <a:pPr algn="ctr"/>
+            <a:endParaRPr/>
           </a:p>
         </p:txBody>
       </p:sp>
@@ -9595,7 +9762,7 @@
           </a:fontRef>
         </p:style>
         <p:txBody>
-          <a:bodyPr rtlCol="0" anchor="ctr" wrap="square" lIns="50800" rIns="50800" tIns="50800" bIns="50800"/>
+          <a:bodyPr wrap="square" lIns="50800" tIns="50800" rIns="50800" bIns="50800" rtlCol="0" anchor="ctr"/>
           <a:lstStyle/>
           <a:p>
             <a:pPr algn="l">
@@ -9650,7 +9817,7 @@
           </a:fontRef>
         </p:style>
         <p:txBody>
-          <a:bodyPr rtlCol="0" anchor="t" wrap="square" lIns="50800" rIns="50800" tIns="50800" bIns="50800"/>
+          <a:bodyPr wrap="square" lIns="50800" tIns="50800" rIns="50800" bIns="50800" rtlCol="0" anchor="t"/>
           <a:lstStyle/>
           <a:p>
             <a:pPr algn="l">
@@ -9696,8 +9863,8 @@
         </p:nvSpPr>
         <p:spPr>
           <a:xfrm>
-            <a:off x="558800" y="1460500"/>
-            <a:ext cx="3556000" cy="2921000"/>
+            <a:off x="558800" y="1536700"/>
+            <a:ext cx="3556000" cy="3248026"/>
           </a:xfrm>
           <a:prstGeom prst="rect">
             <a:avLst/>
@@ -9727,10 +9894,11 @@
           </a:fontRef>
         </p:style>
         <p:txBody>
-          <a:bodyPr rtlCol="0" anchor="ctr" lIns="0" rIns="0" tIns="0" bIns="0"/>
+          <a:bodyPr lIns="0" tIns="0" rIns="0" bIns="0" rtlCol="0" anchor="ctr"/>
           <a:lstStyle/>
           <a:p>
             <a:pPr algn="ctr"/>
+            <a:endParaRPr/>
           </a:p>
         </p:txBody>
       </p:sp>
@@ -9742,7 +9910,7 @@
         </p:nvSpPr>
         <p:spPr>
           <a:xfrm>
-            <a:off x="558800" y="1460500"/>
+            <a:off x="558800" y="1536700"/>
             <a:ext cx="3556000" cy="38100"/>
           </a:xfrm>
           <a:prstGeom prst="rect">
@@ -9771,10 +9939,11 @@
           </a:fontRef>
         </p:style>
         <p:txBody>
-          <a:bodyPr rtlCol="0" anchor="ctr" lIns="0" rIns="0" tIns="0" bIns="0"/>
+          <a:bodyPr lIns="0" tIns="0" rIns="0" bIns="0" rtlCol="0" anchor="ctr"/>
           <a:lstStyle/>
           <a:p>
             <a:pPr algn="ctr"/>
+            <a:endParaRPr/>
           </a:p>
         </p:txBody>
       </p:sp>
@@ -9786,7 +9955,7 @@
         </p:nvSpPr>
         <p:spPr>
           <a:xfrm>
-            <a:off x="558800" y="1689100"/>
+            <a:off x="558800" y="1765300"/>
             <a:ext cx="3556000" cy="254000"/>
           </a:xfrm>
           <a:prstGeom prst="rect">
@@ -9813,7 +9982,7 @@
           </a:fontRef>
         </p:style>
         <p:txBody>
-          <a:bodyPr rtlCol="0" anchor="t" wrap="square" lIns="203200" rIns="203200" tIns="0" bIns="0"/>
+          <a:bodyPr wrap="square" lIns="203200" tIns="0" rIns="203200" bIns="0" rtlCol="0" anchor="t"/>
           <a:lstStyle/>
           <a:p>
             <a:pPr algn="l">
@@ -9841,7 +10010,7 @@
         </p:nvSpPr>
         <p:spPr>
           <a:xfrm>
-            <a:off x="558800" y="2006600"/>
+            <a:off x="558800" y="2159000"/>
             <a:ext cx="3556000" cy="698500"/>
           </a:xfrm>
           <a:prstGeom prst="rect">
@@ -9868,7 +10037,7 @@
           </a:fontRef>
         </p:style>
         <p:txBody>
-          <a:bodyPr rtlCol="0" anchor="t" wrap="square" lIns="203200" rIns="203200" tIns="0" bIns="0"/>
+          <a:bodyPr wrap="square" lIns="203200" tIns="0" rIns="203200" bIns="0" rtlCol="0" anchor="t"/>
           <a:lstStyle/>
           <a:p>
             <a:pPr algn="l">
@@ -9905,7 +10074,7 @@
         </p:nvSpPr>
         <p:spPr>
           <a:xfrm>
-            <a:off x="558800" y="2857500"/>
+            <a:off x="558800" y="2933700"/>
             <a:ext cx="3556000" cy="1397000"/>
           </a:xfrm>
           <a:prstGeom prst="rect">
@@ -9932,7 +10101,7 @@
           </a:fontRef>
         </p:style>
         <p:txBody>
-          <a:bodyPr rtlCol="0" anchor="t" wrap="square" lIns="203200" rIns="203200" tIns="0" bIns="0"/>
+          <a:bodyPr wrap="square" lIns="203200" tIns="0" rIns="203200" bIns="0" rtlCol="0" anchor="t"/>
           <a:lstStyle/>
           <a:p>
             <a:pPr algn="l">
@@ -9960,8 +10129,8 @@
         </p:nvSpPr>
         <p:spPr>
           <a:xfrm>
-            <a:off x="4318000" y="1460500"/>
-            <a:ext cx="3556000" cy="2921000"/>
+            <a:off x="4318000" y="1536700"/>
+            <a:ext cx="3556000" cy="3248026"/>
           </a:xfrm>
           <a:prstGeom prst="rect">
             <a:avLst/>
@@ -9991,10 +10160,11 @@
           </a:fontRef>
         </p:style>
         <p:txBody>
-          <a:bodyPr rtlCol="0" anchor="ctr" lIns="0" rIns="0" tIns="0" bIns="0"/>
+          <a:bodyPr lIns="0" tIns="0" rIns="0" bIns="0" rtlCol="0" anchor="ctr"/>
           <a:lstStyle/>
           <a:p>
             <a:pPr algn="ctr"/>
+            <a:endParaRPr/>
           </a:p>
         </p:txBody>
       </p:sp>
@@ -10006,7 +10176,7 @@
         </p:nvSpPr>
         <p:spPr>
           <a:xfrm>
-            <a:off x="4318000" y="1460500"/>
+            <a:off x="4318000" y="1536700"/>
             <a:ext cx="3556000" cy="38100"/>
           </a:xfrm>
           <a:prstGeom prst="rect">
@@ -10035,10 +10205,11 @@
           </a:fontRef>
         </p:style>
         <p:txBody>
-          <a:bodyPr rtlCol="0" anchor="ctr" lIns="0" rIns="0" tIns="0" bIns="0"/>
+          <a:bodyPr lIns="0" tIns="0" rIns="0" bIns="0" rtlCol="0" anchor="ctr"/>
           <a:lstStyle/>
           <a:p>
             <a:pPr algn="ctr"/>
+            <a:endParaRPr/>
           </a:p>
         </p:txBody>
       </p:sp>
@@ -10050,7 +10221,7 @@
         </p:nvSpPr>
         <p:spPr>
           <a:xfrm>
-            <a:off x="4318000" y="1689100"/>
+            <a:off x="4318000" y="1765300"/>
             <a:ext cx="3556000" cy="254000"/>
           </a:xfrm>
           <a:prstGeom prst="rect">
@@ -10077,7 +10248,7 @@
           </a:fontRef>
         </p:style>
         <p:txBody>
-          <a:bodyPr rtlCol="0" anchor="t" wrap="square" lIns="203200" rIns="203200" tIns="0" bIns="0"/>
+          <a:bodyPr wrap="square" lIns="203200" tIns="0" rIns="203200" bIns="0" rtlCol="0" anchor="t"/>
           <a:lstStyle/>
           <a:p>
             <a:pPr algn="l">
@@ -10105,7 +10276,7 @@
         </p:nvSpPr>
         <p:spPr>
           <a:xfrm>
-            <a:off x="4318000" y="2006600"/>
+            <a:off x="4318000" y="2159000"/>
             <a:ext cx="3556000" cy="698500"/>
           </a:xfrm>
           <a:prstGeom prst="rect">
@@ -10132,7 +10303,7 @@
           </a:fontRef>
         </p:style>
         <p:txBody>
-          <a:bodyPr rtlCol="0" anchor="t" wrap="square" lIns="203200" rIns="203200" tIns="0" bIns="0"/>
+          <a:bodyPr wrap="square" lIns="203200" tIns="0" rIns="203200" bIns="0" rtlCol="0" anchor="t"/>
           <a:lstStyle/>
           <a:p>
             <a:pPr algn="l">
@@ -10169,8 +10340,8 @@
         </p:nvSpPr>
         <p:spPr>
           <a:xfrm>
-            <a:off x="4318000" y="2857500"/>
-            <a:ext cx="3556000" cy="1397000"/>
+            <a:off x="4317999" y="2933700"/>
+            <a:ext cx="3692525" cy="1397000"/>
           </a:xfrm>
           <a:prstGeom prst="rect">
             <a:avLst/>
@@ -10196,7 +10367,7 @@
           </a:fontRef>
         </p:style>
         <p:txBody>
-          <a:bodyPr rtlCol="0" anchor="t" wrap="square" lIns="203200" rIns="203200" tIns="0" bIns="0"/>
+          <a:bodyPr wrap="square" lIns="203200" tIns="0" rIns="203200" bIns="0" rtlCol="0" anchor="t"/>
           <a:lstStyle/>
           <a:p>
             <a:pPr algn="l">
@@ -10224,8 +10395,8 @@
         </p:nvSpPr>
         <p:spPr>
           <a:xfrm>
-            <a:off x="8077200" y="1460500"/>
-            <a:ext cx="3556000" cy="2921000"/>
+            <a:off x="8077200" y="1536700"/>
+            <a:ext cx="3556000" cy="3248026"/>
           </a:xfrm>
           <a:prstGeom prst="rect">
             <a:avLst/>
@@ -10255,10 +10426,11 @@
           </a:fontRef>
         </p:style>
         <p:txBody>
-          <a:bodyPr rtlCol="0" anchor="ctr" lIns="0" rIns="0" tIns="0" bIns="0"/>
+          <a:bodyPr lIns="0" tIns="0" rIns="0" bIns="0" rtlCol="0" anchor="ctr"/>
           <a:lstStyle/>
           <a:p>
             <a:pPr algn="ctr"/>
+            <a:endParaRPr/>
           </a:p>
         </p:txBody>
       </p:sp>
@@ -10270,7 +10442,7 @@
         </p:nvSpPr>
         <p:spPr>
           <a:xfrm>
-            <a:off x="8077200" y="1460500"/>
+            <a:off x="8077200" y="1536700"/>
             <a:ext cx="3556000" cy="38100"/>
           </a:xfrm>
           <a:prstGeom prst="rect">
@@ -10299,10 +10471,11 @@
           </a:fontRef>
         </p:style>
         <p:txBody>
-          <a:bodyPr rtlCol="0" anchor="ctr" lIns="0" rIns="0" tIns="0" bIns="0"/>
+          <a:bodyPr lIns="0" tIns="0" rIns="0" bIns="0" rtlCol="0" anchor="ctr"/>
           <a:lstStyle/>
           <a:p>
             <a:pPr algn="ctr"/>
+            <a:endParaRPr/>
           </a:p>
         </p:txBody>
       </p:sp>
@@ -10314,7 +10487,7 @@
         </p:nvSpPr>
         <p:spPr>
           <a:xfrm>
-            <a:off x="8077200" y="1689100"/>
+            <a:off x="8077200" y="1765300"/>
             <a:ext cx="3556000" cy="254000"/>
           </a:xfrm>
           <a:prstGeom prst="rect">
@@ -10341,7 +10514,7 @@
           </a:fontRef>
         </p:style>
         <p:txBody>
-          <a:bodyPr rtlCol="0" anchor="t" wrap="square" lIns="203200" rIns="203200" tIns="0" bIns="0"/>
+          <a:bodyPr wrap="square" lIns="203200" tIns="0" rIns="203200" bIns="0" rtlCol="0" anchor="t"/>
           <a:lstStyle/>
           <a:p>
             <a:pPr algn="l">
@@ -10369,7 +10542,7 @@
         </p:nvSpPr>
         <p:spPr>
           <a:xfrm>
-            <a:off x="8077200" y="2006600"/>
+            <a:off x="8077200" y="2159000"/>
             <a:ext cx="3556000" cy="698500"/>
           </a:xfrm>
           <a:prstGeom prst="rect">
@@ -10396,7 +10569,7 @@
           </a:fontRef>
         </p:style>
         <p:txBody>
-          <a:bodyPr rtlCol="0" anchor="t" wrap="square" lIns="203200" rIns="203200" tIns="0" bIns="0"/>
+          <a:bodyPr wrap="square" lIns="203200" tIns="0" rIns="203200" bIns="0" rtlCol="0" anchor="t"/>
           <a:lstStyle/>
           <a:p>
             <a:pPr algn="l">
@@ -10433,7 +10606,7 @@
         </p:nvSpPr>
         <p:spPr>
           <a:xfrm>
-            <a:off x="8077200" y="2857500"/>
+            <a:off x="8077200" y="2933700"/>
             <a:ext cx="3556000" cy="1397000"/>
           </a:xfrm>
           <a:prstGeom prst="rect">
@@ -10460,7 +10633,7 @@
           </a:fontRef>
         </p:style>
         <p:txBody>
-          <a:bodyPr rtlCol="0" anchor="t" wrap="square" lIns="203200" rIns="203200" tIns="0" bIns="0"/>
+          <a:bodyPr wrap="square" lIns="203200" tIns="0" rIns="203200" bIns="0" rtlCol="0" anchor="t"/>
           <a:lstStyle/>
           <a:p>
             <a:pPr algn="l">
@@ -10488,8 +10661,8 @@
         </p:nvSpPr>
         <p:spPr>
           <a:xfrm>
-            <a:off x="609600" y="4572000"/>
-            <a:ext cx="10985500" cy="1206500"/>
+            <a:off x="609600" y="4981576"/>
+            <a:ext cx="10985500" cy="1257299"/>
           </a:xfrm>
           <a:prstGeom prst="rect">
             <a:avLst/>
@@ -10517,7 +10690,7 @@
           </a:fontRef>
         </p:style>
         <p:txBody>
-          <a:bodyPr rtlCol="0" anchor="t" wrap="square" lIns="254000" rIns="254000" tIns="177800" bIns="152400"/>
+          <a:bodyPr wrap="square" lIns="254000" tIns="177800" rIns="254000" bIns="152400" rtlCol="0" anchor="t"/>
           <a:lstStyle/>
           <a:p>
             <a:pPr algn="l">
@@ -10526,26 +10699,17 @@
               </a:lnSpc>
             </a:pPr>
             <a:r>
-              <a:rPr sz="4000" b="1" i="0">
+              <a:rPr sz="2400" b="1" i="0">
                 <a:solidFill>
                   <a:srgbClr val="3FD0E9"/>
                 </a:solidFill>
                 <a:latin typeface="Yu Gothic UI"/>
               </a:rPr>
-              <a:t>“  </a:t>
+              <a:t>質が高く効率的な法律業務</a:t>
             </a:r>
             <a:r>
               <a:rPr sz="2400" b="1" i="0">
                 <a:solidFill>
-                  <a:srgbClr val="3FD0E9"/>
-                </a:solidFill>
-                <a:latin typeface="Yu Gothic UI"/>
-              </a:rPr>
-              <a:t>質が高く効率的な法律業務</a:t>
-            </a:r>
-            <a:r>
-              <a:rPr sz="2400" b="1" i="0">
-                <a:solidFill>
                   <a:srgbClr val="FFFFFF"/>
                 </a:solidFill>
                 <a:latin typeface="Yu Gothic UI"/>
@@ -10560,9 +10724,9 @@
               </a:lnSpc>
             </a:pPr>
             <a:r>
-              <a:rPr sz="1400" b="0" i="0">
-                <a:solidFill>
-                  <a:srgbClr val="B9C7DE"/>
+              <a:rPr sz="1600" b="0" i="0">
+                <a:solidFill>
+                  <a:schemeClr val="bg1"/>
                 </a:solidFill>
                 <a:latin typeface="Yu Gothic UI"/>
               </a:rPr>
@@ -10580,7 +10744,7 @@
 </file>
 
 <file path=ppt/slides/slide4.xml><?xml version="1.0" encoding="utf-8"?>
-<p:sld xmlns:a="http://schemas.openxmlformats.org/drawingml/2006/main" xmlns:p="http://schemas.openxmlformats.org/presentationml/2006/main" xmlns:r="http://schemas.openxmlformats.org/officeDocument/2006/relationships">
+<p:sld xmlns:a="http://schemas.openxmlformats.org/drawingml/2006/main" xmlns:r="http://schemas.openxmlformats.org/officeDocument/2006/relationships" xmlns:p="http://schemas.openxmlformats.org/presentationml/2006/main">
   <p:cSld>
     <p:spTree>
       <p:nvGrpSpPr>
@@ -10588,7 +10752,14 @@
         <p:cNvGrpSpPr/>
         <p:nvPr/>
       </p:nvGrpSpPr>
-      <p:grpSpPr/>
+      <p:grpSpPr>
+        <a:xfrm>
+          <a:off x="0" y="0"/>
+          <a:ext cx="0" cy="0"/>
+          <a:chOff x="0" y="0"/>
+          <a:chExt cx="0" cy="0"/>
+        </a:xfrm>
+      </p:grpSpPr>
       <p:sp>
         <p:nvSpPr>
           <p:cNvPr id="2" name="Rectangle 1"/>
@@ -10626,10 +10797,11 @@
           </a:fontRef>
         </p:style>
         <p:txBody>
-          <a:bodyPr rtlCol="0" anchor="ctr" lIns="0" rIns="0" tIns="0" bIns="0"/>
+          <a:bodyPr lIns="0" tIns="0" rIns="0" bIns="0" rtlCol="0" anchor="ctr"/>
           <a:lstStyle/>
           <a:p>
             <a:pPr algn="ctr"/>
+            <a:endParaRPr/>
           </a:p>
         </p:txBody>
       </p:sp>
@@ -10668,7 +10840,7 @@
           </a:fontRef>
         </p:style>
         <p:txBody>
-          <a:bodyPr rtlCol="0" anchor="ctr" wrap="square" lIns="50800" rIns="50800" tIns="50800" bIns="50800"/>
+          <a:bodyPr wrap="square" lIns="50800" tIns="50800" rIns="50800" bIns="50800" rtlCol="0" anchor="ctr"/>
           <a:lstStyle/>
           <a:p>
             <a:pPr algn="l">
@@ -10732,7 +10904,7 @@
           </a:fontRef>
         </p:style>
         <p:txBody>
-          <a:bodyPr rtlCol="0" anchor="ctr" wrap="square" lIns="50800" rIns="50800" tIns="50800" bIns="50800"/>
+          <a:bodyPr wrap="square" lIns="50800" tIns="50800" rIns="50800" bIns="50800" rtlCol="0" anchor="ctr"/>
           <a:lstStyle/>
           <a:p>
             <a:pPr algn="r">
@@ -10793,6 +10965,7 @@
           <a:lstStyle/>
           <a:p>
             <a:pPr algn="ctr"/>
+            <a:endParaRPr/>
           </a:p>
         </p:txBody>
       </p:sp>
@@ -10831,7 +11004,7 @@
           </a:fontRef>
         </p:style>
         <p:txBody>
-          <a:bodyPr rtlCol="0" anchor="ctr" wrap="square" lIns="50800" rIns="50800" tIns="50800" bIns="50800"/>
+          <a:bodyPr wrap="square" lIns="50800" tIns="50800" rIns="50800" bIns="50800" rtlCol="0" anchor="ctr"/>
           <a:lstStyle/>
           <a:p>
             <a:pPr algn="l">
@@ -10886,7 +11059,7 @@
           </a:fontRef>
         </p:style>
         <p:txBody>
-          <a:bodyPr rtlCol="0" anchor="t" wrap="square" lIns="50800" rIns="50800" tIns="50800" bIns="50800"/>
+          <a:bodyPr wrap="square" lIns="50800" tIns="50800" rIns="50800" bIns="50800" rtlCol="0" anchor="t"/>
           <a:lstStyle/>
           <a:p>
             <a:pPr algn="l">
@@ -10932,8 +11105,8 @@
         </p:nvSpPr>
         <p:spPr>
           <a:xfrm>
-            <a:off x="393700" y="1524000"/>
-            <a:ext cx="2159000" cy="2921000"/>
+            <a:off x="393700" y="1590675"/>
+            <a:ext cx="2159000" cy="3213100"/>
           </a:xfrm>
           <a:prstGeom prst="rect">
             <a:avLst/>
@@ -10963,10 +11136,11 @@
           </a:fontRef>
         </p:style>
         <p:txBody>
-          <a:bodyPr rtlCol="0" anchor="ctr" lIns="0" rIns="0" tIns="0" bIns="0"/>
+          <a:bodyPr lIns="0" tIns="0" rIns="0" bIns="0" rtlCol="0" anchor="ctr"/>
           <a:lstStyle/>
           <a:p>
             <a:pPr algn="ctr"/>
+            <a:endParaRPr/>
           </a:p>
         </p:txBody>
       </p:sp>
@@ -10978,7 +11152,7 @@
         </p:nvSpPr>
         <p:spPr>
           <a:xfrm>
-            <a:off x="393700" y="1714500"/>
+            <a:off x="393700" y="1790700"/>
             <a:ext cx="2159000" cy="254000"/>
           </a:xfrm>
           <a:prstGeom prst="rect">
@@ -11005,7 +11179,7 @@
           </a:fontRef>
         </p:style>
         <p:txBody>
-          <a:bodyPr rtlCol="0" anchor="t" wrap="square" lIns="152400" rIns="152400" tIns="0" bIns="0"/>
+          <a:bodyPr wrap="square" lIns="152400" tIns="0" rIns="152400" bIns="0" rtlCol="0" anchor="t"/>
           <a:lstStyle/>
           <a:p>
             <a:pPr algn="l">
@@ -11033,7 +11207,7 @@
         </p:nvSpPr>
         <p:spPr>
           <a:xfrm>
-            <a:off x="393700" y="2019300"/>
+            <a:off x="393700" y="2095500"/>
             <a:ext cx="2159000" cy="889000"/>
           </a:xfrm>
           <a:prstGeom prst="rect">
@@ -11060,7 +11234,7 @@
           </a:fontRef>
         </p:style>
         <p:txBody>
-          <a:bodyPr rtlCol="0" anchor="t" wrap="square" lIns="152400" rIns="152400" tIns="0" bIns="0"/>
+          <a:bodyPr wrap="square" lIns="152400" tIns="0" rIns="152400" bIns="0" rtlCol="0" anchor="t"/>
           <a:lstStyle/>
           <a:p>
             <a:pPr algn="l">
@@ -11089,7 +11263,7 @@
         </p:nvSpPr>
         <p:spPr>
           <a:xfrm>
-            <a:off x="393700" y="2984500"/>
+            <a:off x="393700" y="3060700"/>
             <a:ext cx="2159000" cy="1333500"/>
           </a:xfrm>
           <a:prstGeom prst="rect">
@@ -11116,7 +11290,7 @@
           </a:fontRef>
         </p:style>
         <p:txBody>
-          <a:bodyPr rtlCol="0" anchor="t" wrap="square" lIns="152400" rIns="152400" tIns="0" bIns="0"/>
+          <a:bodyPr wrap="square" lIns="152400" tIns="0" rIns="152400" bIns="0" rtlCol="0" anchor="t"/>
           <a:lstStyle/>
           <a:p>
             <a:pPr algn="l">
@@ -11125,7 +11299,7 @@
               </a:lnSpc>
             </a:pPr>
             <a:r>
-              <a:rPr sz="1500" b="0" i="0">
+              <a:rPr sz="1600" b="0" i="0">
                 <a:solidFill>
                   <a:srgbClr val="3D4F6B"/>
                 </a:solidFill>
@@ -11144,7 +11318,7 @@
         </p:nvSpPr>
         <p:spPr>
           <a:xfrm>
-            <a:off x="2578100" y="2921000"/>
+            <a:off x="2578100" y="2997200"/>
             <a:ext cx="101600" cy="127000"/>
           </a:xfrm>
           <a:prstGeom prst="rtTriangle">
@@ -11176,6 +11350,7 @@
           <a:lstStyle/>
           <a:p>
             <a:pPr algn="ctr"/>
+            <a:endParaRPr sz="2000"/>
           </a:p>
         </p:txBody>
       </p:sp>
@@ -11187,8 +11362,8 @@
         </p:nvSpPr>
         <p:spPr>
           <a:xfrm>
-            <a:off x="2705100" y="1524000"/>
-            <a:ext cx="2159000" cy="2921000"/>
+            <a:off x="2705100" y="1590675"/>
+            <a:ext cx="2159000" cy="3213100"/>
           </a:xfrm>
           <a:prstGeom prst="rect">
             <a:avLst/>
@@ -11218,10 +11393,11 @@
           </a:fontRef>
         </p:style>
         <p:txBody>
-          <a:bodyPr rtlCol="0" anchor="ctr" lIns="0" rIns="0" tIns="0" bIns="0"/>
+          <a:bodyPr lIns="0" tIns="0" rIns="0" bIns="0" rtlCol="0" anchor="ctr"/>
           <a:lstStyle/>
           <a:p>
             <a:pPr algn="ctr"/>
+            <a:endParaRPr/>
           </a:p>
         </p:txBody>
       </p:sp>
@@ -11233,7 +11409,7 @@
         </p:nvSpPr>
         <p:spPr>
           <a:xfrm>
-            <a:off x="2705100" y="1714500"/>
+            <a:off x="2705100" y="1790700"/>
             <a:ext cx="2159000" cy="254000"/>
           </a:xfrm>
           <a:prstGeom prst="rect">
@@ -11260,7 +11436,7 @@
           </a:fontRef>
         </p:style>
         <p:txBody>
-          <a:bodyPr rtlCol="0" anchor="t" wrap="square" lIns="152400" rIns="152400" tIns="0" bIns="0"/>
+          <a:bodyPr wrap="square" lIns="152400" tIns="0" rIns="152400" bIns="0" rtlCol="0" anchor="t"/>
           <a:lstStyle/>
           <a:p>
             <a:pPr algn="l">
@@ -11288,7 +11464,7 @@
         </p:nvSpPr>
         <p:spPr>
           <a:xfrm>
-            <a:off x="2705100" y="2019300"/>
+            <a:off x="2705100" y="2095500"/>
             <a:ext cx="2159000" cy="889000"/>
           </a:xfrm>
           <a:prstGeom prst="rect">
@@ -11315,7 +11491,7 @@
           </a:fontRef>
         </p:style>
         <p:txBody>
-          <a:bodyPr rtlCol="0" anchor="t" wrap="square" lIns="152400" rIns="152400" tIns="0" bIns="0"/>
+          <a:bodyPr wrap="square" lIns="152400" tIns="0" rIns="152400" bIns="0" rtlCol="0" anchor="t"/>
           <a:lstStyle/>
           <a:p>
             <a:pPr algn="l">
@@ -11344,8 +11520,8 @@
         </p:nvSpPr>
         <p:spPr>
           <a:xfrm>
-            <a:off x="2705100" y="2984500"/>
-            <a:ext cx="2159000" cy="1333500"/>
+            <a:off x="2705100" y="3060700"/>
+            <a:ext cx="2241550" cy="1333500"/>
           </a:xfrm>
           <a:prstGeom prst="rect">
             <a:avLst/>
@@ -11371,7 +11547,7 @@
           </a:fontRef>
         </p:style>
         <p:txBody>
-          <a:bodyPr rtlCol="0" anchor="t" wrap="square" lIns="152400" rIns="152400" tIns="0" bIns="0"/>
+          <a:bodyPr wrap="square" lIns="152400" tIns="0" rIns="152400" bIns="0" rtlCol="0" anchor="t"/>
           <a:lstStyle/>
           <a:p>
             <a:pPr algn="l">
@@ -11380,7 +11556,7 @@
               </a:lnSpc>
             </a:pPr>
             <a:r>
-              <a:rPr sz="1500" b="0" i="0">
+              <a:rPr sz="1600" b="0" i="0">
                 <a:solidFill>
                   <a:srgbClr val="3D4F6B"/>
                 </a:solidFill>
@@ -11399,7 +11575,7 @@
         </p:nvSpPr>
         <p:spPr>
           <a:xfrm>
-            <a:off x="4889500" y="2921000"/>
+            <a:off x="4889500" y="2997200"/>
             <a:ext cx="101600" cy="127000"/>
           </a:xfrm>
           <a:prstGeom prst="rtTriangle">
@@ -11431,6 +11607,7 @@
           <a:lstStyle/>
           <a:p>
             <a:pPr algn="ctr"/>
+            <a:endParaRPr sz="2000"/>
           </a:p>
         </p:txBody>
       </p:sp>
@@ -11442,8 +11619,8 @@
         </p:nvSpPr>
         <p:spPr>
           <a:xfrm>
-            <a:off x="5016500" y="1524000"/>
-            <a:ext cx="2159000" cy="2921000"/>
+            <a:off x="5016500" y="1590675"/>
+            <a:ext cx="2159000" cy="3213100"/>
           </a:xfrm>
           <a:prstGeom prst="rect">
             <a:avLst/>
@@ -11473,10 +11650,11 @@
           </a:fontRef>
         </p:style>
         <p:txBody>
-          <a:bodyPr rtlCol="0" anchor="ctr" lIns="0" rIns="0" tIns="0" bIns="0"/>
+          <a:bodyPr lIns="0" tIns="0" rIns="0" bIns="0" rtlCol="0" anchor="ctr"/>
           <a:lstStyle/>
           <a:p>
             <a:pPr algn="ctr"/>
+            <a:endParaRPr/>
           </a:p>
         </p:txBody>
       </p:sp>
@@ -11488,7 +11666,7 @@
         </p:nvSpPr>
         <p:spPr>
           <a:xfrm>
-            <a:off x="5016500" y="1714500"/>
+            <a:off x="5016500" y="1790700"/>
             <a:ext cx="2159000" cy="254000"/>
           </a:xfrm>
           <a:prstGeom prst="rect">
@@ -11515,7 +11693,7 @@
           </a:fontRef>
         </p:style>
         <p:txBody>
-          <a:bodyPr rtlCol="0" anchor="t" wrap="square" lIns="152400" rIns="152400" tIns="0" bIns="0"/>
+          <a:bodyPr wrap="square" lIns="152400" tIns="0" rIns="152400" bIns="0" rtlCol="0" anchor="t"/>
           <a:lstStyle/>
           <a:p>
             <a:pPr algn="l">
@@ -11543,7 +11721,7 @@
         </p:nvSpPr>
         <p:spPr>
           <a:xfrm>
-            <a:off x="5016500" y="2019300"/>
+            <a:off x="5016500" y="2095500"/>
             <a:ext cx="2159000" cy="889000"/>
           </a:xfrm>
           <a:prstGeom prst="rect">
@@ -11570,7 +11748,7 @@
           </a:fontRef>
         </p:style>
         <p:txBody>
-          <a:bodyPr rtlCol="0" anchor="t" wrap="square" lIns="152400" rIns="152400" tIns="0" bIns="0"/>
+          <a:bodyPr wrap="square" lIns="152400" tIns="0" rIns="152400" bIns="0" rtlCol="0" anchor="t"/>
           <a:lstStyle/>
           <a:p>
             <a:pPr algn="l">
@@ -11599,7 +11777,7 @@
         </p:nvSpPr>
         <p:spPr>
           <a:xfrm>
-            <a:off x="5016500" y="2984500"/>
+            <a:off x="5016500" y="3060700"/>
             <a:ext cx="2159000" cy="1333500"/>
           </a:xfrm>
           <a:prstGeom prst="rect">
@@ -11626,7 +11804,7 @@
           </a:fontRef>
         </p:style>
         <p:txBody>
-          <a:bodyPr rtlCol="0" anchor="t" wrap="square" lIns="152400" rIns="152400" tIns="0" bIns="0"/>
+          <a:bodyPr wrap="square" lIns="152400" tIns="0" rIns="152400" bIns="0" rtlCol="0" anchor="t"/>
           <a:lstStyle/>
           <a:p>
             <a:pPr algn="l">
@@ -11635,7 +11813,7 @@
               </a:lnSpc>
             </a:pPr>
             <a:r>
-              <a:rPr sz="1500" b="0" i="0">
+              <a:rPr sz="1600" b="0" i="0">
                 <a:solidFill>
                   <a:srgbClr val="3D4F6B"/>
                 </a:solidFill>
@@ -11654,7 +11832,7 @@
         </p:nvSpPr>
         <p:spPr>
           <a:xfrm>
-            <a:off x="7200900" y="2921000"/>
+            <a:off x="7200900" y="2997200"/>
             <a:ext cx="101600" cy="127000"/>
           </a:xfrm>
           <a:prstGeom prst="rtTriangle">
@@ -11686,6 +11864,7 @@
           <a:lstStyle/>
           <a:p>
             <a:pPr algn="ctr"/>
+            <a:endParaRPr sz="2000"/>
           </a:p>
         </p:txBody>
       </p:sp>
@@ -11697,8 +11876,8 @@
         </p:nvSpPr>
         <p:spPr>
           <a:xfrm>
-            <a:off x="7327900" y="1524000"/>
-            <a:ext cx="2159000" cy="2921000"/>
+            <a:off x="7327900" y="1590675"/>
+            <a:ext cx="2159000" cy="3213100"/>
           </a:xfrm>
           <a:prstGeom prst="rect">
             <a:avLst/>
@@ -11728,10 +11907,11 @@
           </a:fontRef>
         </p:style>
         <p:txBody>
-          <a:bodyPr rtlCol="0" anchor="ctr" lIns="0" rIns="0" tIns="0" bIns="0"/>
+          <a:bodyPr lIns="0" tIns="0" rIns="0" bIns="0" rtlCol="0" anchor="ctr"/>
           <a:lstStyle/>
           <a:p>
             <a:pPr algn="ctr"/>
+            <a:endParaRPr/>
           </a:p>
         </p:txBody>
       </p:sp>
@@ -11743,7 +11923,7 @@
         </p:nvSpPr>
         <p:spPr>
           <a:xfrm>
-            <a:off x="7327900" y="1714500"/>
+            <a:off x="7327900" y="1790700"/>
             <a:ext cx="2159000" cy="254000"/>
           </a:xfrm>
           <a:prstGeom prst="rect">
@@ -11770,7 +11950,7 @@
           </a:fontRef>
         </p:style>
         <p:txBody>
-          <a:bodyPr rtlCol="0" anchor="t" wrap="square" lIns="152400" rIns="152400" tIns="0" bIns="0"/>
+          <a:bodyPr wrap="square" lIns="152400" tIns="0" rIns="152400" bIns="0" rtlCol="0" anchor="t"/>
           <a:lstStyle/>
           <a:p>
             <a:pPr algn="l">
@@ -11798,7 +11978,7 @@
         </p:nvSpPr>
         <p:spPr>
           <a:xfrm>
-            <a:off x="7327900" y="2019300"/>
+            <a:off x="7327900" y="2095500"/>
             <a:ext cx="2159000" cy="889000"/>
           </a:xfrm>
           <a:prstGeom prst="rect">
@@ -11825,7 +12005,7 @@
           </a:fontRef>
         </p:style>
         <p:txBody>
-          <a:bodyPr rtlCol="0" anchor="t" wrap="square" lIns="152400" rIns="152400" tIns="0" bIns="0"/>
+          <a:bodyPr wrap="square" lIns="152400" tIns="0" rIns="152400" bIns="0" rtlCol="0" anchor="t"/>
           <a:lstStyle/>
           <a:p>
             <a:pPr algn="l">
@@ -11854,7 +12034,7 @@
         </p:nvSpPr>
         <p:spPr>
           <a:xfrm>
-            <a:off x="7327900" y="2984500"/>
+            <a:off x="7327900" y="3060700"/>
             <a:ext cx="2159000" cy="1333500"/>
           </a:xfrm>
           <a:prstGeom prst="rect">
@@ -11881,7 +12061,7 @@
           </a:fontRef>
         </p:style>
         <p:txBody>
-          <a:bodyPr rtlCol="0" anchor="t" wrap="square" lIns="152400" rIns="152400" tIns="0" bIns="0"/>
+          <a:bodyPr wrap="square" lIns="152400" tIns="0" rIns="152400" bIns="0" rtlCol="0" anchor="t"/>
           <a:lstStyle/>
           <a:p>
             <a:pPr algn="l">
@@ -11890,7 +12070,7 @@
               </a:lnSpc>
             </a:pPr>
             <a:r>
-              <a:rPr sz="1500" b="0" i="0">
+              <a:rPr sz="1600" b="0" i="0">
                 <a:solidFill>
                   <a:srgbClr val="3D4F6B"/>
                 </a:solidFill>
@@ -11909,7 +12089,7 @@
         </p:nvSpPr>
         <p:spPr>
           <a:xfrm>
-            <a:off x="9512300" y="2921000"/>
+            <a:off x="9512300" y="2997200"/>
             <a:ext cx="101600" cy="127000"/>
           </a:xfrm>
           <a:prstGeom prst="rtTriangle">
@@ -11941,6 +12121,7 @@
           <a:lstStyle/>
           <a:p>
             <a:pPr algn="ctr"/>
+            <a:endParaRPr sz="2000"/>
           </a:p>
         </p:txBody>
       </p:sp>
@@ -11952,8 +12133,8 @@
         </p:nvSpPr>
         <p:spPr>
           <a:xfrm>
-            <a:off x="9639300" y="1524000"/>
-            <a:ext cx="2159000" cy="2921000"/>
+            <a:off x="9639300" y="1590675"/>
+            <a:ext cx="2159000" cy="3213100"/>
           </a:xfrm>
           <a:prstGeom prst="rect">
             <a:avLst/>
@@ -11983,10 +12164,11 @@
           </a:fontRef>
         </p:style>
         <p:txBody>
-          <a:bodyPr rtlCol="0" anchor="ctr" lIns="0" rIns="0" tIns="0" bIns="0"/>
+          <a:bodyPr lIns="0" tIns="0" rIns="0" bIns="0" rtlCol="0" anchor="ctr"/>
           <a:lstStyle/>
           <a:p>
             <a:pPr algn="ctr"/>
+            <a:endParaRPr/>
           </a:p>
         </p:txBody>
       </p:sp>
@@ -11998,7 +12180,7 @@
         </p:nvSpPr>
         <p:spPr>
           <a:xfrm>
-            <a:off x="9639300" y="1714500"/>
+            <a:off x="9639300" y="1790700"/>
             <a:ext cx="2159000" cy="254000"/>
           </a:xfrm>
           <a:prstGeom prst="rect">
@@ -12025,7 +12207,7 @@
           </a:fontRef>
         </p:style>
         <p:txBody>
-          <a:bodyPr rtlCol="0" anchor="t" wrap="square" lIns="152400" rIns="152400" tIns="0" bIns="0"/>
+          <a:bodyPr wrap="square" lIns="152400" tIns="0" rIns="152400" bIns="0" rtlCol="0" anchor="t"/>
           <a:lstStyle/>
           <a:p>
             <a:pPr algn="l">
@@ -12053,7 +12235,7 @@
         </p:nvSpPr>
         <p:spPr>
           <a:xfrm>
-            <a:off x="9639300" y="2019300"/>
+            <a:off x="9639300" y="2095500"/>
             <a:ext cx="2159000" cy="889000"/>
           </a:xfrm>
           <a:prstGeom prst="rect">
@@ -12080,7 +12262,7 @@
           </a:fontRef>
         </p:style>
         <p:txBody>
-          <a:bodyPr rtlCol="0" anchor="t" wrap="square" lIns="152400" rIns="152400" tIns="0" bIns="0"/>
+          <a:bodyPr wrap="square" lIns="152400" tIns="0" rIns="152400" bIns="0" rtlCol="0" anchor="t"/>
           <a:lstStyle/>
           <a:p>
             <a:pPr algn="l">
@@ -12095,8 +12277,7 @@
                 </a:solidFill>
                 <a:latin typeface="Yu Gothic UI"/>
               </a:rPr>
-              <a:t>ロードマップと
-実行計画に落とす</a:t>
+              <a:t>ロードマップと実行計画に落とす</a:t>
             </a:r>
           </a:p>
         </p:txBody>
@@ -12109,8 +12290,8 @@
         </p:nvSpPr>
         <p:spPr>
           <a:xfrm>
-            <a:off x="9639300" y="2984500"/>
-            <a:ext cx="2159000" cy="1333500"/>
+            <a:off x="9639300" y="3060700"/>
+            <a:ext cx="2228850" cy="1333500"/>
           </a:xfrm>
           <a:prstGeom prst="rect">
             <a:avLst/>
@@ -12136,7 +12317,7 @@
           </a:fontRef>
         </p:style>
         <p:txBody>
-          <a:bodyPr rtlCol="0" anchor="t" wrap="square" lIns="152400" rIns="152400" tIns="0" bIns="0"/>
+          <a:bodyPr wrap="square" lIns="152400" tIns="0" rIns="152400" bIns="0" rtlCol="0" anchor="t"/>
           <a:lstStyle/>
           <a:p>
             <a:pPr algn="l">
@@ -12145,7 +12326,7 @@
               </a:lnSpc>
             </a:pPr>
             <a:r>
-              <a:rPr sz="1500" b="0" i="0">
+              <a:rPr sz="1600" b="0" i="0">
                 <a:solidFill>
                   <a:srgbClr val="3D4F6B"/>
                 </a:solidFill>
@@ -12164,8 +12345,8 @@
         </p:nvSpPr>
         <p:spPr>
           <a:xfrm>
-            <a:off x="609600" y="4953000"/>
-            <a:ext cx="10985500" cy="825500"/>
+            <a:off x="609600" y="5067300"/>
+            <a:ext cx="10985500" cy="1104900"/>
           </a:xfrm>
           <a:prstGeom prst="rect">
             <a:avLst/>
@@ -12193,7 +12374,7 @@
           </a:fontRef>
         </p:style>
         <p:txBody>
-          <a:bodyPr rtlCol="0" anchor="ctr" wrap="square" lIns="254000" rIns="254000" tIns="127000" bIns="127000"/>
+          <a:bodyPr wrap="square" lIns="254000" tIns="127000" rIns="254000" bIns="127000" rtlCol="0" anchor="ctr"/>
           <a:lstStyle/>
           <a:p>
             <a:pPr algn="l">
@@ -12202,7 +12383,7 @@
               </a:lnSpc>
             </a:pPr>
             <a:r>
-              <a:rPr sz="1800" b="1" i="0">
+              <a:rPr sz="2000" b="1" i="0">
                 <a:solidFill>
                   <a:srgbClr val="3FD0E9"/>
                 </a:solidFill>
@@ -12211,7 +12392,7 @@
               <a:t>POINT　　</a:t>
             </a:r>
             <a:r>
-              <a:rPr sz="1800" b="0" i="0">
+              <a:rPr sz="2000" b="0" i="0">
                 <a:solidFill>
                   <a:srgbClr val="FFFFFF"/>
                 </a:solidFill>
@@ -12220,7 +12401,7 @@
               <a:t>作って終わりではなく、</a:t>
             </a:r>
             <a:r>
-              <a:rPr sz="1800" b="1" i="0">
+              <a:rPr sz="2000" b="1" i="0">
                 <a:solidFill>
                   <a:srgbClr val="3FD0E9"/>
                 </a:solidFill>
@@ -12229,13 +12410,13 @@
               <a:t>至近のユースケースを実際に立ち上げるところまで一緒に走る</a:t>
             </a:r>
             <a:r>
-              <a:rPr sz="1800" b="0" i="0">
+              <a:rPr sz="2000" b="0" i="0">
                 <a:solidFill>
                   <a:srgbClr val="FFFFFF"/>
                 </a:solidFill>
                 <a:latin typeface="Yu Gothic UI"/>
               </a:rPr>
-              <a:t>。「絵に描いた餅」で止めない。</a:t>
+              <a:t>。</a:t>
             </a:r>
           </a:p>
         </p:txBody>
@@ -12249,7 +12430,7 @@
 </file>
 
 <file path=ppt/slides/slide5.xml><?xml version="1.0" encoding="utf-8"?>
-<p:sld xmlns:a="http://schemas.openxmlformats.org/drawingml/2006/main" xmlns:p="http://schemas.openxmlformats.org/presentationml/2006/main" xmlns:r="http://schemas.openxmlformats.org/officeDocument/2006/relationships">
+<p:sld xmlns:a="http://schemas.openxmlformats.org/drawingml/2006/main" xmlns:r="http://schemas.openxmlformats.org/officeDocument/2006/relationships" xmlns:p="http://schemas.openxmlformats.org/presentationml/2006/main">
   <p:cSld>
     <p:spTree>
       <p:nvGrpSpPr>
@@ -12257,7 +12438,14 @@
         <p:cNvGrpSpPr/>
         <p:nvPr/>
       </p:nvGrpSpPr>
-      <p:grpSpPr/>
+      <p:grpSpPr>
+        <a:xfrm>
+          <a:off x="0" y="0"/>
+          <a:ext cx="0" cy="0"/>
+          <a:chOff x="0" y="0"/>
+          <a:chExt cx="0" cy="0"/>
+        </a:xfrm>
+      </p:grpSpPr>
       <p:sp>
         <p:nvSpPr>
           <p:cNvPr id="2" name="Rectangle 1"/>
@@ -12295,10 +12483,11 @@
           </a:fontRef>
         </p:style>
         <p:txBody>
-          <a:bodyPr rtlCol="0" anchor="ctr" lIns="0" rIns="0" tIns="0" bIns="0"/>
+          <a:bodyPr lIns="0" tIns="0" rIns="0" bIns="0" rtlCol="0" anchor="ctr"/>
           <a:lstStyle/>
           <a:p>
             <a:pPr algn="ctr"/>
+            <a:endParaRPr/>
           </a:p>
         </p:txBody>
       </p:sp>
@@ -12337,7 +12526,7 @@
           </a:fontRef>
         </p:style>
         <p:txBody>
-          <a:bodyPr rtlCol="0" anchor="ctr" wrap="square" lIns="50800" rIns="50800" tIns="50800" bIns="50800"/>
+          <a:bodyPr wrap="square" lIns="50800" tIns="50800" rIns="50800" bIns="50800" rtlCol="0" anchor="ctr"/>
           <a:lstStyle/>
           <a:p>
             <a:pPr algn="l">
@@ -12401,7 +12590,7 @@
           </a:fontRef>
         </p:style>
         <p:txBody>
-          <a:bodyPr rtlCol="0" anchor="ctr" wrap="square" lIns="50800" rIns="50800" tIns="50800" bIns="50800"/>
+          <a:bodyPr wrap="square" lIns="50800" tIns="50800" rIns="50800" bIns="50800" rtlCol="0" anchor="ctr"/>
           <a:lstStyle/>
           <a:p>
             <a:pPr algn="r">
@@ -12462,6 +12651,7 @@
           <a:lstStyle/>
           <a:p>
             <a:pPr algn="ctr"/>
+            <a:endParaRPr/>
           </a:p>
         </p:txBody>
       </p:sp>
@@ -12500,7 +12690,7 @@
           </a:fontRef>
         </p:style>
         <p:txBody>
-          <a:bodyPr rtlCol="0" anchor="ctr" wrap="square" lIns="50800" rIns="50800" tIns="50800" bIns="50800"/>
+          <a:bodyPr wrap="square" lIns="50800" tIns="50800" rIns="50800" bIns="50800" rtlCol="0" anchor="ctr"/>
           <a:lstStyle/>
           <a:p>
             <a:pPr algn="l">
@@ -12555,7 +12745,7 @@
           </a:fontRef>
         </p:style>
         <p:txBody>
-          <a:bodyPr rtlCol="0" anchor="t" wrap="square" lIns="50800" rIns="50800" tIns="50800" bIns="50800"/>
+          <a:bodyPr wrap="square" lIns="50800" tIns="50800" rIns="50800" bIns="50800" rtlCol="0" anchor="t"/>
           <a:lstStyle/>
           <a:p>
             <a:pPr algn="l">
@@ -12570,25 +12760,7 @@
                 </a:solidFill>
                 <a:latin typeface="Yu Gothic UI"/>
               </a:rPr>
-              <a:t>弁護士 × 国際法務 × AI実務 ── </a:t>
-            </a:r>
-            <a:r>
-              <a:rPr sz="4000" b="1" i="0">
-                <a:solidFill>
-                  <a:srgbClr val="00B7D4"/>
-                </a:solidFill>
-                <a:latin typeface="Yu Gothic UI"/>
-              </a:rPr>
-              <a:t>福島 駿太</a:t>
-            </a:r>
-            <a:r>
-              <a:rPr sz="4000" b="1" i="0">
-                <a:solidFill>
-                  <a:srgbClr val="0B1F3A"/>
-                </a:solidFill>
-                <a:latin typeface="Yu Gothic UI"/>
-              </a:rPr>
-              <a:t>。</a:t>
+              <a:t>弁護士 × 国際法務 × AI実務</a:t>
             </a:r>
           </a:p>
         </p:txBody>
@@ -12601,8 +12773,8 @@
         </p:nvSpPr>
         <p:spPr>
           <a:xfrm>
-            <a:off x="609600" y="1460500"/>
-            <a:ext cx="3302000" cy="4572000"/>
+            <a:off x="609600" y="1555750"/>
+            <a:ext cx="3038475" cy="4572000"/>
           </a:xfrm>
           <a:prstGeom prst="rect">
             <a:avLst/>
@@ -12630,10 +12802,11 @@
           </a:fontRef>
         </p:style>
         <p:txBody>
-          <a:bodyPr rtlCol="0" anchor="ctr" lIns="0" rIns="0" tIns="0" bIns="0"/>
+          <a:bodyPr lIns="0" tIns="0" rIns="0" bIns="0" rtlCol="0" anchor="ctr"/>
           <a:lstStyle/>
           <a:p>
             <a:pPr algn="ctr"/>
+            <a:endParaRPr/>
           </a:p>
         </p:txBody>
       </p:sp>
@@ -12653,8 +12826,8 @@
         </p:blipFill>
         <p:spPr>
           <a:xfrm>
-            <a:off x="609600" y="1460500"/>
-            <a:ext cx="3302000" cy="4572000"/>
+            <a:off x="609600" y="1555750"/>
+            <a:ext cx="3038475" cy="4572000"/>
           </a:xfrm>
           <a:prstGeom prst="rect">
             <a:avLst/>
@@ -12669,8 +12842,8 @@
         </p:nvSpPr>
         <p:spPr>
           <a:xfrm>
-            <a:off x="609600" y="5397500"/>
-            <a:ext cx="3302000" cy="635000"/>
+            <a:off x="609600" y="5492750"/>
+            <a:ext cx="3038475" cy="774700"/>
           </a:xfrm>
           <a:prstGeom prst="rect">
             <a:avLst/>
@@ -12698,10 +12871,11 @@
           </a:fontRef>
         </p:style>
         <p:txBody>
-          <a:bodyPr rtlCol="0" anchor="ctr" lIns="0" rIns="0" tIns="0" bIns="0"/>
+          <a:bodyPr lIns="0" tIns="0" rIns="0" bIns="0" rtlCol="0" anchor="ctr"/>
           <a:lstStyle/>
           <a:p>
             <a:pPr algn="ctr"/>
+            <a:endParaRPr/>
           </a:p>
         </p:txBody>
       </p:sp>
@@ -12713,7 +12887,7 @@
         </p:nvSpPr>
         <p:spPr>
           <a:xfrm>
-            <a:off x="609600" y="5397500"/>
+            <a:off x="609600" y="5492750"/>
             <a:ext cx="3302000" cy="254000"/>
           </a:xfrm>
           <a:prstGeom prst="rect">
@@ -12740,7 +12914,7 @@
           </a:fontRef>
         </p:style>
         <p:txBody>
-          <a:bodyPr rtlCol="0" anchor="t" wrap="square" lIns="203200" rIns="203200" tIns="88900" bIns="0"/>
+          <a:bodyPr wrap="square" lIns="203200" tIns="88900" rIns="203200" bIns="0" rtlCol="0" anchor="t"/>
           <a:lstStyle/>
           <a:p>
             <a:pPr algn="l">
@@ -12768,7 +12942,7 @@
         </p:nvSpPr>
         <p:spPr>
           <a:xfrm>
-            <a:off x="609600" y="5588000"/>
+            <a:off x="609600" y="5762625"/>
             <a:ext cx="3302000" cy="381000"/>
           </a:xfrm>
           <a:prstGeom prst="rect">
@@ -12795,7 +12969,7 @@
           </a:fontRef>
         </p:style>
         <p:txBody>
-          <a:bodyPr rtlCol="0" anchor="t" wrap="square" lIns="203200" rIns="203200" tIns="0" bIns="0"/>
+          <a:bodyPr wrap="square" lIns="203200" tIns="0" rIns="203200" bIns="0" rtlCol="0" anchor="t"/>
           <a:lstStyle/>
           <a:p>
             <a:pPr algn="l">
@@ -12823,7 +12997,7 @@
         </p:nvSpPr>
         <p:spPr>
           <a:xfrm>
-            <a:off x="4318000" y="1460500"/>
+            <a:off x="4216400" y="1565275"/>
             <a:ext cx="7264400" cy="254000"/>
           </a:xfrm>
           <a:prstGeom prst="rect">
@@ -12850,7 +13024,7 @@
           </a:fontRef>
         </p:style>
         <p:txBody>
-          <a:bodyPr rtlCol="0" anchor="t" wrap="square" lIns="50800" rIns="50800" tIns="50800" bIns="50800"/>
+          <a:bodyPr wrap="square" lIns="50800" tIns="50800" rIns="50800" bIns="50800" rtlCol="0" anchor="t"/>
           <a:lstStyle/>
           <a:p>
             <a:pPr algn="l">
@@ -12859,7 +13033,7 @@
               </a:lnSpc>
             </a:pPr>
             <a:r>
-              <a:rPr sz="1800" b="1" i="0">
+              <a:rPr sz="2000" b="1" i="0">
                 <a:solidFill>
                   <a:srgbClr val="00B7D4"/>
                 </a:solidFill>
@@ -12878,7 +13052,7 @@
         </p:nvSpPr>
         <p:spPr>
           <a:xfrm>
-            <a:off x="4318000" y="1816100"/>
+            <a:off x="4318000" y="2120900"/>
             <a:ext cx="19050" cy="4191000"/>
           </a:xfrm>
           <a:prstGeom prst="rect">
@@ -12911,6 +13085,7 @@
           <a:lstStyle/>
           <a:p>
             <a:pPr algn="ctr"/>
+            <a:endParaRPr sz="2000"/>
           </a:p>
         </p:txBody>
       </p:sp>
@@ -12922,7 +13097,7 @@
         </p:nvSpPr>
         <p:spPr>
           <a:xfrm>
-            <a:off x="4279900" y="1968500"/>
+            <a:off x="4279900" y="2273300"/>
             <a:ext cx="76200" cy="76200"/>
           </a:xfrm>
           <a:prstGeom prst="ellipse">
@@ -12955,6 +13130,7 @@
           <a:lstStyle/>
           <a:p>
             <a:pPr algn="ctr"/>
+            <a:endParaRPr sz="2000"/>
           </a:p>
         </p:txBody>
       </p:sp>
@@ -12966,7 +13142,7 @@
         </p:nvSpPr>
         <p:spPr>
           <a:xfrm>
-            <a:off x="4495800" y="1841500"/>
+            <a:off x="4495800" y="2146300"/>
             <a:ext cx="1270000" cy="317500"/>
           </a:xfrm>
           <a:prstGeom prst="rect">
@@ -12993,7 +13169,7 @@
           </a:fontRef>
         </p:style>
         <p:txBody>
-          <a:bodyPr rtlCol="0" anchor="ctr" wrap="square" lIns="50800" rIns="50800" tIns="50800" bIns="50800"/>
+          <a:bodyPr wrap="square" lIns="50800" tIns="50800" rIns="50800" bIns="50800" rtlCol="0" anchor="ctr"/>
           <a:lstStyle/>
           <a:p>
             <a:pPr algn="l">
@@ -13002,7 +13178,7 @@
               </a:lnSpc>
             </a:pPr>
             <a:r>
-              <a:rPr sz="1700" b="1" i="0">
+              <a:rPr b="1" i="0">
                 <a:solidFill>
                   <a:srgbClr val="00B7D4"/>
                 </a:solidFill>
@@ -13021,7 +13197,7 @@
         </p:nvSpPr>
         <p:spPr>
           <a:xfrm>
-            <a:off x="5765800" y="1841500"/>
+            <a:off x="5765800" y="2146300"/>
             <a:ext cx="5715000" cy="317500"/>
           </a:xfrm>
           <a:prstGeom prst="rect">
@@ -13048,7 +13224,7 @@
           </a:fontRef>
         </p:style>
         <p:txBody>
-          <a:bodyPr rtlCol="0" anchor="ctr" wrap="square" lIns="50800" rIns="50800" tIns="50800" bIns="50800"/>
+          <a:bodyPr wrap="square" lIns="50800" tIns="50800" rIns="50800" bIns="50800" rtlCol="0" anchor="ctr"/>
           <a:lstStyle/>
           <a:p>
             <a:pPr algn="l">
@@ -13057,7 +13233,7 @@
               </a:lnSpc>
             </a:pPr>
             <a:r>
-              <a:rPr sz="1700" b="0" i="0">
+              <a:rPr b="0" i="0">
                 <a:solidFill>
                   <a:srgbClr val="0B1F3A"/>
                 </a:solidFill>
@@ -13066,7 +13242,7 @@
               <a:t>中央大学法学部 </a:t>
             </a:r>
             <a:r>
-              <a:rPr sz="1700" b="1" i="0">
+              <a:rPr b="1" i="0">
                 <a:solidFill>
                   <a:srgbClr val="0B1F3A"/>
                 </a:solidFill>
@@ -13085,7 +13261,7 @@
         </p:nvSpPr>
         <p:spPr>
           <a:xfrm>
-            <a:off x="4279900" y="2413000"/>
+            <a:off x="4279900" y="2717800"/>
             <a:ext cx="76200" cy="76200"/>
           </a:xfrm>
           <a:prstGeom prst="ellipse">
@@ -13118,6 +13294,7 @@
           <a:lstStyle/>
           <a:p>
             <a:pPr algn="ctr"/>
+            <a:endParaRPr sz="2000"/>
           </a:p>
         </p:txBody>
       </p:sp>
@@ -13129,7 +13306,7 @@
         </p:nvSpPr>
         <p:spPr>
           <a:xfrm>
-            <a:off x="4495800" y="2286000"/>
+            <a:off x="4495800" y="2590800"/>
             <a:ext cx="1270000" cy="317500"/>
           </a:xfrm>
           <a:prstGeom prst="rect">
@@ -13156,7 +13333,7 @@
           </a:fontRef>
         </p:style>
         <p:txBody>
-          <a:bodyPr rtlCol="0" anchor="ctr" wrap="square" lIns="50800" rIns="50800" tIns="50800" bIns="50800"/>
+          <a:bodyPr wrap="square" lIns="50800" tIns="50800" rIns="50800" bIns="50800" rtlCol="0" anchor="ctr"/>
           <a:lstStyle/>
           <a:p>
             <a:pPr algn="l">
@@ -13165,7 +13342,7 @@
               </a:lnSpc>
             </a:pPr>
             <a:r>
-              <a:rPr sz="1700" b="1" i="0">
+              <a:rPr b="1" i="0">
                 <a:solidFill>
                   <a:srgbClr val="00B7D4"/>
                 </a:solidFill>
@@ -13184,7 +13361,7 @@
         </p:nvSpPr>
         <p:spPr>
           <a:xfrm>
-            <a:off x="5765800" y="2286000"/>
+            <a:off x="5765800" y="2590800"/>
             <a:ext cx="5715000" cy="317500"/>
           </a:xfrm>
           <a:prstGeom prst="rect">
@@ -13211,7 +13388,7 @@
           </a:fontRef>
         </p:style>
         <p:txBody>
-          <a:bodyPr rtlCol="0" anchor="ctr" wrap="square" lIns="50800" rIns="50800" tIns="50800" bIns="50800"/>
+          <a:bodyPr wrap="square" lIns="50800" tIns="50800" rIns="50800" bIns="50800" rtlCol="0" anchor="ctr"/>
           <a:lstStyle/>
           <a:p>
             <a:pPr algn="l">
@@ -13220,7 +13397,7 @@
               </a:lnSpc>
             </a:pPr>
             <a:r>
-              <a:rPr sz="1700" b="1" i="0">
+              <a:rPr b="1" i="0">
                 <a:solidFill>
                   <a:srgbClr val="0B1F3A"/>
                 </a:solidFill>
@@ -13229,7 +13406,7 @@
               <a:t>弁護士登録</a:t>
             </a:r>
             <a:r>
-              <a:rPr sz="1700" b="0" i="0">
+              <a:rPr b="0" i="0">
                 <a:solidFill>
                   <a:srgbClr val="0B1F3A"/>
                 </a:solidFill>
@@ -13248,7 +13425,7 @@
         </p:nvSpPr>
         <p:spPr>
           <a:xfrm>
-            <a:off x="4279900" y="2857500"/>
+            <a:off x="4279900" y="3162300"/>
             <a:ext cx="76200" cy="76200"/>
           </a:xfrm>
           <a:prstGeom prst="ellipse">
@@ -13281,6 +13458,7 @@
           <a:lstStyle/>
           <a:p>
             <a:pPr algn="ctr"/>
+            <a:endParaRPr sz="2000"/>
           </a:p>
         </p:txBody>
       </p:sp>
@@ -13292,7 +13470,7 @@
         </p:nvSpPr>
         <p:spPr>
           <a:xfrm>
-            <a:off x="4495800" y="2730500"/>
+            <a:off x="4495800" y="3035300"/>
             <a:ext cx="1270000" cy="317500"/>
           </a:xfrm>
           <a:prstGeom prst="rect">
@@ -13319,7 +13497,7 @@
           </a:fontRef>
         </p:style>
         <p:txBody>
-          <a:bodyPr rtlCol="0" anchor="ctr" wrap="square" lIns="50800" rIns="50800" tIns="50800" bIns="50800"/>
+          <a:bodyPr wrap="square" lIns="50800" tIns="50800" rIns="50800" bIns="50800" rtlCol="0" anchor="ctr"/>
           <a:lstStyle/>
           <a:p>
             <a:pPr algn="l">
@@ -13328,7 +13506,7 @@
               </a:lnSpc>
             </a:pPr>
             <a:r>
-              <a:rPr sz="1700" b="1" i="0">
+              <a:rPr b="1" i="0">
                 <a:solidFill>
                   <a:srgbClr val="00B7D4"/>
                 </a:solidFill>
@@ -13347,7 +13525,7 @@
         </p:nvSpPr>
         <p:spPr>
           <a:xfrm>
-            <a:off x="5765800" y="2730500"/>
+            <a:off x="5765800" y="3035300"/>
             <a:ext cx="5715000" cy="317500"/>
           </a:xfrm>
           <a:prstGeom prst="rect">
@@ -13374,7 +13552,7 @@
           </a:fontRef>
         </p:style>
         <p:txBody>
-          <a:bodyPr rtlCol="0" anchor="ctr" wrap="square" lIns="50800" rIns="50800" tIns="50800" bIns="50800"/>
+          <a:bodyPr wrap="square" lIns="50800" tIns="50800" rIns="50800" bIns="50800" rtlCol="0" anchor="ctr"/>
           <a:lstStyle/>
           <a:p>
             <a:pPr algn="l">
@@ -13383,7 +13561,7 @@
               </a:lnSpc>
             </a:pPr>
             <a:r>
-              <a:rPr sz="1700" b="0" i="0">
+              <a:rPr b="0" i="0">
                 <a:solidFill>
                   <a:srgbClr val="0B1F3A"/>
                 </a:solidFill>
@@ -13402,7 +13580,7 @@
         </p:nvSpPr>
         <p:spPr>
           <a:xfrm>
-            <a:off x="4279900" y="3302000"/>
+            <a:off x="4279900" y="3606800"/>
             <a:ext cx="76200" cy="76200"/>
           </a:xfrm>
           <a:prstGeom prst="ellipse">
@@ -13435,6 +13613,7 @@
           <a:lstStyle/>
           <a:p>
             <a:pPr algn="ctr"/>
+            <a:endParaRPr sz="2000"/>
           </a:p>
         </p:txBody>
       </p:sp>
@@ -13446,7 +13625,7 @@
         </p:nvSpPr>
         <p:spPr>
           <a:xfrm>
-            <a:off x="4495800" y="3175000"/>
+            <a:off x="4495800" y="3479800"/>
             <a:ext cx="1270000" cy="317500"/>
           </a:xfrm>
           <a:prstGeom prst="rect">
@@ -13473,7 +13652,7 @@
           </a:fontRef>
         </p:style>
         <p:txBody>
-          <a:bodyPr rtlCol="0" anchor="ctr" wrap="square" lIns="50800" rIns="50800" tIns="50800" bIns="50800"/>
+          <a:bodyPr wrap="square" lIns="50800" tIns="50800" rIns="50800" bIns="50800" rtlCol="0" anchor="ctr"/>
           <a:lstStyle/>
           <a:p>
             <a:pPr algn="l">
@@ -13482,7 +13661,7 @@
               </a:lnSpc>
             </a:pPr>
             <a:r>
-              <a:rPr sz="1700" b="1" i="0">
+              <a:rPr b="1" i="0">
                 <a:solidFill>
                   <a:srgbClr val="00B7D4"/>
                 </a:solidFill>
@@ -13501,7 +13680,7 @@
         </p:nvSpPr>
         <p:spPr>
           <a:xfrm>
-            <a:off x="5765800" y="3175000"/>
+            <a:off x="5765800" y="3479800"/>
             <a:ext cx="5715000" cy="317500"/>
           </a:xfrm>
           <a:prstGeom prst="rect">
@@ -13528,7 +13707,7 @@
           </a:fontRef>
         </p:style>
         <p:txBody>
-          <a:bodyPr rtlCol="0" anchor="ctr" wrap="square" lIns="50800" rIns="50800" tIns="50800" bIns="50800"/>
+          <a:bodyPr wrap="square" lIns="50800" tIns="50800" rIns="50800" bIns="50800" rtlCol="0" anchor="ctr"/>
           <a:lstStyle/>
           <a:p>
             <a:pPr algn="l">
@@ -13537,7 +13716,7 @@
               </a:lnSpc>
             </a:pPr>
             <a:r>
-              <a:rPr sz="1700" b="0" i="0">
+              <a:rPr b="0" i="0">
                 <a:solidFill>
                   <a:srgbClr val="0B1F3A"/>
                 </a:solidFill>
@@ -13556,7 +13735,7 @@
         </p:nvSpPr>
         <p:spPr>
           <a:xfrm>
-            <a:off x="4279900" y="3746500"/>
+            <a:off x="4279900" y="4051300"/>
             <a:ext cx="76200" cy="76200"/>
           </a:xfrm>
           <a:prstGeom prst="ellipse">
@@ -13589,6 +13768,7 @@
           <a:lstStyle/>
           <a:p>
             <a:pPr algn="ctr"/>
+            <a:endParaRPr sz="2000"/>
           </a:p>
         </p:txBody>
       </p:sp>
@@ -13600,7 +13780,7 @@
         </p:nvSpPr>
         <p:spPr>
           <a:xfrm>
-            <a:off x="4495800" y="3619500"/>
+            <a:off x="4495800" y="3924300"/>
             <a:ext cx="1270000" cy="317500"/>
           </a:xfrm>
           <a:prstGeom prst="rect">
@@ -13627,7 +13807,7 @@
           </a:fontRef>
         </p:style>
         <p:txBody>
-          <a:bodyPr rtlCol="0" anchor="ctr" wrap="square" lIns="50800" rIns="50800" tIns="50800" bIns="50800"/>
+          <a:bodyPr wrap="square" lIns="50800" tIns="50800" rIns="50800" bIns="50800" rtlCol="0" anchor="ctr"/>
           <a:lstStyle/>
           <a:p>
             <a:pPr algn="l">
@@ -13636,7 +13816,7 @@
               </a:lnSpc>
             </a:pPr>
             <a:r>
-              <a:rPr sz="1700" b="1" i="0">
+              <a:rPr b="1" i="0">
                 <a:solidFill>
                   <a:srgbClr val="00B7D4"/>
                 </a:solidFill>
@@ -13655,7 +13835,7 @@
         </p:nvSpPr>
         <p:spPr>
           <a:xfrm>
-            <a:off x="5765800" y="3619500"/>
+            <a:off x="5765800" y="3924300"/>
             <a:ext cx="5715000" cy="317500"/>
           </a:xfrm>
           <a:prstGeom prst="rect">
@@ -13682,7 +13862,7 @@
           </a:fontRef>
         </p:style>
         <p:txBody>
-          <a:bodyPr rtlCol="0" anchor="ctr" wrap="square" lIns="50800" rIns="50800" tIns="50800" bIns="50800"/>
+          <a:bodyPr wrap="square" lIns="50800" tIns="50800" rIns="50800" bIns="50800" rtlCol="0" anchor="ctr"/>
           <a:lstStyle/>
           <a:p>
             <a:pPr algn="l">
@@ -13691,7 +13871,7 @@
               </a:lnSpc>
             </a:pPr>
             <a:r>
-              <a:rPr sz="1700" b="1" i="0">
+              <a:rPr b="1" i="0">
                 <a:solidFill>
                   <a:srgbClr val="0B1F3A"/>
                 </a:solidFill>
@@ -13700,7 +13880,7 @@
               <a:t>アンダーソン・毛利・友常法律事務所</a:t>
             </a:r>
             <a:r>
-              <a:rPr sz="1700" b="0" i="0">
+              <a:rPr b="0" i="0">
                 <a:solidFill>
                   <a:srgbClr val="0B1F3A"/>
                 </a:solidFill>
@@ -13719,7 +13899,7 @@
         </p:nvSpPr>
         <p:spPr>
           <a:xfrm>
-            <a:off x="4279900" y="4191000"/>
+            <a:off x="4279900" y="4495800"/>
             <a:ext cx="76200" cy="76200"/>
           </a:xfrm>
           <a:prstGeom prst="ellipse">
@@ -13752,6 +13932,7 @@
           <a:lstStyle/>
           <a:p>
             <a:pPr algn="ctr"/>
+            <a:endParaRPr sz="2000"/>
           </a:p>
         </p:txBody>
       </p:sp>
@@ -13763,7 +13944,7 @@
         </p:nvSpPr>
         <p:spPr>
           <a:xfrm>
-            <a:off x="4495800" y="4064000"/>
+            <a:off x="4495800" y="4368800"/>
             <a:ext cx="1270000" cy="317500"/>
           </a:xfrm>
           <a:prstGeom prst="rect">
@@ -13790,7 +13971,7 @@
           </a:fontRef>
         </p:style>
         <p:txBody>
-          <a:bodyPr rtlCol="0" anchor="ctr" wrap="square" lIns="50800" rIns="50800" tIns="50800" bIns="50800"/>
+          <a:bodyPr wrap="square" lIns="50800" tIns="50800" rIns="50800" bIns="50800" rtlCol="0" anchor="ctr"/>
           <a:lstStyle/>
           <a:p>
             <a:pPr algn="l">
@@ -13799,7 +13980,7 @@
               </a:lnSpc>
             </a:pPr>
             <a:r>
-              <a:rPr sz="1700" b="1" i="0">
+              <a:rPr b="1" i="0">
                 <a:solidFill>
                   <a:srgbClr val="00B7D4"/>
                 </a:solidFill>
@@ -13818,7 +13999,7 @@
         </p:nvSpPr>
         <p:spPr>
           <a:xfrm>
-            <a:off x="5765800" y="4064000"/>
+            <a:off x="5765800" y="4368800"/>
             <a:ext cx="5715000" cy="317500"/>
           </a:xfrm>
           <a:prstGeom prst="rect">
@@ -13845,7 +14026,7 @@
           </a:fontRef>
         </p:style>
         <p:txBody>
-          <a:bodyPr rtlCol="0" anchor="ctr" wrap="square" lIns="50800" rIns="50800" tIns="50800" bIns="50800"/>
+          <a:bodyPr wrap="square" lIns="50800" tIns="50800" rIns="50800" bIns="50800" rtlCol="0" anchor="ctr"/>
           <a:lstStyle/>
           <a:p>
             <a:pPr algn="l">
@@ -13854,7 +14035,7 @@
               </a:lnSpc>
             </a:pPr>
             <a:r>
-              <a:rPr sz="1700" b="1" i="0">
+              <a:rPr b="1" i="0">
                 <a:solidFill>
                   <a:srgbClr val="0B1F3A"/>
                 </a:solidFill>
@@ -13863,7 +14044,7 @@
               <a:t>コーネル大学ロースクール</a:t>
             </a:r>
             <a:r>
-              <a:rPr sz="1700" b="0" i="0">
+              <a:rPr b="0" i="0">
                 <a:solidFill>
                   <a:srgbClr val="0B1F3A"/>
                 </a:solidFill>
@@ -13882,7 +14063,7 @@
         </p:nvSpPr>
         <p:spPr>
           <a:xfrm>
-            <a:off x="4279900" y="4635500"/>
+            <a:off x="4279900" y="4940300"/>
             <a:ext cx="76200" cy="76200"/>
           </a:xfrm>
           <a:prstGeom prst="ellipse">
@@ -13915,6 +14096,7 @@
           <a:lstStyle/>
           <a:p>
             <a:pPr algn="ctr"/>
+            <a:endParaRPr sz="2000"/>
           </a:p>
         </p:txBody>
       </p:sp>
@@ -13926,7 +14108,7 @@
         </p:nvSpPr>
         <p:spPr>
           <a:xfrm>
-            <a:off x="4495800" y="4508500"/>
+            <a:off x="4495800" y="4813300"/>
             <a:ext cx="1270000" cy="317500"/>
           </a:xfrm>
           <a:prstGeom prst="rect">
@@ -13953,7 +14135,7 @@
           </a:fontRef>
         </p:style>
         <p:txBody>
-          <a:bodyPr rtlCol="0" anchor="ctr" wrap="square" lIns="50800" rIns="50800" tIns="50800" bIns="50800"/>
+          <a:bodyPr wrap="square" lIns="50800" tIns="50800" rIns="50800" bIns="50800" rtlCol="0" anchor="ctr"/>
           <a:lstStyle/>
           <a:p>
             <a:pPr algn="l">
@@ -13962,7 +14144,7 @@
               </a:lnSpc>
             </a:pPr>
             <a:r>
-              <a:rPr sz="1700" b="1" i="0">
+              <a:rPr b="1" i="0">
                 <a:solidFill>
                   <a:srgbClr val="00B7D4"/>
                 </a:solidFill>
@@ -13981,7 +14163,7 @@
         </p:nvSpPr>
         <p:spPr>
           <a:xfrm>
-            <a:off x="5765800" y="4508500"/>
+            <a:off x="5765800" y="4813300"/>
             <a:ext cx="5715000" cy="317500"/>
           </a:xfrm>
           <a:prstGeom prst="rect">
@@ -14008,7 +14190,7 @@
           </a:fontRef>
         </p:style>
         <p:txBody>
-          <a:bodyPr rtlCol="0" anchor="ctr" wrap="square" lIns="50800" rIns="50800" tIns="50800" bIns="50800"/>
+          <a:bodyPr wrap="square" lIns="50800" tIns="50800" rIns="50800" bIns="50800" rtlCol="0" anchor="ctr"/>
           <a:lstStyle/>
           <a:p>
             <a:pPr algn="l">
@@ -14017,7 +14199,7 @@
               </a:lnSpc>
             </a:pPr>
             <a:r>
-              <a:rPr sz="1700" b="0" i="0">
+              <a:rPr b="0" i="0">
                 <a:solidFill>
                   <a:srgbClr val="0B1F3A"/>
                 </a:solidFill>
@@ -14036,7 +14218,7 @@
         </p:nvSpPr>
         <p:spPr>
           <a:xfrm>
-            <a:off x="4279900" y="5080000"/>
+            <a:off x="4279900" y="5384800"/>
             <a:ext cx="76200" cy="76200"/>
           </a:xfrm>
           <a:prstGeom prst="ellipse">
@@ -14069,6 +14251,7 @@
           <a:lstStyle/>
           <a:p>
             <a:pPr algn="ctr"/>
+            <a:endParaRPr sz="2000"/>
           </a:p>
         </p:txBody>
       </p:sp>
@@ -14080,7 +14263,7 @@
         </p:nvSpPr>
         <p:spPr>
           <a:xfrm>
-            <a:off x="4495800" y="4953000"/>
+            <a:off x="4495800" y="5257800"/>
             <a:ext cx="1270000" cy="317500"/>
           </a:xfrm>
           <a:prstGeom prst="rect">
@@ -14107,7 +14290,7 @@
           </a:fontRef>
         </p:style>
         <p:txBody>
-          <a:bodyPr rtlCol="0" anchor="ctr" wrap="square" lIns="50800" rIns="50800" tIns="50800" bIns="50800"/>
+          <a:bodyPr wrap="square" lIns="50800" tIns="50800" rIns="50800" bIns="50800" rtlCol="0" anchor="ctr"/>
           <a:lstStyle/>
           <a:p>
             <a:pPr algn="l">
@@ -14116,7 +14299,7 @@
               </a:lnSpc>
             </a:pPr>
             <a:r>
-              <a:rPr sz="1700" b="1" i="0">
+              <a:rPr b="1" i="0">
                 <a:solidFill>
                   <a:srgbClr val="00B7D4"/>
                 </a:solidFill>
@@ -14135,7 +14318,7 @@
         </p:nvSpPr>
         <p:spPr>
           <a:xfrm>
-            <a:off x="5765800" y="4953000"/>
+            <a:off x="5765800" y="5257800"/>
             <a:ext cx="5715000" cy="317500"/>
           </a:xfrm>
           <a:prstGeom prst="rect">
@@ -14162,7 +14345,7 @@
           </a:fontRef>
         </p:style>
         <p:txBody>
-          <a:bodyPr rtlCol="0" anchor="ctr" wrap="square" lIns="50800" rIns="50800" tIns="50800" bIns="50800"/>
+          <a:bodyPr wrap="square" lIns="50800" tIns="50800" rIns="50800" bIns="50800" rtlCol="0" anchor="ctr"/>
           <a:lstStyle/>
           <a:p>
             <a:pPr algn="l">
@@ -14171,7 +14354,7 @@
               </a:lnSpc>
             </a:pPr>
             <a:r>
-              <a:rPr sz="1700" b="0" i="0">
+              <a:rPr b="0" i="0">
                 <a:solidFill>
                   <a:srgbClr val="0B1F3A"/>
                 </a:solidFill>
@@ -14190,7 +14373,7 @@
         </p:nvSpPr>
         <p:spPr>
           <a:xfrm>
-            <a:off x="4279900" y="5524500"/>
+            <a:off x="4279900" y="5829300"/>
             <a:ext cx="76200" cy="76200"/>
           </a:xfrm>
           <a:prstGeom prst="ellipse">
@@ -14223,6 +14406,7 @@
           <a:lstStyle/>
           <a:p>
             <a:pPr algn="ctr"/>
+            <a:endParaRPr sz="2000"/>
           </a:p>
         </p:txBody>
       </p:sp>
@@ -14234,7 +14418,7 @@
         </p:nvSpPr>
         <p:spPr>
           <a:xfrm>
-            <a:off x="4495800" y="5397500"/>
+            <a:off x="4495800" y="5702300"/>
             <a:ext cx="1270000" cy="317500"/>
           </a:xfrm>
           <a:prstGeom prst="rect">
@@ -14261,7 +14445,7 @@
           </a:fontRef>
         </p:style>
         <p:txBody>
-          <a:bodyPr rtlCol="0" anchor="ctr" wrap="square" lIns="50800" rIns="50800" tIns="50800" bIns="50800"/>
+          <a:bodyPr wrap="square" lIns="50800" tIns="50800" rIns="50800" bIns="50800" rtlCol="0" anchor="ctr"/>
           <a:lstStyle/>
           <a:p>
             <a:pPr algn="l">
@@ -14270,7 +14454,7 @@
               </a:lnSpc>
             </a:pPr>
             <a:r>
-              <a:rPr sz="1700" b="1" i="0">
+              <a:rPr b="1" i="0">
                 <a:solidFill>
                   <a:srgbClr val="00B7D4"/>
                 </a:solidFill>
@@ -14289,7 +14473,7 @@
         </p:nvSpPr>
         <p:spPr>
           <a:xfrm>
-            <a:off x="5765800" y="5397500"/>
+            <a:off x="5765800" y="5702300"/>
             <a:ext cx="5715000" cy="317500"/>
           </a:xfrm>
           <a:prstGeom prst="rect">
@@ -14316,7 +14500,7 @@
           </a:fontRef>
         </p:style>
         <p:txBody>
-          <a:bodyPr rtlCol="0" anchor="ctr" wrap="square" lIns="50800" rIns="50800" tIns="50800" bIns="50800"/>
+          <a:bodyPr wrap="square" lIns="50800" tIns="50800" rIns="50800" bIns="50800" rtlCol="0" anchor="ctr"/>
           <a:lstStyle/>
           <a:p>
             <a:pPr algn="l">
@@ -14325,7 +14509,7 @@
               </a:lnSpc>
             </a:pPr>
             <a:r>
-              <a:rPr sz="1700" b="1" i="0">
+              <a:rPr b="1" i="0">
                 <a:solidFill>
                   <a:srgbClr val="0B1F3A"/>
                 </a:solidFill>
@@ -14345,7 +14529,7 @@
 </file>
 
 <file path=ppt/slides/slide6.xml><?xml version="1.0" encoding="utf-8"?>
-<p:sld xmlns:a="http://schemas.openxmlformats.org/drawingml/2006/main" xmlns:p="http://schemas.openxmlformats.org/presentationml/2006/main" xmlns:r="http://schemas.openxmlformats.org/officeDocument/2006/relationships">
+<p:sld xmlns:a="http://schemas.openxmlformats.org/drawingml/2006/main" xmlns:r="http://schemas.openxmlformats.org/officeDocument/2006/relationships" xmlns:p="http://schemas.openxmlformats.org/presentationml/2006/main">
   <p:cSld>
     <p:spTree>
       <p:nvGrpSpPr>
@@ -14353,7 +14537,14 @@
         <p:cNvGrpSpPr/>
         <p:nvPr/>
       </p:nvGrpSpPr>
-      <p:grpSpPr/>
+      <p:grpSpPr>
+        <a:xfrm>
+          <a:off x="0" y="0"/>
+          <a:ext cx="0" cy="0"/>
+          <a:chOff x="0" y="0"/>
+          <a:chExt cx="0" cy="0"/>
+        </a:xfrm>
+      </p:grpSpPr>
       <p:sp>
         <p:nvSpPr>
           <p:cNvPr id="2" name="Rectangle 1"/>
@@ -14391,10 +14582,11 @@
           </a:fontRef>
         </p:style>
         <p:txBody>
-          <a:bodyPr rtlCol="0" anchor="ctr" lIns="0" rIns="0" tIns="0" bIns="0"/>
+          <a:bodyPr lIns="0" tIns="0" rIns="0" bIns="0" rtlCol="0" anchor="ctr"/>
           <a:lstStyle/>
           <a:p>
             <a:pPr algn="ctr"/>
+            <a:endParaRPr/>
           </a:p>
         </p:txBody>
       </p:sp>
@@ -14433,7 +14625,7 @@
           </a:fontRef>
         </p:style>
         <p:txBody>
-          <a:bodyPr rtlCol="0" anchor="ctr" wrap="square" lIns="50800" rIns="50800" tIns="50800" bIns="50800"/>
+          <a:bodyPr wrap="square" lIns="50800" tIns="50800" rIns="50800" bIns="50800" rtlCol="0" anchor="ctr"/>
           <a:lstStyle/>
           <a:p>
             <a:pPr algn="l">
@@ -14497,7 +14689,7 @@
           </a:fontRef>
         </p:style>
         <p:txBody>
-          <a:bodyPr rtlCol="0" anchor="ctr" wrap="square" lIns="50800" rIns="50800" tIns="50800" bIns="50800"/>
+          <a:bodyPr wrap="square" lIns="50800" tIns="50800" rIns="50800" bIns="50800" rtlCol="0" anchor="ctr"/>
           <a:lstStyle/>
           <a:p>
             <a:pPr algn="r">
@@ -14558,6 +14750,7 @@
           <a:lstStyle/>
           <a:p>
             <a:pPr algn="ctr"/>
+            <a:endParaRPr/>
           </a:p>
         </p:txBody>
       </p:sp>
@@ -14596,7 +14789,7 @@
           </a:fontRef>
         </p:style>
         <p:txBody>
-          <a:bodyPr rtlCol="0" anchor="ctr" wrap="square" lIns="50800" rIns="50800" tIns="50800" bIns="50800"/>
+          <a:bodyPr wrap="square" lIns="50800" tIns="50800" rIns="50800" bIns="50800" rtlCol="0" anchor="ctr"/>
           <a:lstStyle/>
           <a:p>
             <a:pPr algn="l">
@@ -14625,7 +14818,7 @@
         <p:spPr>
           <a:xfrm>
             <a:off x="609600" y="685800"/>
-            <a:ext cx="11112500" cy="508000"/>
+            <a:ext cx="11112500" cy="762000"/>
           </a:xfrm>
           <a:prstGeom prst="rect">
             <a:avLst/>
@@ -14651,7 +14844,7 @@
           </a:fontRef>
         </p:style>
         <p:txBody>
-          <a:bodyPr rtlCol="0" anchor="t" wrap="square" lIns="50800" rIns="50800" tIns="50800" bIns="50800"/>
+          <a:bodyPr wrap="square" lIns="50800" tIns="50800" rIns="50800" bIns="50800" rtlCol="0" anchor="t"/>
           <a:lstStyle/>
           <a:p>
             <a:pPr algn="l">
@@ -14669,13 +14862,22 @@
               <a:t>弘文堂より刊行、</a:t>
             </a:r>
             <a:r>
-              <a:rPr sz="4000" b="1" i="0">
+              <a:rPr lang="en-US" sz="4000" b="1" i="0">
                 <a:solidFill>
                   <a:srgbClr val="00B7D4"/>
                 </a:solidFill>
                 <a:latin typeface="Yu Gothic UI"/>
               </a:rPr>
-              <a:t>累計5,000部</a:t>
+              <a:t>No.1</a:t>
+            </a:r>
+            <a:r>
+              <a:rPr lang="ja-JP" altLang="en-US" sz="4000" b="1" i="0">
+                <a:solidFill>
+                  <a:srgbClr val="00B7D4"/>
+                </a:solidFill>
+                <a:latin typeface="Yu Gothic UI"/>
+              </a:rPr>
+              <a:t>獲得</a:t>
             </a:r>
             <a:r>
               <a:rPr sz="4000" b="1" i="0">
@@ -14721,8 +14923,8 @@
         </p:nvSpPr>
         <p:spPr>
           <a:xfrm>
-            <a:off x="762000" y="5207000"/>
-            <a:ext cx="2667000" cy="508000"/>
+            <a:off x="647700" y="5207000"/>
+            <a:ext cx="2895600" cy="1130300"/>
           </a:xfrm>
           <a:prstGeom prst="rect">
             <a:avLst/>
@@ -14748,7 +14950,7 @@
           </a:fontRef>
         </p:style>
         <p:txBody>
-          <a:bodyPr rtlCol="0" anchor="t" wrap="square" lIns="50800" rIns="50800" tIns="50800" bIns="50800"/>
+          <a:bodyPr wrap="square" lIns="50800" tIns="50800" rIns="50800" bIns="50800" rtlCol="0" anchor="t"/>
           <a:lstStyle/>
           <a:p>
             <a:pPr algn="ctr">
@@ -14757,7 +14959,7 @@
               </a:lnSpc>
             </a:pPr>
             <a:r>
-              <a:rPr sz="1400" b="1" i="0">
+              <a:rPr sz="1600" b="1" i="0">
                 <a:solidFill>
                   <a:srgbClr val="0B1F3A"/>
                 </a:solidFill>
@@ -14773,13 +14975,35 @@
               </a:lnSpc>
             </a:pPr>
             <a:r>
-              <a:rPr sz="1300" b="0" i="0">
+              <a:rPr sz="1400" b="0" i="0">
                 <a:solidFill>
                   <a:srgbClr val="3D4F6B"/>
                 </a:solidFill>
                 <a:latin typeface="Yu Gothic UI"/>
               </a:rPr>
-              <a:t>弁護士 福島駿太 著／弘文堂・2025年</a:t>
+              <a:t>弁護士 福島駿太 著</a:t>
+            </a:r>
+            <a:endParaRPr lang="en-US" sz="1400" b="0" i="0">
+              <a:solidFill>
+                <a:srgbClr val="3D4F6B"/>
+              </a:solidFill>
+              <a:latin typeface="Yu Gothic UI"/>
+            </a:endParaRPr>
+          </a:p>
+          <a:p>
+            <a:pPr algn="ctr">
+              <a:lnSpc>
+                <a:spcPct val="150000"/>
+              </a:lnSpc>
+            </a:pPr>
+            <a:r>
+              <a:rPr sz="1400" b="0" i="0">
+                <a:solidFill>
+                  <a:srgbClr val="3D4F6B"/>
+                </a:solidFill>
+                <a:latin typeface="Yu Gothic UI"/>
+              </a:rPr>
+              <a:t>弘文堂・2025年</a:t>
             </a:r>
           </a:p>
         </p:txBody>
@@ -14792,8 +15016,8 @@
         </p:nvSpPr>
         <p:spPr>
           <a:xfrm>
-            <a:off x="3937000" y="1524000"/>
-            <a:ext cx="7620000" cy="952500"/>
+            <a:off x="3924300" y="1730375"/>
+            <a:ext cx="7620000" cy="1441450"/>
           </a:xfrm>
           <a:prstGeom prst="rect">
             <a:avLst/>
@@ -14821,7 +15045,7 @@
           </a:fontRef>
         </p:style>
         <p:txBody>
-          <a:bodyPr rtlCol="0" anchor="t" wrap="square" lIns="203200" rIns="203200" tIns="152400" bIns="152400"/>
+          <a:bodyPr wrap="square" lIns="203200" tIns="152400" rIns="203200" bIns="152400" rtlCol="0" anchor="t"/>
           <a:lstStyle/>
           <a:p>
             <a:pPr algn="l">
@@ -14874,7 +15098,7 @@
         </p:nvSpPr>
         <p:spPr>
           <a:xfrm>
-            <a:off x="3937000" y="2603500"/>
+            <a:off x="3924300" y="3340100"/>
             <a:ext cx="7620000" cy="381000"/>
           </a:xfrm>
           <a:prstGeom prst="rect">
@@ -14901,7 +15125,7 @@
           </a:fontRef>
         </p:style>
         <p:txBody>
-          <a:bodyPr rtlCol="0" anchor="t" wrap="square" lIns="50800" rIns="50800" tIns="50800" bIns="50800"/>
+          <a:bodyPr wrap="square" lIns="50800" tIns="50800" rIns="50800" bIns="50800" rtlCol="0" anchor="t"/>
           <a:lstStyle/>
           <a:p>
             <a:pPr algn="l">
@@ -14910,7 +15134,7 @@
               </a:lnSpc>
             </a:pPr>
             <a:r>
-              <a:rPr sz="1700" b="1" i="0">
+              <a:rPr b="1" i="0">
                 <a:solidFill>
                   <a:srgbClr val="0B1F3A"/>
                 </a:solidFill>
@@ -14929,8 +15153,8 @@
         </p:nvSpPr>
         <p:spPr>
           <a:xfrm>
-            <a:off x="3937000" y="2857500"/>
-            <a:ext cx="7620000" cy="317500"/>
+            <a:off x="3924300" y="3716337"/>
+            <a:ext cx="7620000" cy="381000"/>
           </a:xfrm>
           <a:prstGeom prst="rect">
             <a:avLst/>
@@ -14956,7 +15180,7 @@
           </a:fontRef>
         </p:style>
         <p:txBody>
-          <a:bodyPr rtlCol="0" anchor="t" wrap="square" lIns="50800" rIns="50800" tIns="50800" bIns="50800"/>
+          <a:bodyPr wrap="square" lIns="50800" tIns="50800" rIns="50800" bIns="50800" rtlCol="0" anchor="t"/>
           <a:lstStyle/>
           <a:p>
             <a:pPr algn="l">
@@ -14965,9 +15189,9 @@
               </a:lnSpc>
             </a:pPr>
             <a:r>
-              <a:rPr sz="1400" b="0" i="0">
-                <a:solidFill>
-                  <a:srgbClr val="3D4F6B"/>
+              <a:rPr sz="1600" b="0" i="0">
+                <a:solidFill>
+                  <a:srgbClr val="0B1F3A"/>
                 </a:solidFill>
                 <a:latin typeface="Yu Gothic UI"/>
               </a:rPr>
@@ -14984,7 +15208,7 @@
         </p:nvSpPr>
         <p:spPr>
           <a:xfrm>
-            <a:off x="3937000" y="3429000"/>
+            <a:off x="3937000" y="4343400"/>
             <a:ext cx="2413000" cy="1841500"/>
           </a:xfrm>
           <a:prstGeom prst="rect">
@@ -15013,10 +15237,11 @@
           </a:fontRef>
         </p:style>
         <p:txBody>
-          <a:bodyPr rtlCol="0" anchor="ctr" lIns="0" rIns="0" tIns="0" bIns="0"/>
+          <a:bodyPr lIns="0" tIns="0" rIns="0" bIns="0" rtlCol="0" anchor="ctr"/>
           <a:lstStyle/>
           <a:p>
             <a:pPr algn="ctr"/>
+            <a:endParaRPr/>
           </a:p>
         </p:txBody>
       </p:sp>
@@ -15028,7 +15253,7 @@
         </p:nvSpPr>
         <p:spPr>
           <a:xfrm>
-            <a:off x="3937000" y="3429000"/>
+            <a:off x="3937000" y="4343400"/>
             <a:ext cx="2413000" cy="25400"/>
           </a:xfrm>
           <a:prstGeom prst="rect">
@@ -15057,10 +15282,11 @@
           </a:fontRef>
         </p:style>
         <p:txBody>
-          <a:bodyPr rtlCol="0" anchor="ctr" lIns="0" rIns="0" tIns="0" bIns="0"/>
+          <a:bodyPr lIns="0" tIns="0" rIns="0" bIns="0" rtlCol="0" anchor="ctr"/>
           <a:lstStyle/>
           <a:p>
             <a:pPr algn="ctr"/>
+            <a:endParaRPr/>
           </a:p>
         </p:txBody>
       </p:sp>
@@ -15072,7 +15298,7 @@
         </p:nvSpPr>
         <p:spPr>
           <a:xfrm>
-            <a:off x="3937000" y="3606800"/>
+            <a:off x="3937000" y="4521200"/>
             <a:ext cx="2413000" cy="508000"/>
           </a:xfrm>
           <a:prstGeom prst="rect">
@@ -15099,7 +15325,7 @@
           </a:fontRef>
         </p:style>
         <p:txBody>
-          <a:bodyPr rtlCol="0" anchor="t" wrap="square" lIns="152400" rIns="152400" tIns="0" bIns="0"/>
+          <a:bodyPr wrap="square" lIns="152400" tIns="0" rIns="152400" bIns="0" rtlCol="0" anchor="t"/>
           <a:lstStyle/>
           <a:p>
             <a:pPr algn="l">
@@ -15116,28 +15342,74 @@
               </a:rPr>
               <a:t>No.1</a:t>
             </a:r>
-            <a:r>
-              <a:rPr sz="1600" b="1" i="0">
+          </a:p>
+        </p:txBody>
+      </p:sp>
+      <p:sp>
+        <p:nvSpPr>
+          <p:cNvPr id="16" name="Rectangle 15"/>
+          <p:cNvSpPr/>
+          <p:nvPr/>
+        </p:nvSpPr>
+        <p:spPr>
+          <a:xfrm>
+            <a:off x="3937000" y="5168900"/>
+            <a:ext cx="2413000" cy="317500"/>
+          </a:xfrm>
+          <a:prstGeom prst="rect">
+            <a:avLst/>
+          </a:prstGeom>
+          <a:noFill/>
+          <a:ln>
+            <a:noFill/>
+          </a:ln>
+          <a:effectLst/>
+        </p:spPr>
+        <p:style>
+          <a:lnRef idx="1">
+            <a:schemeClr val="accent1"/>
+          </a:lnRef>
+          <a:fillRef idx="3">
+            <a:schemeClr val="accent1"/>
+          </a:fillRef>
+          <a:effectRef idx="2">
+            <a:schemeClr val="accent1"/>
+          </a:effectRef>
+          <a:fontRef idx="minor">
+            <a:schemeClr val="lt1"/>
+          </a:fontRef>
+        </p:style>
+        <p:txBody>
+          <a:bodyPr wrap="square" lIns="152400" tIns="0" rIns="152400" bIns="0" rtlCol="0" anchor="t"/>
+          <a:lstStyle/>
+          <a:p>
+            <a:pPr algn="l">
+              <a:lnSpc>
+                <a:spcPct val="140000"/>
+              </a:lnSpc>
+            </a:pPr>
+            <a:r>
+              <a:rPr sz="1700" b="1" i="0">
                 <a:solidFill>
                   <a:srgbClr val="0B1F3A"/>
                 </a:solidFill>
                 <a:latin typeface="Yu Gothic UI"/>
               </a:rPr>
-              <a:t/>
-            </a:r>
-          </a:p>
-        </p:txBody>
-      </p:sp>
-      <p:sp>
-        <p:nvSpPr>
-          <p:cNvPr id="16" name="Rectangle 15"/>
-          <p:cNvSpPr/>
-          <p:nvPr/>
-        </p:nvSpPr>
-        <p:spPr>
-          <a:xfrm>
-            <a:off x="3937000" y="4254500"/>
-            <a:ext cx="2413000" cy="317500"/>
+              <a:t>Amazonベストセラー</a:t>
+            </a:r>
+          </a:p>
+        </p:txBody>
+      </p:sp>
+      <p:sp>
+        <p:nvSpPr>
+          <p:cNvPr id="17" name="Rectangle 16"/>
+          <p:cNvSpPr/>
+          <p:nvPr/>
+        </p:nvSpPr>
+        <p:spPr>
+          <a:xfrm>
+            <a:off x="3937000" y="5486400"/>
+            <a:ext cx="2413000" cy="508000"/>
           </a:xfrm>
           <a:prstGeom prst="rect">
             <a:avLst/>
@@ -15163,66 +15435,11 @@
           </a:fontRef>
         </p:style>
         <p:txBody>
-          <a:bodyPr rtlCol="0" anchor="t" wrap="square" lIns="152400" rIns="152400" tIns="0" bIns="0"/>
+          <a:bodyPr wrap="square" lIns="152400" tIns="0" rIns="152400" bIns="0" rtlCol="0" anchor="t"/>
           <a:lstStyle/>
           <a:p>
             <a:pPr algn="l">
               <a:lnSpc>
-                <a:spcPct val="140000"/>
-              </a:lnSpc>
-            </a:pPr>
-            <a:r>
-              <a:rPr sz="1700" b="1" i="0">
-                <a:solidFill>
-                  <a:srgbClr val="0B1F3A"/>
-                </a:solidFill>
-                <a:latin typeface="Yu Gothic UI"/>
-              </a:rPr>
-              <a:t>Amazonベストセラー</a:t>
-            </a:r>
-          </a:p>
-        </p:txBody>
-      </p:sp>
-      <p:sp>
-        <p:nvSpPr>
-          <p:cNvPr id="17" name="Rectangle 16"/>
-          <p:cNvSpPr/>
-          <p:nvPr/>
-        </p:nvSpPr>
-        <p:spPr>
-          <a:xfrm>
-            <a:off x="3937000" y="4572000"/>
-            <a:ext cx="2413000" cy="508000"/>
-          </a:xfrm>
-          <a:prstGeom prst="rect">
-            <a:avLst/>
-          </a:prstGeom>
-          <a:noFill/>
-          <a:ln>
-            <a:noFill/>
-          </a:ln>
-          <a:effectLst/>
-        </p:spPr>
-        <p:style>
-          <a:lnRef idx="1">
-            <a:schemeClr val="accent1"/>
-          </a:lnRef>
-          <a:fillRef idx="3">
-            <a:schemeClr val="accent1"/>
-          </a:fillRef>
-          <a:effectRef idx="2">
-            <a:schemeClr val="accent1"/>
-          </a:effectRef>
-          <a:fontRef idx="minor">
-            <a:schemeClr val="lt1"/>
-          </a:fontRef>
-        </p:style>
-        <p:txBody>
-          <a:bodyPr rtlCol="0" anchor="t" wrap="square" lIns="152400" rIns="152400" tIns="0" bIns="0"/>
-          <a:lstStyle/>
-          <a:p>
-            <a:pPr algn="l">
-              <a:lnSpc>
                 <a:spcPct val="160000"/>
               </a:lnSpc>
             </a:pPr>
@@ -15246,7 +15463,7 @@
         </p:nvSpPr>
         <p:spPr>
           <a:xfrm>
-            <a:off x="6540500" y="3429000"/>
+            <a:off x="6540500" y="4343400"/>
             <a:ext cx="2413000" cy="1841500"/>
           </a:xfrm>
           <a:prstGeom prst="rect">
@@ -15275,10 +15492,11 @@
           </a:fontRef>
         </p:style>
         <p:txBody>
-          <a:bodyPr rtlCol="0" anchor="ctr" lIns="0" rIns="0" tIns="0" bIns="0"/>
+          <a:bodyPr lIns="0" tIns="0" rIns="0" bIns="0" rtlCol="0" anchor="ctr"/>
           <a:lstStyle/>
           <a:p>
             <a:pPr algn="ctr"/>
+            <a:endParaRPr/>
           </a:p>
         </p:txBody>
       </p:sp>
@@ -15290,7 +15508,7 @@
         </p:nvSpPr>
         <p:spPr>
           <a:xfrm>
-            <a:off x="6540500" y="3429000"/>
+            <a:off x="6540500" y="4343400"/>
             <a:ext cx="2413000" cy="25400"/>
           </a:xfrm>
           <a:prstGeom prst="rect">
@@ -15319,10 +15537,11 @@
           </a:fontRef>
         </p:style>
         <p:txBody>
-          <a:bodyPr rtlCol="0" anchor="ctr" lIns="0" rIns="0" tIns="0" bIns="0"/>
+          <a:bodyPr lIns="0" tIns="0" rIns="0" bIns="0" rtlCol="0" anchor="ctr"/>
           <a:lstStyle/>
           <a:p>
             <a:pPr algn="ctr"/>
+            <a:endParaRPr/>
           </a:p>
         </p:txBody>
       </p:sp>
@@ -15334,7 +15553,7 @@
         </p:nvSpPr>
         <p:spPr>
           <a:xfrm>
-            <a:off x="6540500" y="3606800"/>
+            <a:off x="6540500" y="4521200"/>
             <a:ext cx="2413000" cy="508000"/>
           </a:xfrm>
           <a:prstGeom prst="rect">
@@ -15361,7 +15580,7 @@
           </a:fontRef>
         </p:style>
         <p:txBody>
-          <a:bodyPr rtlCol="0" anchor="t" wrap="square" lIns="152400" rIns="152400" tIns="0" bIns="0"/>
+          <a:bodyPr wrap="square" lIns="152400" tIns="0" rIns="152400" bIns="0" rtlCol="0" anchor="t"/>
           <a:lstStyle/>
           <a:p>
             <a:pPr algn="l">
@@ -15378,28 +15597,74 @@
               </a:rPr>
               <a:t>No.1</a:t>
             </a:r>
-            <a:r>
-              <a:rPr sz="1600" b="1" i="0">
+          </a:p>
+        </p:txBody>
+      </p:sp>
+      <p:sp>
+        <p:nvSpPr>
+          <p:cNvPr id="21" name="Rectangle 20"/>
+          <p:cNvSpPr/>
+          <p:nvPr/>
+        </p:nvSpPr>
+        <p:spPr>
+          <a:xfrm>
+            <a:off x="6540500" y="5168900"/>
+            <a:ext cx="2413000" cy="317500"/>
+          </a:xfrm>
+          <a:prstGeom prst="rect">
+            <a:avLst/>
+          </a:prstGeom>
+          <a:noFill/>
+          <a:ln>
+            <a:noFill/>
+          </a:ln>
+          <a:effectLst/>
+        </p:spPr>
+        <p:style>
+          <a:lnRef idx="1">
+            <a:schemeClr val="accent1"/>
+          </a:lnRef>
+          <a:fillRef idx="3">
+            <a:schemeClr val="accent1"/>
+          </a:fillRef>
+          <a:effectRef idx="2">
+            <a:schemeClr val="accent1"/>
+          </a:effectRef>
+          <a:fontRef idx="minor">
+            <a:schemeClr val="lt1"/>
+          </a:fontRef>
+        </p:style>
+        <p:txBody>
+          <a:bodyPr wrap="square" lIns="152400" tIns="0" rIns="152400" bIns="0" rtlCol="0" anchor="t"/>
+          <a:lstStyle/>
+          <a:p>
+            <a:pPr algn="l">
+              <a:lnSpc>
+                <a:spcPct val="140000"/>
+              </a:lnSpc>
+            </a:pPr>
+            <a:r>
+              <a:rPr sz="1700" b="1" i="0">
                 <a:solidFill>
                   <a:srgbClr val="0B1F3A"/>
                 </a:solidFill>
                 <a:latin typeface="Yu Gothic UI"/>
               </a:rPr>
-              <a:t/>
-            </a:r>
-          </a:p>
-        </p:txBody>
-      </p:sp>
-      <p:sp>
-        <p:nvSpPr>
-          <p:cNvPr id="21" name="Rectangle 20"/>
-          <p:cNvSpPr/>
-          <p:nvPr/>
-        </p:nvSpPr>
-        <p:spPr>
-          <a:xfrm>
-            <a:off x="6540500" y="4254500"/>
-            <a:ext cx="2413000" cy="317500"/>
+              <a:t>弁護士会ブックセンター</a:t>
+            </a:r>
+          </a:p>
+        </p:txBody>
+      </p:sp>
+      <p:sp>
+        <p:nvSpPr>
+          <p:cNvPr id="22" name="Rectangle 21"/>
+          <p:cNvSpPr/>
+          <p:nvPr/>
+        </p:nvSpPr>
+        <p:spPr>
+          <a:xfrm>
+            <a:off x="6540500" y="5486400"/>
+            <a:ext cx="2413000" cy="508000"/>
           </a:xfrm>
           <a:prstGeom prst="rect">
             <a:avLst/>
@@ -15425,66 +15690,11 @@
           </a:fontRef>
         </p:style>
         <p:txBody>
-          <a:bodyPr rtlCol="0" anchor="t" wrap="square" lIns="152400" rIns="152400" tIns="0" bIns="0"/>
+          <a:bodyPr wrap="square" lIns="152400" tIns="0" rIns="152400" bIns="0" rtlCol="0" anchor="t"/>
           <a:lstStyle/>
           <a:p>
             <a:pPr algn="l">
               <a:lnSpc>
-                <a:spcPct val="140000"/>
-              </a:lnSpc>
-            </a:pPr>
-            <a:r>
-              <a:rPr sz="1700" b="1" i="0">
-                <a:solidFill>
-                  <a:srgbClr val="0B1F3A"/>
-                </a:solidFill>
-                <a:latin typeface="Yu Gothic UI"/>
-              </a:rPr>
-              <a:t>弁護士会ブックセンター</a:t>
-            </a:r>
-          </a:p>
-        </p:txBody>
-      </p:sp>
-      <p:sp>
-        <p:nvSpPr>
-          <p:cNvPr id="22" name="Rectangle 21"/>
-          <p:cNvSpPr/>
-          <p:nvPr/>
-        </p:nvSpPr>
-        <p:spPr>
-          <a:xfrm>
-            <a:off x="6540500" y="4572000"/>
-            <a:ext cx="2413000" cy="508000"/>
-          </a:xfrm>
-          <a:prstGeom prst="rect">
-            <a:avLst/>
-          </a:prstGeom>
-          <a:noFill/>
-          <a:ln>
-            <a:noFill/>
-          </a:ln>
-          <a:effectLst/>
-        </p:spPr>
-        <p:style>
-          <a:lnRef idx="1">
-            <a:schemeClr val="accent1"/>
-          </a:lnRef>
-          <a:fillRef idx="3">
-            <a:schemeClr val="accent1"/>
-          </a:fillRef>
-          <a:effectRef idx="2">
-            <a:schemeClr val="accent1"/>
-          </a:effectRef>
-          <a:fontRef idx="minor">
-            <a:schemeClr val="lt1"/>
-          </a:fontRef>
-        </p:style>
-        <p:txBody>
-          <a:bodyPr rtlCol="0" anchor="t" wrap="square" lIns="152400" rIns="152400" tIns="0" bIns="0"/>
-          <a:lstStyle/>
-          <a:p>
-            <a:pPr algn="l">
-              <a:lnSpc>
                 <a:spcPct val="160000"/>
               </a:lnSpc>
             </a:pPr>
@@ -15508,7 +15718,7 @@
         </p:nvSpPr>
         <p:spPr>
           <a:xfrm>
-            <a:off x="9144000" y="3429000"/>
+            <a:off x="9144000" y="4343400"/>
             <a:ext cx="2413000" cy="1841500"/>
           </a:xfrm>
           <a:prstGeom prst="rect">
@@ -15537,10 +15747,11 @@
           </a:fontRef>
         </p:style>
         <p:txBody>
-          <a:bodyPr rtlCol="0" anchor="ctr" lIns="0" rIns="0" tIns="0" bIns="0"/>
+          <a:bodyPr lIns="0" tIns="0" rIns="0" bIns="0" rtlCol="0" anchor="ctr"/>
           <a:lstStyle/>
           <a:p>
             <a:pPr algn="ctr"/>
+            <a:endParaRPr/>
           </a:p>
         </p:txBody>
       </p:sp>
@@ -15552,7 +15763,7 @@
         </p:nvSpPr>
         <p:spPr>
           <a:xfrm>
-            <a:off x="9144000" y="3429000"/>
+            <a:off x="9144000" y="4343400"/>
             <a:ext cx="2413000" cy="25400"/>
           </a:xfrm>
           <a:prstGeom prst="rect">
@@ -15581,10 +15792,11 @@
           </a:fontRef>
         </p:style>
         <p:txBody>
-          <a:bodyPr rtlCol="0" anchor="ctr" lIns="0" rIns="0" tIns="0" bIns="0"/>
+          <a:bodyPr lIns="0" tIns="0" rIns="0" bIns="0" rtlCol="0" anchor="ctr"/>
           <a:lstStyle/>
           <a:p>
             <a:pPr algn="ctr"/>
+            <a:endParaRPr/>
           </a:p>
         </p:txBody>
       </p:sp>
@@ -15596,7 +15808,7 @@
         </p:nvSpPr>
         <p:spPr>
           <a:xfrm>
-            <a:off x="9144000" y="3606800"/>
+            <a:off x="9144000" y="4521200"/>
             <a:ext cx="2413000" cy="508000"/>
           </a:xfrm>
           <a:prstGeom prst="rect">
@@ -15623,7 +15835,7 @@
           </a:fontRef>
         </p:style>
         <p:txBody>
-          <a:bodyPr rtlCol="0" anchor="t" wrap="square" lIns="152400" rIns="152400" tIns="0" bIns="0"/>
+          <a:bodyPr wrap="square" lIns="152400" tIns="0" rIns="152400" bIns="0" rtlCol="0" anchor="t"/>
           <a:lstStyle/>
           <a:p>
             <a:pPr algn="l">
@@ -15660,7 +15872,7 @@
         </p:nvSpPr>
         <p:spPr>
           <a:xfrm>
-            <a:off x="9144000" y="4254500"/>
+            <a:off x="9144000" y="5168900"/>
             <a:ext cx="2413000" cy="317500"/>
           </a:xfrm>
           <a:prstGeom prst="rect">
@@ -15687,7 +15899,7 @@
           </a:fontRef>
         </p:style>
         <p:txBody>
-          <a:bodyPr rtlCol="0" anchor="t" wrap="square" lIns="152400" rIns="152400" tIns="0" bIns="0"/>
+          <a:bodyPr wrap="square" lIns="152400" tIns="0" rIns="152400" bIns="0" rtlCol="0" anchor="t"/>
           <a:lstStyle/>
           <a:p>
             <a:pPr algn="l">
@@ -15715,7 +15927,7 @@
         </p:nvSpPr>
         <p:spPr>
           <a:xfrm>
-            <a:off x="9144000" y="4572000"/>
+            <a:off x="9144000" y="5486400"/>
             <a:ext cx="2413000" cy="508000"/>
           </a:xfrm>
           <a:prstGeom prst="rect">
@@ -15742,7 +15954,7 @@
           </a:fontRef>
         </p:style>
         <p:txBody>
-          <a:bodyPr rtlCol="0" anchor="t" wrap="square" lIns="152400" rIns="152400" tIns="0" bIns="0"/>
+          <a:bodyPr wrap="square" lIns="152400" tIns="0" rIns="152400" bIns="0" rtlCol="0" anchor="t"/>
           <a:lstStyle/>
           <a:p>
             <a:pPr algn="l">
@@ -15771,7 +15983,7 @@
 </file>
 
 <file path=ppt/slides/slide7.xml><?xml version="1.0" encoding="utf-8"?>
-<p:sld xmlns:a="http://schemas.openxmlformats.org/drawingml/2006/main" xmlns:p="http://schemas.openxmlformats.org/presentationml/2006/main" xmlns:r="http://schemas.openxmlformats.org/officeDocument/2006/relationships">
+<p:sld xmlns:a="http://schemas.openxmlformats.org/drawingml/2006/main" xmlns:r="http://schemas.openxmlformats.org/officeDocument/2006/relationships" xmlns:p="http://schemas.openxmlformats.org/presentationml/2006/main">
   <p:cSld>
     <p:spTree>
       <p:nvGrpSpPr>
@@ -15779,7 +15991,14 @@
         <p:cNvGrpSpPr/>
         <p:nvPr/>
       </p:nvGrpSpPr>
-      <p:grpSpPr/>
+      <p:grpSpPr>
+        <a:xfrm>
+          <a:off x="0" y="0"/>
+          <a:ext cx="0" cy="0"/>
+          <a:chOff x="0" y="0"/>
+          <a:chExt cx="0" cy="0"/>
+        </a:xfrm>
+      </p:grpSpPr>
       <p:sp>
         <p:nvSpPr>
           <p:cNvPr id="2" name="Rectangle 1"/>
@@ -15817,10 +16036,11 @@
           </a:fontRef>
         </p:style>
         <p:txBody>
-          <a:bodyPr rtlCol="0" anchor="ctr" lIns="0" rIns="0" tIns="0" bIns="0"/>
+          <a:bodyPr lIns="0" tIns="0" rIns="0" bIns="0" rtlCol="0" anchor="ctr"/>
           <a:lstStyle/>
           <a:p>
             <a:pPr algn="ctr"/>
+            <a:endParaRPr/>
           </a:p>
         </p:txBody>
       </p:sp>
@@ -15859,7 +16079,7 @@
           </a:fontRef>
         </p:style>
         <p:txBody>
-          <a:bodyPr rtlCol="0" anchor="ctr" wrap="square" lIns="50800" rIns="50800" tIns="50800" bIns="50800"/>
+          <a:bodyPr wrap="square" lIns="50800" tIns="50800" rIns="50800" bIns="50800" rtlCol="0" anchor="ctr"/>
           <a:lstStyle/>
           <a:p>
             <a:pPr algn="l">
@@ -15923,7 +16143,7 @@
           </a:fontRef>
         </p:style>
         <p:txBody>
-          <a:bodyPr rtlCol="0" anchor="ctr" wrap="square" lIns="50800" rIns="50800" tIns="50800" bIns="50800"/>
+          <a:bodyPr wrap="square" lIns="50800" tIns="50800" rIns="50800" bIns="50800" rtlCol="0" anchor="ctr"/>
           <a:lstStyle/>
           <a:p>
             <a:pPr algn="r">
@@ -15984,6 +16204,7 @@
           <a:lstStyle/>
           <a:p>
             <a:pPr algn="ctr"/>
+            <a:endParaRPr/>
           </a:p>
         </p:txBody>
       </p:sp>
@@ -16022,7 +16243,7 @@
           </a:fontRef>
         </p:style>
         <p:txBody>
-          <a:bodyPr rtlCol="0" anchor="ctr" wrap="square" lIns="50800" rIns="50800" tIns="50800" bIns="50800"/>
+          <a:bodyPr wrap="square" lIns="50800" tIns="50800" rIns="50800" bIns="50800" rtlCol="0" anchor="ctr"/>
           <a:lstStyle/>
           <a:p>
             <a:pPr algn="l">
@@ -16077,7 +16298,7 @@
           </a:fontRef>
         </p:style>
         <p:txBody>
-          <a:bodyPr rtlCol="0" anchor="t" wrap="square" lIns="50800" rIns="50800" tIns="50800" bIns="50800"/>
+          <a:bodyPr wrap="square" lIns="50800" tIns="50800" rIns="50800" bIns="50800" rtlCol="0" anchor="t"/>
           <a:lstStyle/>
           <a:p>
             <a:pPr algn="l">
@@ -16123,8 +16344,8 @@
         </p:nvSpPr>
         <p:spPr>
           <a:xfrm>
-            <a:off x="609600" y="1460500"/>
-            <a:ext cx="5397500" cy="825500"/>
+            <a:off x="609600" y="1536700"/>
+            <a:ext cx="5397500" cy="1054100"/>
           </a:xfrm>
           <a:prstGeom prst="rect">
             <a:avLst/>
@@ -16154,10 +16375,11 @@
           </a:fontRef>
         </p:style>
         <p:txBody>
-          <a:bodyPr rtlCol="0" anchor="ctr" lIns="0" rIns="0" tIns="0" bIns="0"/>
+          <a:bodyPr lIns="0" tIns="0" rIns="0" bIns="0" rtlCol="0" anchor="ctr"/>
           <a:lstStyle/>
           <a:p>
             <a:pPr algn="ctr"/>
+            <a:endParaRPr/>
           </a:p>
         </p:txBody>
       </p:sp>
@@ -16169,8 +16391,8 @@
         </p:nvSpPr>
         <p:spPr>
           <a:xfrm>
-            <a:off x="609600" y="1460500"/>
-            <a:ext cx="38100" cy="825500"/>
+            <a:off x="609600" y="1536700"/>
+            <a:ext cx="38100" cy="1054100"/>
           </a:xfrm>
           <a:prstGeom prst="rect">
             <a:avLst/>
@@ -16198,10 +16420,11 @@
           </a:fontRef>
         </p:style>
         <p:txBody>
-          <a:bodyPr rtlCol="0" anchor="ctr" lIns="0" rIns="0" tIns="0" bIns="0"/>
+          <a:bodyPr lIns="0" tIns="0" rIns="0" bIns="0" rtlCol="0" anchor="ctr"/>
           <a:lstStyle/>
           <a:p>
             <a:pPr algn="ctr"/>
+            <a:endParaRPr/>
           </a:p>
         </p:txBody>
       </p:sp>
@@ -16213,8 +16436,8 @@
         </p:nvSpPr>
         <p:spPr>
           <a:xfrm>
-            <a:off x="723900" y="1460500"/>
-            <a:ext cx="889000" cy="825500"/>
+            <a:off x="723900" y="1536700"/>
+            <a:ext cx="889000" cy="1054100"/>
           </a:xfrm>
           <a:prstGeom prst="rect">
             <a:avLst/>
@@ -16240,7 +16463,7 @@
           </a:fontRef>
         </p:style>
         <p:txBody>
-          <a:bodyPr rtlCol="0" anchor="ctr" wrap="square" lIns="50800" rIns="50800" tIns="50800" bIns="50800"/>
+          <a:bodyPr wrap="square" lIns="50800" tIns="50800" rIns="50800" bIns="50800" rtlCol="0" anchor="ctr"/>
           <a:lstStyle/>
           <a:p>
             <a:pPr algn="l">
@@ -16249,7 +16472,7 @@
               </a:lnSpc>
             </a:pPr>
             <a:r>
-              <a:rPr sz="2200" b="1" i="0">
+              <a:rPr sz="2000" b="1" i="0">
                 <a:solidFill>
                   <a:srgbClr val="00B7D4"/>
                 </a:solidFill>
@@ -16284,8 +16507,8 @@
         </p:nvSpPr>
         <p:spPr>
           <a:xfrm>
-            <a:off x="1689100" y="1460500"/>
-            <a:ext cx="4254500" cy="825500"/>
+            <a:off x="1689100" y="1536700"/>
+            <a:ext cx="4254500" cy="1054100"/>
           </a:xfrm>
           <a:prstGeom prst="rect">
             <a:avLst/>
@@ -16311,7 +16534,7 @@
           </a:fontRef>
         </p:style>
         <p:txBody>
-          <a:bodyPr rtlCol="0" anchor="ctr" wrap="square" lIns="0" rIns="101600" tIns="50800" bIns="50800"/>
+          <a:bodyPr wrap="square" lIns="0" tIns="50800" rIns="101600" bIns="50800" rtlCol="0" anchor="ctr"/>
           <a:lstStyle/>
           <a:p>
             <a:pPr algn="l">
@@ -16336,7 +16559,7 @@
               </a:lnSpc>
             </a:pPr>
             <a:r>
-              <a:rPr sz="1200" b="0" i="0">
+              <a:rPr sz="1400" b="0" i="0">
                 <a:solidFill>
                   <a:srgbClr val="3D4F6B"/>
                 </a:solidFill>
@@ -16355,8 +16578,8 @@
         </p:nvSpPr>
         <p:spPr>
           <a:xfrm>
-            <a:off x="6184900" y="1460500"/>
-            <a:ext cx="5397500" cy="825500"/>
+            <a:off x="6184900" y="1536700"/>
+            <a:ext cx="5753100" cy="1054100"/>
           </a:xfrm>
           <a:prstGeom prst="rect">
             <a:avLst/>
@@ -16386,10 +16609,11 @@
           </a:fontRef>
         </p:style>
         <p:txBody>
-          <a:bodyPr rtlCol="0" anchor="ctr" lIns="0" rIns="0" tIns="0" bIns="0"/>
+          <a:bodyPr lIns="0" tIns="0" rIns="0" bIns="0" rtlCol="0" anchor="ctr"/>
           <a:lstStyle/>
           <a:p>
             <a:pPr algn="ctr"/>
+            <a:endParaRPr/>
           </a:p>
         </p:txBody>
       </p:sp>
@@ -16401,8 +16625,8 @@
         </p:nvSpPr>
         <p:spPr>
           <a:xfrm>
-            <a:off x="6184900" y="1460500"/>
-            <a:ext cx="38100" cy="825500"/>
+            <a:off x="6184899" y="1536700"/>
+            <a:ext cx="45719" cy="1054100"/>
           </a:xfrm>
           <a:prstGeom prst="rect">
             <a:avLst/>
@@ -16430,10 +16654,11 @@
           </a:fontRef>
         </p:style>
         <p:txBody>
-          <a:bodyPr rtlCol="0" anchor="ctr" lIns="0" rIns="0" tIns="0" bIns="0"/>
+          <a:bodyPr lIns="0" tIns="0" rIns="0" bIns="0" rtlCol="0" anchor="ctr"/>
           <a:lstStyle/>
           <a:p>
             <a:pPr algn="ctr"/>
+            <a:endParaRPr/>
           </a:p>
         </p:txBody>
       </p:sp>
@@ -16445,8 +16670,8 @@
         </p:nvSpPr>
         <p:spPr>
           <a:xfrm>
-            <a:off x="6299200" y="1460500"/>
-            <a:ext cx="889000" cy="825500"/>
+            <a:off x="6299199" y="1536700"/>
+            <a:ext cx="947569" cy="1054100"/>
           </a:xfrm>
           <a:prstGeom prst="rect">
             <a:avLst/>
@@ -16472,7 +16697,7 @@
           </a:fontRef>
         </p:style>
         <p:txBody>
-          <a:bodyPr rtlCol="0" anchor="ctr" wrap="square" lIns="50800" rIns="50800" tIns="50800" bIns="50800"/>
+          <a:bodyPr wrap="square" lIns="50800" tIns="50800" rIns="50800" bIns="50800" rtlCol="0" anchor="ctr"/>
           <a:lstStyle/>
           <a:p>
             <a:pPr algn="l">
@@ -16481,7 +16706,7 @@
               </a:lnSpc>
             </a:pPr>
             <a:r>
-              <a:rPr sz="2200" b="1" i="0">
+              <a:rPr sz="2000" b="1" i="0">
                 <a:solidFill>
                   <a:srgbClr val="00B7D4"/>
                 </a:solidFill>
@@ -16516,8 +16741,8 @@
         </p:nvSpPr>
         <p:spPr>
           <a:xfrm>
-            <a:off x="7264400" y="1460500"/>
-            <a:ext cx="4254500" cy="825500"/>
+            <a:off x="7264400" y="1536700"/>
+            <a:ext cx="4534796" cy="1054100"/>
           </a:xfrm>
           <a:prstGeom prst="rect">
             <a:avLst/>
@@ -16543,7 +16768,7 @@
           </a:fontRef>
         </p:style>
         <p:txBody>
-          <a:bodyPr rtlCol="0" anchor="ctr" wrap="square" lIns="0" rIns="101600" tIns="50800" bIns="50800"/>
+          <a:bodyPr wrap="square" lIns="0" tIns="50800" rIns="101600" bIns="50800" rtlCol="0" anchor="ctr"/>
           <a:lstStyle/>
           <a:p>
             <a:pPr algn="l">
@@ -16568,7 +16793,7 @@
               </a:lnSpc>
             </a:pPr>
             <a:r>
-              <a:rPr sz="1200" b="0" i="0">
+              <a:rPr sz="1400" b="0" i="0">
                 <a:solidFill>
                   <a:srgbClr val="3D4F6B"/>
                 </a:solidFill>
@@ -16587,8 +16812,8 @@
         </p:nvSpPr>
         <p:spPr>
           <a:xfrm>
-            <a:off x="609600" y="2387600"/>
-            <a:ext cx="5397500" cy="825500"/>
+            <a:off x="609600" y="2701925"/>
+            <a:ext cx="5397500" cy="1054100"/>
           </a:xfrm>
           <a:prstGeom prst="rect">
             <a:avLst/>
@@ -16618,10 +16843,11 @@
           </a:fontRef>
         </p:style>
         <p:txBody>
-          <a:bodyPr rtlCol="0" anchor="ctr" lIns="0" rIns="0" tIns="0" bIns="0"/>
+          <a:bodyPr lIns="0" tIns="0" rIns="0" bIns="0" rtlCol="0" anchor="ctr"/>
           <a:lstStyle/>
           <a:p>
             <a:pPr algn="ctr"/>
+            <a:endParaRPr/>
           </a:p>
         </p:txBody>
       </p:sp>
@@ -16633,8 +16859,8 @@
         </p:nvSpPr>
         <p:spPr>
           <a:xfrm>
-            <a:off x="609600" y="2387600"/>
-            <a:ext cx="38100" cy="825500"/>
+            <a:off x="609600" y="2701925"/>
+            <a:ext cx="38100" cy="1054100"/>
           </a:xfrm>
           <a:prstGeom prst="rect">
             <a:avLst/>
@@ -16662,10 +16888,11 @@
           </a:fontRef>
         </p:style>
         <p:txBody>
-          <a:bodyPr rtlCol="0" anchor="ctr" lIns="0" rIns="0" tIns="0" bIns="0"/>
+          <a:bodyPr lIns="0" tIns="0" rIns="0" bIns="0" rtlCol="0" anchor="ctr"/>
           <a:lstStyle/>
           <a:p>
             <a:pPr algn="ctr"/>
+            <a:endParaRPr/>
           </a:p>
         </p:txBody>
       </p:sp>
@@ -16677,8 +16904,8 @@
         </p:nvSpPr>
         <p:spPr>
           <a:xfrm>
-            <a:off x="723900" y="2387600"/>
-            <a:ext cx="889000" cy="825500"/>
+            <a:off x="723900" y="2701925"/>
+            <a:ext cx="889000" cy="1054100"/>
           </a:xfrm>
           <a:prstGeom prst="rect">
             <a:avLst/>
@@ -16704,7 +16931,7 @@
           </a:fontRef>
         </p:style>
         <p:txBody>
-          <a:bodyPr rtlCol="0" anchor="ctr" wrap="square" lIns="50800" rIns="50800" tIns="50800" bIns="50800"/>
+          <a:bodyPr wrap="square" lIns="50800" tIns="50800" rIns="50800" bIns="50800" rtlCol="0" anchor="ctr"/>
           <a:lstStyle/>
           <a:p>
             <a:pPr algn="l">
@@ -16713,7 +16940,7 @@
               </a:lnSpc>
             </a:pPr>
             <a:r>
-              <a:rPr sz="2200" b="1" i="0">
+              <a:rPr sz="2000" b="1" i="0">
                 <a:solidFill>
                   <a:srgbClr val="00B7D4"/>
                 </a:solidFill>
@@ -16748,8 +16975,8 @@
         </p:nvSpPr>
         <p:spPr>
           <a:xfrm>
-            <a:off x="1689100" y="2387600"/>
-            <a:ext cx="4254500" cy="825500"/>
+            <a:off x="1689100" y="2701925"/>
+            <a:ext cx="4254500" cy="1054100"/>
           </a:xfrm>
           <a:prstGeom prst="rect">
             <a:avLst/>
@@ -16775,7 +17002,7 @@
           </a:fontRef>
         </p:style>
         <p:txBody>
-          <a:bodyPr rtlCol="0" anchor="ctr" wrap="square" lIns="0" rIns="101600" tIns="50800" bIns="50800"/>
+          <a:bodyPr wrap="square" lIns="0" tIns="50800" rIns="101600" bIns="50800" rtlCol="0" anchor="ctr"/>
           <a:lstStyle/>
           <a:p>
             <a:pPr algn="l">
@@ -16800,7 +17027,7 @@
               </a:lnSpc>
             </a:pPr>
             <a:r>
-              <a:rPr sz="1200" b="0" i="0">
+              <a:rPr sz="1400" b="0" i="0">
                 <a:solidFill>
                   <a:srgbClr val="3D4F6B"/>
                 </a:solidFill>
@@ -16819,8 +17046,8 @@
         </p:nvSpPr>
         <p:spPr>
           <a:xfrm>
-            <a:off x="6184900" y="2387600"/>
-            <a:ext cx="5397500" cy="825500"/>
+            <a:off x="6184900" y="2701925"/>
+            <a:ext cx="5753100" cy="1054100"/>
           </a:xfrm>
           <a:prstGeom prst="rect">
             <a:avLst/>
@@ -16850,10 +17077,11 @@
           </a:fontRef>
         </p:style>
         <p:txBody>
-          <a:bodyPr rtlCol="0" anchor="ctr" lIns="0" rIns="0" tIns="0" bIns="0"/>
+          <a:bodyPr lIns="0" tIns="0" rIns="0" bIns="0" rtlCol="0" anchor="ctr"/>
           <a:lstStyle/>
           <a:p>
             <a:pPr algn="ctr"/>
+            <a:endParaRPr/>
           </a:p>
         </p:txBody>
       </p:sp>
@@ -16865,8 +17093,8 @@
         </p:nvSpPr>
         <p:spPr>
           <a:xfrm>
-            <a:off x="6184900" y="2387600"/>
-            <a:ext cx="38100" cy="825500"/>
+            <a:off x="6184899" y="2701925"/>
+            <a:ext cx="45719" cy="1054100"/>
           </a:xfrm>
           <a:prstGeom prst="rect">
             <a:avLst/>
@@ -16894,10 +17122,11 @@
           </a:fontRef>
         </p:style>
         <p:txBody>
-          <a:bodyPr rtlCol="0" anchor="ctr" lIns="0" rIns="0" tIns="0" bIns="0"/>
+          <a:bodyPr lIns="0" tIns="0" rIns="0" bIns="0" rtlCol="0" anchor="ctr"/>
           <a:lstStyle/>
           <a:p>
             <a:pPr algn="ctr"/>
+            <a:endParaRPr/>
           </a:p>
         </p:txBody>
       </p:sp>
@@ -16909,8 +17138,8 @@
         </p:nvSpPr>
         <p:spPr>
           <a:xfrm>
-            <a:off x="6299200" y="2387600"/>
-            <a:ext cx="889000" cy="825500"/>
+            <a:off x="6299199" y="2701925"/>
+            <a:ext cx="947569" cy="1054100"/>
           </a:xfrm>
           <a:prstGeom prst="rect">
             <a:avLst/>
@@ -16936,7 +17165,7 @@
           </a:fontRef>
         </p:style>
         <p:txBody>
-          <a:bodyPr rtlCol="0" anchor="ctr" wrap="square" lIns="50800" rIns="50800" tIns="50800" bIns="50800"/>
+          <a:bodyPr wrap="square" lIns="50800" tIns="50800" rIns="50800" bIns="50800" rtlCol="0" anchor="ctr"/>
           <a:lstStyle/>
           <a:p>
             <a:pPr algn="l">
@@ -16945,7 +17174,7 @@
               </a:lnSpc>
             </a:pPr>
             <a:r>
-              <a:rPr sz="2200" b="1" i="0">
+              <a:rPr sz="2000" b="1" i="0">
                 <a:solidFill>
                   <a:srgbClr val="00B7D4"/>
                 </a:solidFill>
@@ -16980,8 +17209,8 @@
         </p:nvSpPr>
         <p:spPr>
           <a:xfrm>
-            <a:off x="7264400" y="2387600"/>
-            <a:ext cx="4254500" cy="825500"/>
+            <a:off x="7264400" y="2701925"/>
+            <a:ext cx="4534796" cy="1054100"/>
           </a:xfrm>
           <a:prstGeom prst="rect">
             <a:avLst/>
@@ -17007,7 +17236,7 @@
           </a:fontRef>
         </p:style>
         <p:txBody>
-          <a:bodyPr rtlCol="0" anchor="ctr" wrap="square" lIns="0" rIns="101600" tIns="50800" bIns="50800"/>
+          <a:bodyPr wrap="square" lIns="0" tIns="50800" rIns="101600" bIns="50800" rtlCol="0" anchor="ctr"/>
           <a:lstStyle/>
           <a:p>
             <a:pPr algn="l">
@@ -17032,7 +17261,7 @@
               </a:lnSpc>
             </a:pPr>
             <a:r>
-              <a:rPr sz="1200" b="0" i="0">
+              <a:rPr sz="1400" b="0" i="0">
                 <a:solidFill>
                   <a:srgbClr val="3D4F6B"/>
                 </a:solidFill>
@@ -17051,8 +17280,8 @@
         </p:nvSpPr>
         <p:spPr>
           <a:xfrm>
-            <a:off x="609600" y="3314700"/>
-            <a:ext cx="5397500" cy="825500"/>
+            <a:off x="609600" y="3886200"/>
+            <a:ext cx="5397500" cy="1054100"/>
           </a:xfrm>
           <a:prstGeom prst="rect">
             <a:avLst/>
@@ -17082,10 +17311,11 @@
           </a:fontRef>
         </p:style>
         <p:txBody>
-          <a:bodyPr rtlCol="0" anchor="ctr" lIns="0" rIns="0" tIns="0" bIns="0"/>
+          <a:bodyPr lIns="0" tIns="0" rIns="0" bIns="0" rtlCol="0" anchor="ctr"/>
           <a:lstStyle/>
           <a:p>
             <a:pPr algn="ctr"/>
+            <a:endParaRPr/>
           </a:p>
         </p:txBody>
       </p:sp>
@@ -17097,8 +17327,8 @@
         </p:nvSpPr>
         <p:spPr>
           <a:xfrm>
-            <a:off x="609600" y="3314700"/>
-            <a:ext cx="38100" cy="825500"/>
+            <a:off x="609600" y="3886200"/>
+            <a:ext cx="38100" cy="1054100"/>
           </a:xfrm>
           <a:prstGeom prst="rect">
             <a:avLst/>
@@ -17126,10 +17356,11 @@
           </a:fontRef>
         </p:style>
         <p:txBody>
-          <a:bodyPr rtlCol="0" anchor="ctr" lIns="0" rIns="0" tIns="0" bIns="0"/>
+          <a:bodyPr lIns="0" tIns="0" rIns="0" bIns="0" rtlCol="0" anchor="ctr"/>
           <a:lstStyle/>
           <a:p>
             <a:pPr algn="ctr"/>
+            <a:endParaRPr/>
           </a:p>
         </p:txBody>
       </p:sp>
@@ -17141,8 +17372,8 @@
         </p:nvSpPr>
         <p:spPr>
           <a:xfrm>
-            <a:off x="723900" y="3314700"/>
-            <a:ext cx="889000" cy="825500"/>
+            <a:off x="723900" y="3886200"/>
+            <a:ext cx="889000" cy="1054100"/>
           </a:xfrm>
           <a:prstGeom prst="rect">
             <a:avLst/>
@@ -17168,7 +17399,7 @@
           </a:fontRef>
         </p:style>
         <p:txBody>
-          <a:bodyPr rtlCol="0" anchor="ctr" wrap="square" lIns="50800" rIns="50800" tIns="50800" bIns="50800"/>
+          <a:bodyPr wrap="square" lIns="50800" tIns="50800" rIns="50800" bIns="50800" rtlCol="0" anchor="ctr"/>
           <a:lstStyle/>
           <a:p>
             <a:pPr algn="l">
@@ -17177,7 +17408,7 @@
               </a:lnSpc>
             </a:pPr>
             <a:r>
-              <a:rPr sz="2200" b="1" i="0">
+              <a:rPr sz="2000" b="1" i="0">
                 <a:solidFill>
                   <a:srgbClr val="00B7D4"/>
                 </a:solidFill>
@@ -17212,8 +17443,8 @@
         </p:nvSpPr>
         <p:spPr>
           <a:xfrm>
-            <a:off x="1689100" y="3314700"/>
-            <a:ext cx="4254500" cy="825500"/>
+            <a:off x="1689100" y="3886200"/>
+            <a:ext cx="4254500" cy="1054100"/>
           </a:xfrm>
           <a:prstGeom prst="rect">
             <a:avLst/>
@@ -17239,7 +17470,7 @@
           </a:fontRef>
         </p:style>
         <p:txBody>
-          <a:bodyPr rtlCol="0" anchor="ctr" wrap="square" lIns="0" rIns="101600" tIns="50800" bIns="50800"/>
+          <a:bodyPr wrap="square" lIns="0" tIns="50800" rIns="101600" bIns="50800" rtlCol="0" anchor="ctr"/>
           <a:lstStyle/>
           <a:p>
             <a:pPr algn="l">
@@ -17264,7 +17495,7 @@
               </a:lnSpc>
             </a:pPr>
             <a:r>
-              <a:rPr sz="1200" b="0" i="0">
+              <a:rPr sz="1400" b="0" i="0">
                 <a:solidFill>
                   <a:srgbClr val="3D4F6B"/>
                 </a:solidFill>
@@ -17283,8 +17514,8 @@
         </p:nvSpPr>
         <p:spPr>
           <a:xfrm>
-            <a:off x="6184900" y="3314700"/>
-            <a:ext cx="5397500" cy="825500"/>
+            <a:off x="6184900" y="3886200"/>
+            <a:ext cx="5753100" cy="1054100"/>
           </a:xfrm>
           <a:prstGeom prst="rect">
             <a:avLst/>
@@ -17314,10 +17545,11 @@
           </a:fontRef>
         </p:style>
         <p:txBody>
-          <a:bodyPr rtlCol="0" anchor="ctr" lIns="0" rIns="0" tIns="0" bIns="0"/>
+          <a:bodyPr lIns="0" tIns="0" rIns="0" bIns="0" rtlCol="0" anchor="ctr"/>
           <a:lstStyle/>
           <a:p>
             <a:pPr algn="ctr"/>
+            <a:endParaRPr/>
           </a:p>
         </p:txBody>
       </p:sp>
@@ -17329,8 +17561,8 @@
         </p:nvSpPr>
         <p:spPr>
           <a:xfrm>
-            <a:off x="6184900" y="3314700"/>
-            <a:ext cx="38100" cy="825500"/>
+            <a:off x="6184899" y="3886200"/>
+            <a:ext cx="45719" cy="1054100"/>
           </a:xfrm>
           <a:prstGeom prst="rect">
             <a:avLst/>
@@ -17358,10 +17590,11 @@
           </a:fontRef>
         </p:style>
         <p:txBody>
-          <a:bodyPr rtlCol="0" anchor="ctr" lIns="0" rIns="0" tIns="0" bIns="0"/>
+          <a:bodyPr lIns="0" tIns="0" rIns="0" bIns="0" rtlCol="0" anchor="ctr"/>
           <a:lstStyle/>
           <a:p>
             <a:pPr algn="ctr"/>
+            <a:endParaRPr/>
           </a:p>
         </p:txBody>
       </p:sp>
@@ -17373,8 +17606,8 @@
         </p:nvSpPr>
         <p:spPr>
           <a:xfrm>
-            <a:off x="6299200" y="3314700"/>
-            <a:ext cx="889000" cy="825500"/>
+            <a:off x="6299199" y="3886200"/>
+            <a:ext cx="947569" cy="1054100"/>
           </a:xfrm>
           <a:prstGeom prst="rect">
             <a:avLst/>
@@ -17400,7 +17633,7 @@
           </a:fontRef>
         </p:style>
         <p:txBody>
-          <a:bodyPr rtlCol="0" anchor="ctr" wrap="square" lIns="50800" rIns="50800" tIns="50800" bIns="50800"/>
+          <a:bodyPr wrap="square" lIns="50800" tIns="50800" rIns="50800" bIns="50800" rtlCol="0" anchor="ctr"/>
           <a:lstStyle/>
           <a:p>
             <a:pPr algn="l">
@@ -17409,7 +17642,7 @@
               </a:lnSpc>
             </a:pPr>
             <a:r>
-              <a:rPr sz="2200" b="1" i="0">
+              <a:rPr sz="2000" b="1" i="0">
                 <a:solidFill>
                   <a:srgbClr val="00B7D4"/>
                 </a:solidFill>
@@ -17444,8 +17677,8 @@
         </p:nvSpPr>
         <p:spPr>
           <a:xfrm>
-            <a:off x="7264400" y="3314700"/>
-            <a:ext cx="4254500" cy="825500"/>
+            <a:off x="7264400" y="3886200"/>
+            <a:ext cx="4534796" cy="1054100"/>
           </a:xfrm>
           <a:prstGeom prst="rect">
             <a:avLst/>
@@ -17471,7 +17704,7 @@
           </a:fontRef>
         </p:style>
         <p:txBody>
-          <a:bodyPr rtlCol="0" anchor="ctr" wrap="square" lIns="0" rIns="101600" tIns="50800" bIns="50800"/>
+          <a:bodyPr wrap="square" lIns="0" tIns="50800" rIns="101600" bIns="50800" rtlCol="0" anchor="ctr"/>
           <a:lstStyle/>
           <a:p>
             <a:pPr algn="l">
@@ -17496,7 +17729,7 @@
               </a:lnSpc>
             </a:pPr>
             <a:r>
-              <a:rPr sz="1200" b="0" i="0">
+              <a:rPr sz="1400" b="0" i="0">
                 <a:solidFill>
                   <a:srgbClr val="3D4F6B"/>
                 </a:solidFill>
@@ -17515,8 +17748,8 @@
         </p:nvSpPr>
         <p:spPr>
           <a:xfrm>
-            <a:off x="609600" y="4241800"/>
-            <a:ext cx="5397500" cy="825500"/>
+            <a:off x="609600" y="5108575"/>
+            <a:ext cx="5397500" cy="1054100"/>
           </a:xfrm>
           <a:prstGeom prst="rect">
             <a:avLst/>
@@ -17546,10 +17779,11 @@
           </a:fontRef>
         </p:style>
         <p:txBody>
-          <a:bodyPr rtlCol="0" anchor="ctr" lIns="0" rIns="0" tIns="0" bIns="0"/>
+          <a:bodyPr lIns="0" tIns="0" rIns="0" bIns="0" rtlCol="0" anchor="ctr"/>
           <a:lstStyle/>
           <a:p>
             <a:pPr algn="ctr"/>
+            <a:endParaRPr/>
           </a:p>
         </p:txBody>
       </p:sp>
@@ -17561,8 +17795,8 @@
         </p:nvSpPr>
         <p:spPr>
           <a:xfrm>
-            <a:off x="609600" y="4241800"/>
-            <a:ext cx="38100" cy="825500"/>
+            <a:off x="609600" y="5108575"/>
+            <a:ext cx="38100" cy="1054100"/>
           </a:xfrm>
           <a:prstGeom prst="rect">
             <a:avLst/>
@@ -17590,10 +17824,11 @@
           </a:fontRef>
         </p:style>
         <p:txBody>
-          <a:bodyPr rtlCol="0" anchor="ctr" lIns="0" rIns="0" tIns="0" bIns="0"/>
+          <a:bodyPr lIns="0" tIns="0" rIns="0" bIns="0" rtlCol="0" anchor="ctr"/>
           <a:lstStyle/>
           <a:p>
             <a:pPr algn="ctr"/>
+            <a:endParaRPr/>
           </a:p>
         </p:txBody>
       </p:sp>
@@ -17605,8 +17840,8 @@
         </p:nvSpPr>
         <p:spPr>
           <a:xfrm>
-            <a:off x="723900" y="4241800"/>
-            <a:ext cx="889000" cy="825500"/>
+            <a:off x="723900" y="5108575"/>
+            <a:ext cx="889000" cy="1054100"/>
           </a:xfrm>
           <a:prstGeom prst="rect">
             <a:avLst/>
@@ -17632,7 +17867,7 @@
           </a:fontRef>
         </p:style>
         <p:txBody>
-          <a:bodyPr rtlCol="0" anchor="ctr" wrap="square" lIns="50800" rIns="50800" tIns="50800" bIns="50800"/>
+          <a:bodyPr wrap="square" lIns="50800" tIns="50800" rIns="50800" bIns="50800" rtlCol="0" anchor="ctr"/>
           <a:lstStyle/>
           <a:p>
             <a:pPr algn="l">
@@ -17641,7 +17876,7 @@
               </a:lnSpc>
             </a:pPr>
             <a:r>
-              <a:rPr sz="2200" b="1" i="0">
+              <a:rPr sz="2000" b="1" i="0">
                 <a:solidFill>
                   <a:srgbClr val="00B7D4"/>
                 </a:solidFill>
@@ -17676,8 +17911,8 @@
         </p:nvSpPr>
         <p:spPr>
           <a:xfrm>
-            <a:off x="1689100" y="4241800"/>
-            <a:ext cx="4254500" cy="825500"/>
+            <a:off x="1689100" y="5108575"/>
+            <a:ext cx="4254500" cy="1054100"/>
           </a:xfrm>
           <a:prstGeom prst="rect">
             <a:avLst/>
@@ -17703,7 +17938,7 @@
           </a:fontRef>
         </p:style>
         <p:txBody>
-          <a:bodyPr rtlCol="0" anchor="ctr" wrap="square" lIns="0" rIns="101600" tIns="50800" bIns="50800"/>
+          <a:bodyPr wrap="square" lIns="0" tIns="50800" rIns="101600" bIns="50800" rtlCol="0" anchor="ctr"/>
           <a:lstStyle/>
           <a:p>
             <a:pPr algn="l">
@@ -17728,7 +17963,7 @@
               </a:lnSpc>
             </a:pPr>
             <a:r>
-              <a:rPr sz="1200" b="0" i="0">
+              <a:rPr sz="1400" b="0" i="0">
                 <a:solidFill>
                   <a:srgbClr val="3D4F6B"/>
                 </a:solidFill>
@@ -17747,8 +17982,8 @@
         </p:nvSpPr>
         <p:spPr>
           <a:xfrm>
-            <a:off x="6184900" y="4241800"/>
-            <a:ext cx="5397500" cy="825500"/>
+            <a:off x="6184900" y="5108575"/>
+            <a:ext cx="5753100" cy="1054100"/>
           </a:xfrm>
           <a:prstGeom prst="rect">
             <a:avLst/>
@@ -17778,10 +18013,11 @@
           </a:fontRef>
         </p:style>
         <p:txBody>
-          <a:bodyPr rtlCol="0" anchor="ctr" lIns="0" rIns="0" tIns="0" bIns="0"/>
+          <a:bodyPr lIns="0" tIns="0" rIns="0" bIns="0" rtlCol="0" anchor="ctr"/>
           <a:lstStyle/>
           <a:p>
             <a:pPr algn="ctr"/>
+            <a:endParaRPr/>
           </a:p>
         </p:txBody>
       </p:sp>
@@ -17793,8 +18029,8 @@
         </p:nvSpPr>
         <p:spPr>
           <a:xfrm>
-            <a:off x="6184900" y="4241800"/>
-            <a:ext cx="38100" cy="825500"/>
+            <a:off x="6184899" y="5108575"/>
+            <a:ext cx="45719" cy="1054100"/>
           </a:xfrm>
           <a:prstGeom prst="rect">
             <a:avLst/>
@@ -17822,10 +18058,11 @@
           </a:fontRef>
         </p:style>
         <p:txBody>
-          <a:bodyPr rtlCol="0" anchor="ctr" lIns="0" rIns="0" tIns="0" bIns="0"/>
+          <a:bodyPr lIns="0" tIns="0" rIns="0" bIns="0" rtlCol="0" anchor="ctr"/>
           <a:lstStyle/>
           <a:p>
             <a:pPr algn="ctr"/>
+            <a:endParaRPr/>
           </a:p>
         </p:txBody>
       </p:sp>
@@ -17837,8 +18074,8 @@
         </p:nvSpPr>
         <p:spPr>
           <a:xfrm>
-            <a:off x="6299200" y="4241800"/>
-            <a:ext cx="889000" cy="825500"/>
+            <a:off x="6299199" y="5108575"/>
+            <a:ext cx="947569" cy="1054100"/>
           </a:xfrm>
           <a:prstGeom prst="rect">
             <a:avLst/>
@@ -17864,7 +18101,7 @@
           </a:fontRef>
         </p:style>
         <p:txBody>
-          <a:bodyPr rtlCol="0" anchor="ctr" wrap="square" lIns="50800" rIns="50800" tIns="50800" bIns="50800"/>
+          <a:bodyPr wrap="square" lIns="50800" tIns="50800" rIns="50800" bIns="50800" rtlCol="0" anchor="ctr"/>
           <a:lstStyle/>
           <a:p>
             <a:pPr algn="l">
@@ -17873,7 +18110,7 @@
               </a:lnSpc>
             </a:pPr>
             <a:r>
-              <a:rPr sz="2200" b="1" i="0">
+              <a:rPr sz="2000" b="1" i="0">
                 <a:solidFill>
                   <a:srgbClr val="00B7D4"/>
                 </a:solidFill>
@@ -17888,15 +18125,12 @@
                 <a:spcPct val="120000"/>
               </a:lnSpc>
             </a:pPr>
-            <a:r>
-              <a:rPr sz="1100" b="0" i="0">
-                <a:solidFill>
-                  <a:srgbClr val="3D4F6B"/>
-                </a:solidFill>
-                <a:latin typeface="Yu Gothic UI"/>
-              </a:rPr>
-              <a:t/>
-            </a:r>
+            <a:endParaRPr sz="2000" b="1" i="0">
+              <a:solidFill>
+                <a:srgbClr val="00B7D4"/>
+              </a:solidFill>
+              <a:latin typeface="Yu Gothic UI"/>
+            </a:endParaRPr>
           </a:p>
         </p:txBody>
       </p:sp>
@@ -17908,8 +18142,8 @@
         </p:nvSpPr>
         <p:spPr>
           <a:xfrm>
-            <a:off x="7264400" y="4241800"/>
-            <a:ext cx="4254500" cy="825500"/>
+            <a:off x="7264400" y="5108575"/>
+            <a:ext cx="4534796" cy="1054100"/>
           </a:xfrm>
           <a:prstGeom prst="rect">
             <a:avLst/>
@@ -17935,7 +18169,7 @@
           </a:fontRef>
         </p:style>
         <p:txBody>
-          <a:bodyPr rtlCol="0" anchor="ctr" wrap="square" lIns="0" rIns="101600" tIns="50800" bIns="50800"/>
+          <a:bodyPr wrap="square" lIns="0" tIns="50800" rIns="101600" bIns="50800" rtlCol="0" anchor="ctr"/>
           <a:lstStyle/>
           <a:p>
             <a:pPr algn="l">
@@ -17950,11 +18184,29 @@
                 </a:solidFill>
                 <a:latin typeface="Yu Gothic UI"/>
               </a:rPr>
-              <a:t>そのほか、企業内研修・私的勉強会など登壇実績</a:t>
+              <a:t>その</a:t>
+            </a:r>
+            <a:r>
+              <a:rPr lang="ja-JP" altLang="en-US" sz="1600" b="1" i="0">
+                <a:solidFill>
+                  <a:srgbClr val="0B1F3A"/>
+                </a:solidFill>
+                <a:latin typeface="Yu Gothic UI"/>
+              </a:rPr>
+              <a:t>他</a:t>
             </a:r>
             <a:r>
               <a:rPr sz="1600" b="1" i="0">
                 <a:solidFill>
+                  <a:srgbClr val="0B1F3A"/>
+                </a:solidFill>
+                <a:latin typeface="Yu Gothic UI"/>
+              </a:rPr>
+              <a:t>、登壇実績</a:t>
+            </a:r>
+            <a:r>
+              <a:rPr sz="1600" b="1" i="0">
+                <a:solidFill>
                   <a:srgbClr val="00B7D4"/>
                 </a:solidFill>
                 <a:latin typeface="Yu Gothic UI"/>
@@ -17969,7 +18221,7 @@
               </a:lnSpc>
             </a:pPr>
             <a:r>
-              <a:rPr sz="1200" b="0" i="0">
+              <a:rPr sz="1400" b="0" i="0">
                 <a:solidFill>
                   <a:srgbClr val="3D4F6B"/>
                 </a:solidFill>
@@ -17989,7 +18241,7 @@
 </file>
 
 <file path=ppt/slides/slide8.xml><?xml version="1.0" encoding="utf-8"?>
-<p:sld xmlns:a="http://schemas.openxmlformats.org/drawingml/2006/main" xmlns:p="http://schemas.openxmlformats.org/presentationml/2006/main" xmlns:r="http://schemas.openxmlformats.org/officeDocument/2006/relationships">
+<p:sld xmlns:a="http://schemas.openxmlformats.org/drawingml/2006/main" xmlns:r="http://schemas.openxmlformats.org/officeDocument/2006/relationships" xmlns:p="http://schemas.openxmlformats.org/presentationml/2006/main">
   <p:cSld>
     <p:spTree>
       <p:nvGrpSpPr>
@@ -17997,7 +18249,14 @@
         <p:cNvGrpSpPr/>
         <p:nvPr/>
       </p:nvGrpSpPr>
-      <p:grpSpPr/>
+      <p:grpSpPr>
+        <a:xfrm>
+          <a:off x="0" y="0"/>
+          <a:ext cx="0" cy="0"/>
+          <a:chOff x="0" y="0"/>
+          <a:chExt cx="0" cy="0"/>
+        </a:xfrm>
+      </p:grpSpPr>
       <p:sp>
         <p:nvSpPr>
           <p:cNvPr id="2" name="Rectangle 1"/>
@@ -18035,10 +18294,11 @@
           </a:fontRef>
         </p:style>
         <p:txBody>
-          <a:bodyPr rtlCol="0" anchor="ctr" lIns="0" rIns="0" tIns="0" bIns="0"/>
+          <a:bodyPr lIns="0" tIns="0" rIns="0" bIns="0" rtlCol="0" anchor="ctr"/>
           <a:lstStyle/>
           <a:p>
             <a:pPr algn="ctr"/>
+            <a:endParaRPr/>
           </a:p>
         </p:txBody>
       </p:sp>
@@ -18077,7 +18337,7 @@
           </a:fontRef>
         </p:style>
         <p:txBody>
-          <a:bodyPr rtlCol="0" anchor="ctr" wrap="square" lIns="50800" rIns="50800" tIns="50800" bIns="50800"/>
+          <a:bodyPr wrap="square" lIns="50800" tIns="50800" rIns="50800" bIns="50800" rtlCol="0" anchor="ctr"/>
           <a:lstStyle/>
           <a:p>
             <a:pPr algn="l">
@@ -18114,7 +18374,7 @@
         </p:nvSpPr>
         <p:spPr>
           <a:xfrm>
-            <a:off x="10795000" y="6502400"/>
+            <a:off x="10928350" y="6502400"/>
             <a:ext cx="1143000" cy="228600"/>
           </a:xfrm>
           <a:prstGeom prst="rect">
@@ -18141,7 +18401,7 @@
           </a:fontRef>
         </p:style>
         <p:txBody>
-          <a:bodyPr rtlCol="0" anchor="ctr" wrap="square" lIns="50800" rIns="50800" tIns="50800" bIns="50800"/>
+          <a:bodyPr wrap="square" lIns="50800" tIns="50800" rIns="50800" bIns="50800" rtlCol="0" anchor="ctr"/>
           <a:lstStyle/>
           <a:p>
             <a:pPr algn="r">
@@ -18202,6 +18462,7 @@
           <a:lstStyle/>
           <a:p>
             <a:pPr algn="ctr"/>
+            <a:endParaRPr/>
           </a:p>
         </p:txBody>
       </p:sp>
@@ -18240,7 +18501,7 @@
           </a:fontRef>
         </p:style>
         <p:txBody>
-          <a:bodyPr rtlCol="0" anchor="ctr" wrap="square" lIns="50800" rIns="50800" tIns="50800" bIns="50800"/>
+          <a:bodyPr wrap="square" lIns="50800" tIns="50800" rIns="50800" bIns="50800" rtlCol="0" anchor="ctr"/>
           <a:lstStyle/>
           <a:p>
             <a:pPr algn="l">
@@ -18295,7 +18556,7 @@
           </a:fontRef>
         </p:style>
         <p:txBody>
-          <a:bodyPr rtlCol="0" anchor="t" wrap="square" lIns="50800" rIns="50800" tIns="50800" bIns="50800"/>
+          <a:bodyPr wrap="square" lIns="50800" tIns="50800" rIns="50800" bIns="50800" rtlCol="0" anchor="t"/>
           <a:lstStyle/>
           <a:p>
             <a:pPr algn="l">
@@ -18341,8 +18602,8 @@
         </p:nvSpPr>
         <p:spPr>
           <a:xfrm>
-            <a:off x="609600" y="1524000"/>
-            <a:ext cx="6985000" cy="2286000"/>
+            <a:off x="514350" y="1524000"/>
+            <a:ext cx="7181850" cy="2286000"/>
           </a:xfrm>
           <a:prstGeom prst="rect">
             <a:avLst/>
@@ -18370,10 +18631,11 @@
           </a:fontRef>
         </p:style>
         <p:txBody>
-          <a:bodyPr rtlCol="0" anchor="ctr" lIns="0" rIns="0" tIns="0" bIns="0"/>
+          <a:bodyPr lIns="0" tIns="0" rIns="0" bIns="0" rtlCol="0" anchor="ctr"/>
           <a:lstStyle/>
           <a:p>
             <a:pPr algn="ctr"/>
+            <a:endParaRPr/>
           </a:p>
         </p:txBody>
       </p:sp>
@@ -18385,8 +18647,8 @@
         </p:nvSpPr>
         <p:spPr>
           <a:xfrm>
-            <a:off x="609600" y="1524000"/>
-            <a:ext cx="50800" cy="2286000"/>
+            <a:off x="514350" y="1524000"/>
+            <a:ext cx="50992" cy="2286000"/>
           </a:xfrm>
           <a:prstGeom prst="rect">
             <a:avLst/>
@@ -18414,10 +18676,11 @@
           </a:fontRef>
         </p:style>
         <p:txBody>
-          <a:bodyPr rtlCol="0" anchor="ctr" lIns="0" rIns="0" tIns="0" bIns="0"/>
+          <a:bodyPr lIns="0" tIns="0" rIns="0" bIns="0" rtlCol="0" anchor="ctr"/>
           <a:lstStyle/>
           <a:p>
             <a:pPr algn="ctr"/>
+            <a:endParaRPr/>
           </a:p>
         </p:txBody>
       </p:sp>
@@ -18429,8 +18692,8 @@
         </p:nvSpPr>
         <p:spPr>
           <a:xfrm>
-            <a:off x="863600" y="1701800"/>
-            <a:ext cx="762000" cy="228600"/>
+            <a:off x="768349" y="1701800"/>
+            <a:ext cx="764875" cy="228600"/>
           </a:xfrm>
           <a:prstGeom prst="rect">
             <a:avLst/>
@@ -18458,10 +18721,11 @@
           </a:fontRef>
         </p:style>
         <p:txBody>
-          <a:bodyPr rtlCol="0" anchor="ctr" lIns="0" rIns="0" tIns="0" bIns="0"/>
+          <a:bodyPr lIns="0" tIns="0" rIns="0" bIns="0" rtlCol="0" anchor="ctr"/>
           <a:lstStyle/>
           <a:p>
             <a:pPr algn="ctr"/>
+            <a:endParaRPr/>
           </a:p>
         </p:txBody>
       </p:sp>
@@ -18473,8 +18737,8 @@
         </p:nvSpPr>
         <p:spPr>
           <a:xfrm>
-            <a:off x="863600" y="1701800"/>
-            <a:ext cx="762000" cy="228600"/>
+            <a:off x="768349" y="1701800"/>
+            <a:ext cx="764875" cy="228600"/>
           </a:xfrm>
           <a:prstGeom prst="rect">
             <a:avLst/>
@@ -18500,7 +18764,7 @@
           </a:fontRef>
         </p:style>
         <p:txBody>
-          <a:bodyPr rtlCol="0" anchor="ctr" wrap="square" lIns="50800" rIns="50800" tIns="50800" bIns="50800"/>
+          <a:bodyPr wrap="square" lIns="50800" tIns="50800" rIns="50800" bIns="50800" rtlCol="0" anchor="ctr"/>
           <a:lstStyle/>
           <a:p>
             <a:pPr algn="ctr">
@@ -18528,8 +18792,8 @@
         </p:nvSpPr>
         <p:spPr>
           <a:xfrm>
-            <a:off x="863600" y="1993900"/>
-            <a:ext cx="6477000" cy="381000"/>
+            <a:off x="768350" y="1946275"/>
+            <a:ext cx="6501442" cy="381000"/>
           </a:xfrm>
           <a:prstGeom prst="rect">
             <a:avLst/>
@@ -18555,7 +18819,7 @@
           </a:fontRef>
         </p:style>
         <p:txBody>
-          <a:bodyPr rtlCol="0" anchor="t" wrap="square" lIns="50800" rIns="50800" tIns="50800" bIns="50800"/>
+          <a:bodyPr wrap="square" lIns="50800" tIns="50800" rIns="50800" bIns="50800" rtlCol="0" anchor="t"/>
           <a:lstStyle/>
           <a:p>
             <a:pPr algn="l">
@@ -18583,8 +18847,8 @@
         </p:nvSpPr>
         <p:spPr>
           <a:xfrm>
-            <a:off x="863600" y="2413000"/>
-            <a:ext cx="6477000" cy="1270000"/>
+            <a:off x="768350" y="2413000"/>
+            <a:ext cx="6756400" cy="1270000"/>
           </a:xfrm>
           <a:prstGeom prst="rect">
             <a:avLst/>
@@ -18610,7 +18874,7 @@
           </a:fontRef>
         </p:style>
         <p:txBody>
-          <a:bodyPr rtlCol="0" anchor="t" wrap="square" lIns="0" rIns="0" tIns="0" bIns="0"/>
+          <a:bodyPr wrap="square" lIns="0" tIns="0" rIns="0" bIns="0" rtlCol="0" anchor="t"/>
           <a:lstStyle/>
           <a:p>
             <a:pPr algn="l">
@@ -18628,7 +18892,7 @@
               <a:t>▸  </a:t>
             </a:r>
             <a:r>
-              <a:rPr sz="1500" b="0" i="0">
+              <a:rPr sz="1400" b="0" i="0">
                 <a:solidFill>
                   <a:srgbClr val="0B1F3A"/>
                 </a:solidFill>
@@ -18637,7 +18901,7 @@
               <a:t>担当責任者と</a:t>
             </a:r>
             <a:r>
-              <a:rPr sz="1500" b="1" i="0">
+              <a:rPr sz="1400" b="1" i="0">
                 <a:solidFill>
                   <a:srgbClr val="00B7D4"/>
                 </a:solidFill>
@@ -18646,7 +18910,7 @@
               <a:t>1対1で打ち合わせ</a:t>
             </a:r>
             <a:r>
-              <a:rPr sz="1500" b="0" i="0">
+              <a:rPr sz="1400" b="0" i="0">
                 <a:solidFill>
                   <a:srgbClr val="0B1F3A"/>
                 </a:solidFill>
@@ -18671,7 +18935,7 @@
               <a:t>▸  </a:t>
             </a:r>
             <a:r>
-              <a:rPr sz="1500" b="0" i="0">
+              <a:rPr sz="1400" b="0" i="0">
                 <a:solidFill>
                   <a:srgbClr val="0B1F3A"/>
                 </a:solidFill>
@@ -18680,7 +18944,7 @@
               <a:t>導入済みツール／未導入ツールを</a:t>
             </a:r>
             <a:r>
-              <a:rPr sz="1500" b="1" i="0">
+              <a:rPr sz="1400" b="1" i="0">
                 <a:solidFill>
                   <a:srgbClr val="00B7D4"/>
                 </a:solidFill>
@@ -18689,7 +18953,7 @@
               <a:t>棚卸し</a:t>
             </a:r>
             <a:r>
-              <a:rPr sz="1500" b="0" i="0">
+              <a:rPr sz="1400" b="0" i="0">
                 <a:solidFill>
                   <a:srgbClr val="0B1F3A"/>
                 </a:solidFill>
@@ -18714,7 +18978,7 @@
               <a:t>▸  </a:t>
             </a:r>
             <a:r>
-              <a:rPr sz="1500" b="0" i="0">
+              <a:rPr sz="1400" b="0" i="0">
                 <a:solidFill>
                   <a:srgbClr val="0B1F3A"/>
                 </a:solidFill>
@@ -18723,7 +18987,7 @@
               <a:t>現場担当者がどのツールを、どの業務で、どう使っているかを</a:t>
             </a:r>
             <a:r>
-              <a:rPr sz="1500" b="1" i="0">
+              <a:rPr sz="1400" b="1" i="0">
                 <a:solidFill>
                   <a:srgbClr val="00B7D4"/>
                 </a:solidFill>
@@ -18732,7 +18996,7 @@
               <a:t>実態ベース</a:t>
             </a:r>
             <a:r>
-              <a:rPr sz="1500" b="0" i="0">
+              <a:rPr sz="1400" b="0" i="0">
                 <a:solidFill>
                   <a:srgbClr val="0B1F3A"/>
                 </a:solidFill>
@@ -18751,8 +19015,8 @@
         </p:nvSpPr>
         <p:spPr>
           <a:xfrm>
-            <a:off x="609600" y="3962400"/>
-            <a:ext cx="6985000" cy="2286000"/>
+            <a:off x="514350" y="3962400"/>
+            <a:ext cx="7181850" cy="2286000"/>
           </a:xfrm>
           <a:prstGeom prst="rect">
             <a:avLst/>
@@ -18780,10 +19044,11 @@
           </a:fontRef>
         </p:style>
         <p:txBody>
-          <a:bodyPr rtlCol="0" anchor="ctr" lIns="0" rIns="0" tIns="0" bIns="0"/>
+          <a:bodyPr lIns="0" tIns="0" rIns="0" bIns="0" rtlCol="0" anchor="ctr"/>
           <a:lstStyle/>
           <a:p>
             <a:pPr algn="ctr"/>
+            <a:endParaRPr/>
           </a:p>
         </p:txBody>
       </p:sp>
@@ -18795,8 +19060,8 @@
         </p:nvSpPr>
         <p:spPr>
           <a:xfrm>
-            <a:off x="609600" y="3962400"/>
-            <a:ext cx="50800" cy="2286000"/>
+            <a:off x="514350" y="3962400"/>
+            <a:ext cx="50992" cy="2286000"/>
           </a:xfrm>
           <a:prstGeom prst="rect">
             <a:avLst/>
@@ -18824,10 +19089,11 @@
           </a:fontRef>
         </p:style>
         <p:txBody>
-          <a:bodyPr rtlCol="0" anchor="ctr" lIns="0" rIns="0" tIns="0" bIns="0"/>
+          <a:bodyPr lIns="0" tIns="0" rIns="0" bIns="0" rtlCol="0" anchor="ctr"/>
           <a:lstStyle/>
           <a:p>
             <a:pPr algn="ctr"/>
+            <a:endParaRPr/>
           </a:p>
         </p:txBody>
       </p:sp>
@@ -18839,8 +19105,8 @@
         </p:nvSpPr>
         <p:spPr>
           <a:xfrm>
-            <a:off x="863600" y="4140200"/>
-            <a:ext cx="762000" cy="228600"/>
+            <a:off x="768349" y="4140200"/>
+            <a:ext cx="764875" cy="228600"/>
           </a:xfrm>
           <a:prstGeom prst="rect">
             <a:avLst/>
@@ -18868,10 +19134,11 @@
           </a:fontRef>
         </p:style>
         <p:txBody>
-          <a:bodyPr rtlCol="0" anchor="ctr" lIns="0" rIns="0" tIns="0" bIns="0"/>
+          <a:bodyPr lIns="0" tIns="0" rIns="0" bIns="0" rtlCol="0" anchor="ctr"/>
           <a:lstStyle/>
           <a:p>
             <a:pPr algn="ctr"/>
+            <a:endParaRPr/>
           </a:p>
         </p:txBody>
       </p:sp>
@@ -18883,8 +19150,8 @@
         </p:nvSpPr>
         <p:spPr>
           <a:xfrm>
-            <a:off x="863600" y="4140200"/>
-            <a:ext cx="762000" cy="228600"/>
+            <a:off x="768349" y="4140200"/>
+            <a:ext cx="764875" cy="228600"/>
           </a:xfrm>
           <a:prstGeom prst="rect">
             <a:avLst/>
@@ -18910,7 +19177,7 @@
           </a:fontRef>
         </p:style>
         <p:txBody>
-          <a:bodyPr rtlCol="0" anchor="ctr" wrap="square" lIns="50800" rIns="50800" tIns="50800" bIns="50800"/>
+          <a:bodyPr wrap="square" lIns="50800" tIns="50800" rIns="50800" bIns="50800" rtlCol="0" anchor="ctr"/>
           <a:lstStyle/>
           <a:p>
             <a:pPr algn="ctr">
@@ -18938,8 +19205,8 @@
         </p:nvSpPr>
         <p:spPr>
           <a:xfrm>
-            <a:off x="863600" y="4432300"/>
-            <a:ext cx="6477000" cy="381000"/>
+            <a:off x="768350" y="4384675"/>
+            <a:ext cx="6501442" cy="381000"/>
           </a:xfrm>
           <a:prstGeom prst="rect">
             <a:avLst/>
@@ -18965,7 +19232,7 @@
           </a:fontRef>
         </p:style>
         <p:txBody>
-          <a:bodyPr rtlCol="0" anchor="t" wrap="square" lIns="50800" rIns="50800" tIns="50800" bIns="50800"/>
+          <a:bodyPr wrap="square" lIns="50800" tIns="50800" rIns="50800" bIns="50800" rtlCol="0" anchor="t"/>
           <a:lstStyle/>
           <a:p>
             <a:pPr algn="l">
@@ -18993,8 +19260,8 @@
         </p:nvSpPr>
         <p:spPr>
           <a:xfrm>
-            <a:off x="863600" y="4851400"/>
-            <a:ext cx="6477000" cy="1270000"/>
+            <a:off x="768350" y="4851400"/>
+            <a:ext cx="6501442" cy="1270000"/>
           </a:xfrm>
           <a:prstGeom prst="rect">
             <a:avLst/>
@@ -19020,7 +19287,7 @@
           </a:fontRef>
         </p:style>
         <p:txBody>
-          <a:bodyPr rtlCol="0" anchor="t" wrap="square" lIns="0" rIns="0" tIns="0" bIns="0"/>
+          <a:bodyPr wrap="square" lIns="0" tIns="0" rIns="0" bIns="0" rtlCol="0" anchor="t"/>
           <a:lstStyle/>
           <a:p>
             <a:pPr algn="l">
@@ -19134,7 +19401,7 @@
         </p:nvSpPr>
         <p:spPr>
           <a:xfrm>
-            <a:off x="7747000" y="1524000"/>
+            <a:off x="7880350" y="1524000"/>
             <a:ext cx="3810000" cy="4724400"/>
           </a:xfrm>
           <a:prstGeom prst="rect">
@@ -19163,10 +19430,11 @@
           </a:fontRef>
         </p:style>
         <p:txBody>
-          <a:bodyPr rtlCol="0" anchor="ctr" lIns="0" rIns="0" tIns="0" bIns="0"/>
+          <a:bodyPr lIns="0" tIns="0" rIns="0" bIns="0" rtlCol="0" anchor="ctr"/>
           <a:lstStyle/>
           <a:p>
             <a:pPr algn="ctr"/>
+            <a:endParaRPr/>
           </a:p>
         </p:txBody>
       </p:sp>
@@ -19186,7 +19454,7 @@
         </p:blipFill>
         <p:spPr>
           <a:xfrm>
-            <a:off x="7747000" y="1524000"/>
+            <a:off x="7908925" y="1524000"/>
             <a:ext cx="3810000" cy="4724400"/>
           </a:xfrm>
           <a:prstGeom prst="rect">
@@ -19202,7 +19470,7 @@
         </p:nvSpPr>
         <p:spPr>
           <a:xfrm>
-            <a:off x="7899400" y="1676400"/>
+            <a:off x="8032750" y="1676400"/>
             <a:ext cx="1143000" cy="254000"/>
           </a:xfrm>
           <a:prstGeom prst="rect">
@@ -19231,10 +19499,11 @@
           </a:fontRef>
         </p:style>
         <p:txBody>
-          <a:bodyPr rtlCol="0" anchor="ctr" lIns="0" rIns="0" tIns="0" bIns="0"/>
+          <a:bodyPr lIns="0" tIns="0" rIns="0" bIns="0" rtlCol="0" anchor="ctr"/>
           <a:lstStyle/>
           <a:p>
             <a:pPr algn="ctr"/>
+            <a:endParaRPr/>
           </a:p>
         </p:txBody>
       </p:sp>
@@ -19246,7 +19515,7 @@
         </p:nvSpPr>
         <p:spPr>
           <a:xfrm>
-            <a:off x="7899400" y="1676400"/>
+            <a:off x="8032750" y="1676400"/>
             <a:ext cx="1143000" cy="254000"/>
           </a:xfrm>
           <a:prstGeom prst="rect">
@@ -19273,7 +19542,7 @@
           </a:fontRef>
         </p:style>
         <p:txBody>
-          <a:bodyPr rtlCol="0" anchor="ctr" wrap="square" lIns="50800" rIns="50800" tIns="50800" bIns="50800"/>
+          <a:bodyPr wrap="square" lIns="50800" tIns="50800" rIns="50800" bIns="50800" rtlCol="0" anchor="ctr"/>
           <a:lstStyle/>
           <a:p>
             <a:pPr algn="ctr">
@@ -19302,7 +19571,7 @@
 </file>
 
 <file path=ppt/slides/slide9.xml><?xml version="1.0" encoding="utf-8"?>
-<p:sld xmlns:a="http://schemas.openxmlformats.org/drawingml/2006/main" xmlns:p="http://schemas.openxmlformats.org/presentationml/2006/main" xmlns:r="http://schemas.openxmlformats.org/officeDocument/2006/relationships">
+<p:sld xmlns:a="http://schemas.openxmlformats.org/drawingml/2006/main" xmlns:r="http://schemas.openxmlformats.org/officeDocument/2006/relationships" xmlns:p="http://schemas.openxmlformats.org/presentationml/2006/main">
   <p:cSld>
     <p:spTree>
       <p:nvGrpSpPr>
@@ -19310,7 +19579,14 @@
         <p:cNvGrpSpPr/>
         <p:nvPr/>
       </p:nvGrpSpPr>
-      <p:grpSpPr/>
+      <p:grpSpPr>
+        <a:xfrm>
+          <a:off x="0" y="0"/>
+          <a:ext cx="0" cy="0"/>
+          <a:chOff x="0" y="0"/>
+          <a:chExt cx="0" cy="0"/>
+        </a:xfrm>
+      </p:grpSpPr>
       <p:sp>
         <p:nvSpPr>
           <p:cNvPr id="2" name="Rectangle 1"/>
@@ -19348,10 +19624,11 @@
           </a:fontRef>
         </p:style>
         <p:txBody>
-          <a:bodyPr rtlCol="0" anchor="ctr" lIns="0" rIns="0" tIns="0" bIns="0"/>
+          <a:bodyPr lIns="0" tIns="0" rIns="0" bIns="0" rtlCol="0" anchor="ctr"/>
           <a:lstStyle/>
           <a:p>
             <a:pPr algn="ctr"/>
+            <a:endParaRPr/>
           </a:p>
         </p:txBody>
       </p:sp>
@@ -19390,7 +19667,7 @@
           </a:fontRef>
         </p:style>
         <p:txBody>
-          <a:bodyPr rtlCol="0" anchor="ctr" wrap="square" lIns="50800" rIns="50800" tIns="50800" bIns="50800"/>
+          <a:bodyPr wrap="square" lIns="50800" tIns="50800" rIns="50800" bIns="50800" rtlCol="0" anchor="ctr"/>
           <a:lstStyle/>
           <a:p>
             <a:pPr algn="l">
@@ -19454,7 +19731,7 @@
           </a:fontRef>
         </p:style>
         <p:txBody>
-          <a:bodyPr rtlCol="0" anchor="ctr" wrap="square" lIns="50800" rIns="50800" tIns="50800" bIns="50800"/>
+          <a:bodyPr wrap="square" lIns="50800" tIns="50800" rIns="50800" bIns="50800" rtlCol="0" anchor="ctr"/>
           <a:lstStyle/>
           <a:p>
             <a:pPr algn="r">
@@ -19515,6 +19792,7 @@
           <a:lstStyle/>
           <a:p>
             <a:pPr algn="ctr"/>
+            <a:endParaRPr/>
           </a:p>
         </p:txBody>
       </p:sp>
@@ -19553,7 +19831,7 @@
           </a:fontRef>
         </p:style>
         <p:txBody>
-          <a:bodyPr rtlCol="0" anchor="ctr" wrap="square" lIns="50800" rIns="50800" tIns="50800" bIns="50800"/>
+          <a:bodyPr wrap="square" lIns="50800" tIns="50800" rIns="50800" bIns="50800" rtlCol="0" anchor="ctr"/>
           <a:lstStyle/>
           <a:p>
             <a:pPr algn="l">
@@ -19582,7 +19860,7 @@
         <p:spPr>
           <a:xfrm>
             <a:off x="609600" y="685800"/>
-            <a:ext cx="11112500" cy="508000"/>
+            <a:ext cx="11112500" cy="736600"/>
           </a:xfrm>
           <a:prstGeom prst="rect">
             <a:avLst/>
@@ -19608,7 +19886,7 @@
           </a:fontRef>
         </p:style>
         <p:txBody>
-          <a:bodyPr rtlCol="0" anchor="t" wrap="square" lIns="50800" rIns="50800" tIns="50800" bIns="50800"/>
+          <a:bodyPr wrap="square" lIns="50800" tIns="50800" rIns="50800" bIns="50800" rtlCol="0" anchor="t"/>
           <a:lstStyle/>
           <a:p>
             <a:pPr algn="l">
@@ -19633,6 +19911,15 @@
                 <a:latin typeface="Yu Gothic UI"/>
               </a:rPr>
               <a:t>どの業務に、どのAIを</a:t>
+            </a:r>
+            <a:r>
+              <a:rPr lang="ja-JP" altLang="en-US" sz="4000" b="1" i="0">
+                <a:solidFill>
+                  <a:srgbClr val="00B7D4"/>
+                </a:solidFill>
+                <a:latin typeface="Yu Gothic UI"/>
+              </a:rPr>
+              <a:t>使うのか</a:t>
             </a:r>
             <a:r>
               <a:rPr sz="4000" b="1" i="0">
@@ -19683,10 +19970,11 @@
           </a:fontRef>
         </p:style>
         <p:txBody>
-          <a:bodyPr rtlCol="0" anchor="ctr" lIns="0" rIns="0" tIns="0" bIns="0"/>
+          <a:bodyPr lIns="0" tIns="0" rIns="0" bIns="0" rtlCol="0" anchor="ctr"/>
           <a:lstStyle/>
           <a:p>
             <a:pPr algn="ctr"/>
+            <a:endParaRPr/>
           </a:p>
         </p:txBody>
       </p:sp>
@@ -19727,10 +20015,11 @@
           </a:fontRef>
         </p:style>
         <p:txBody>
-          <a:bodyPr rtlCol="0" anchor="ctr" lIns="0" rIns="0" tIns="0" bIns="0"/>
+          <a:bodyPr lIns="0" tIns="0" rIns="0" bIns="0" rtlCol="0" anchor="ctr"/>
           <a:lstStyle/>
           <a:p>
             <a:pPr algn="ctr"/>
+            <a:endParaRPr/>
           </a:p>
         </p:txBody>
       </p:sp>
@@ -19771,10 +20060,11 @@
           </a:fontRef>
         </p:style>
         <p:txBody>
-          <a:bodyPr rtlCol="0" anchor="ctr" lIns="0" rIns="0" tIns="0" bIns="0"/>
+          <a:bodyPr lIns="0" tIns="0" rIns="0" bIns="0" rtlCol="0" anchor="ctr"/>
           <a:lstStyle/>
           <a:p>
             <a:pPr algn="ctr"/>
+            <a:endParaRPr/>
           </a:p>
         </p:txBody>
       </p:sp>
@@ -19813,7 +20103,7 @@
           </a:fontRef>
         </p:style>
         <p:txBody>
-          <a:bodyPr rtlCol="0" anchor="ctr" wrap="square" lIns="50800" rIns="50800" tIns="50800" bIns="50800"/>
+          <a:bodyPr wrap="square" lIns="50800" tIns="50800" rIns="50800" bIns="50800" rtlCol="0" anchor="ctr"/>
           <a:lstStyle/>
           <a:p>
             <a:pPr algn="ctr">
@@ -19841,7 +20131,7 @@
         </p:nvSpPr>
         <p:spPr>
           <a:xfrm>
-            <a:off x="863600" y="1993900"/>
+            <a:off x="863600" y="1917700"/>
             <a:ext cx="6477000" cy="381000"/>
           </a:xfrm>
           <a:prstGeom prst="rect">
@@ -19868,7 +20158,7 @@
           </a:fontRef>
         </p:style>
         <p:txBody>
-          <a:bodyPr rtlCol="0" anchor="t" wrap="square" lIns="50800" rIns="50800" tIns="50800" bIns="50800"/>
+          <a:bodyPr wrap="square" lIns="50800" tIns="50800" rIns="50800" bIns="50800" rtlCol="0" anchor="t"/>
           <a:lstStyle/>
           <a:p>
             <a:pPr algn="l">
@@ -19897,7 +20187,7 @@
         <p:spPr>
           <a:xfrm>
             <a:off x="863600" y="2413000"/>
-            <a:ext cx="6477000" cy="1270000"/>
+            <a:ext cx="6731000" cy="1270000"/>
           </a:xfrm>
           <a:prstGeom prst="rect">
             <a:avLst/>
@@ -19923,7 +20213,7 @@
           </a:fontRef>
         </p:style>
         <p:txBody>
-          <a:bodyPr rtlCol="0" anchor="t" wrap="square" lIns="0" rIns="0" tIns="0" bIns="0"/>
+          <a:bodyPr wrap="square" lIns="0" tIns="0" rIns="0" bIns="0" rtlCol="0" anchor="t"/>
           <a:lstStyle/>
           <a:p>
             <a:pPr algn="l">
@@ -20075,10 +20365,11 @@
           </a:fontRef>
         </p:style>
         <p:txBody>
-          <a:bodyPr rtlCol="0" anchor="ctr" lIns="0" rIns="0" tIns="0" bIns="0"/>
+          <a:bodyPr lIns="0" tIns="0" rIns="0" bIns="0" rtlCol="0" anchor="ctr"/>
           <a:lstStyle/>
           <a:p>
             <a:pPr algn="ctr"/>
+            <a:endParaRPr/>
           </a:p>
         </p:txBody>
       </p:sp>
@@ -20119,10 +20410,11 @@
           </a:fontRef>
         </p:style>
         <p:txBody>
-          <a:bodyPr rtlCol="0" anchor="ctr" lIns="0" rIns="0" tIns="0" bIns="0"/>
+          <a:bodyPr lIns="0" tIns="0" rIns="0" bIns="0" rtlCol="0" anchor="ctr"/>
           <a:lstStyle/>
           <a:p>
             <a:pPr algn="ctr"/>
+            <a:endParaRPr/>
           </a:p>
         </p:txBody>
       </p:sp>
@@ -20163,10 +20455,11 @@
           </a:fontRef>
         </p:style>
         <p:txBody>
-          <a:bodyPr rtlCol="0" anchor="ctr" lIns="0" rIns="0" tIns="0" bIns="0"/>
+          <a:bodyPr lIns="0" tIns="0" rIns="0" bIns="0" rtlCol="0" anchor="ctr"/>
           <a:lstStyle/>
           <a:p>
             <a:pPr algn="ctr"/>
+            <a:endParaRPr/>
           </a:p>
         </p:txBody>
       </p:sp>
@@ -20205,7 +20498,7 @@
           </a:fontRef>
         </p:style>
         <p:txBody>
-          <a:bodyPr rtlCol="0" anchor="ctr" wrap="square" lIns="50800" rIns="50800" tIns="50800" bIns="50800"/>
+          <a:bodyPr wrap="square" lIns="50800" tIns="50800" rIns="50800" bIns="50800" rtlCol="0" anchor="ctr"/>
           <a:lstStyle/>
           <a:p>
             <a:pPr algn="ctr">
@@ -20233,7 +20526,7 @@
         </p:nvSpPr>
         <p:spPr>
           <a:xfrm>
-            <a:off x="863600" y="4432300"/>
+            <a:off x="863600" y="4356100"/>
             <a:ext cx="6477000" cy="381000"/>
           </a:xfrm>
           <a:prstGeom prst="rect">
@@ -20260,7 +20553,7 @@
           </a:fontRef>
         </p:style>
         <p:txBody>
-          <a:bodyPr rtlCol="0" anchor="t" wrap="square" lIns="50800" rIns="50800" tIns="50800" bIns="50800"/>
+          <a:bodyPr wrap="square" lIns="50800" tIns="50800" rIns="50800" bIns="50800" rtlCol="0" anchor="t"/>
           <a:lstStyle/>
           <a:p>
             <a:pPr algn="l">
@@ -20289,7 +20582,7 @@
         <p:spPr>
           <a:xfrm>
             <a:off x="863600" y="4851400"/>
-            <a:ext cx="6477000" cy="1270000"/>
+            <a:ext cx="6731000" cy="1270000"/>
           </a:xfrm>
           <a:prstGeom prst="rect">
             <a:avLst/>
@@ -20315,7 +20608,7 @@
           </a:fontRef>
         </p:style>
         <p:txBody>
-          <a:bodyPr rtlCol="0" anchor="t" wrap="square" lIns="0" rIns="0" tIns="0" bIns="0"/>
+          <a:bodyPr wrap="square" lIns="0" tIns="0" rIns="0" bIns="0" rtlCol="0" anchor="t"/>
           <a:lstStyle/>
           <a:p>
             <a:pPr algn="l">
@@ -20485,10 +20778,11 @@
           </a:fontRef>
         </p:style>
         <p:txBody>
-          <a:bodyPr rtlCol="0" anchor="ctr" lIns="0" rIns="0" tIns="0" bIns="0"/>
+          <a:bodyPr lIns="0" tIns="0" rIns="0" bIns="0" rtlCol="0" anchor="ctr"/>
           <a:lstStyle/>
           <a:p>
             <a:pPr algn="ctr"/>
+            <a:endParaRPr/>
           </a:p>
         </p:txBody>
       </p:sp>
@@ -20553,10 +20847,11 @@
           </a:fontRef>
         </p:style>
         <p:txBody>
-          <a:bodyPr rtlCol="0" anchor="ctr" lIns="0" rIns="0" tIns="0" bIns="0"/>
+          <a:bodyPr lIns="0" tIns="0" rIns="0" bIns="0" rtlCol="0" anchor="ctr"/>
           <a:lstStyle/>
           <a:p>
             <a:pPr algn="ctr"/>
+            <a:endParaRPr/>
           </a:p>
         </p:txBody>
       </p:sp>
@@ -20595,7 +20890,7 @@
           </a:fontRef>
         </p:style>
         <p:txBody>
-          <a:bodyPr rtlCol="0" anchor="ctr" wrap="square" lIns="50800" rIns="50800" tIns="50800" bIns="50800"/>
+          <a:bodyPr wrap="square" lIns="50800" tIns="50800" rIns="50800" bIns="50800" rtlCol="0" anchor="ctr"/>
           <a:lstStyle/>
           <a:p>
             <a:pPr algn="ctr">
